--- a/deliverables/AWS-Architecture-Design-Document.pptx
+++ b/deliverables/AWS-Architecture-Design-Document.pptx
@@ -11,6 +11,8 @@
     <p:sldId id="259" r:id="rId10"/>
     <p:sldId id="260" r:id="rId11"/>
     <p:sldId id="261" r:id="rId12"/>
+    <p:sldId id="262" r:id="rId13"/>
+    <p:sldId id="263" r:id="rId14"/>
   </p:sldIdLst>
   <p:sldSz cx="12191695" cy="6858000" type="screen4x3"/>
   <p:notesSz cx="6858000" cy="9144000"/>
@@ -3095,142 +3097,25 @@
       <p:grpSpPr/>
       <p:sp>
         <p:nvSpPr>
-          <p:cNvPr id="2" name="TextBox 1"/>
-          <p:cNvSpPr txBox="1"/>
-          <p:nvPr/>
-        </p:nvSpPr>
-        <p:spPr>
-          <a:xfrm>
-            <a:off x="411480" y="228600"/>
-            <a:ext cx="11155680" cy="731520"/>
-          </a:xfrm>
-          <a:prstGeom prst="rect">
-            <a:avLst/>
-          </a:prstGeom>
-          <a:noFill/>
-        </p:spPr>
-        <p:txBody>
-          <a:bodyPr wrap="none">
-            <a:spAutoFit/>
-          </a:bodyPr>
-          <a:lstStyle/>
-          <a:p>
-            <a:r>
-              <a:rPr sz="2800" b="1">
-                <a:solidFill>
-                  <a:srgbClr val="0E4887"/>
-                </a:solidFill>
-              </a:rPr>
-              <a:t>HMSG WEC Racing PRD Architecture Design</a:t>
-            </a:r>
-          </a:p>
-          <a:p>
-            <a:pPr>
-              <a:defRPr sz="1200">
-                <a:solidFill>
-                  <a:srgbClr val="6E6E6E"/>
-                </a:solidFill>
-              </a:defRPr>
-            </a:pPr>
-            <a:r>
-              <a:t>HMSG WEC Racing PRD | eu-central-1 | Week 1 deliverable</a:t>
-            </a:r>
-          </a:p>
-        </p:txBody>
-      </p:sp>
-      <p:sp>
-        <p:nvSpPr>
-          <p:cNvPr id="3" name="TextBox 2"/>
-          <p:cNvSpPr txBox="1"/>
-          <p:nvPr/>
-        </p:nvSpPr>
-        <p:spPr>
-          <a:xfrm>
-            <a:off x="548640" y="1005840"/>
-            <a:ext cx="5303520" cy="2103120"/>
-          </a:xfrm>
-          <a:prstGeom prst="rect">
-            <a:avLst/>
-          </a:prstGeom>
-          <a:noFill/>
-        </p:spPr>
-        <p:txBody>
-          <a:bodyPr wrap="square" lIns="50800" rIns="50800" tIns="25400" bIns="25400">
-            <a:spAutoFit/>
-          </a:bodyPr>
-          <a:lstStyle/>
-          <a:p>
-            <a:pPr>
-              <a:defRPr sz="1800">
-                <a:solidFill>
-                  <a:srgbClr val="2D2D2D"/>
-                </a:solidFill>
-              </a:defRPr>
-            </a:pPr>
-            <a:r>
-              <a:t>Secure access to one Windows EC2 host for SQL Server installation by the client</a:t>
-            </a:r>
-          </a:p>
-          <a:p>
-            <a:pPr>
-              <a:defRPr sz="1800">
-                <a:solidFill>
-                  <a:srgbClr val="2D2D2D"/>
-                </a:solidFill>
-              </a:defRPr>
-            </a:pPr>
-            <a:r>
-              <a:t>AWS Client VPN for developers (SAML / Entra ID)</a:t>
-            </a:r>
-          </a:p>
-          <a:p>
-            <a:pPr>
-              <a:defRPr sz="1800">
-                <a:solidFill>
-                  <a:srgbClr val="2D2D2D"/>
-                </a:solidFill>
-              </a:defRPr>
-            </a:pPr>
-            <a:r>
-              <a:t>Optional Site-to-Site IPsec VPN to the on-premise Hyundai racing site</a:t>
-            </a:r>
-          </a:p>
-          <a:p>
-            <a:pPr>
-              <a:defRPr sz="1800">
-                <a:solidFill>
-                  <a:srgbClr val="2D2D2D"/>
-                </a:solidFill>
-              </a:defRPr>
-            </a:pPr>
-            <a:r>
-              <a:t>Private-by-default design: no public IP on the DB host</a:t>
-            </a:r>
-          </a:p>
-        </p:txBody>
-      </p:sp>
-      <p:sp>
-        <p:nvSpPr>
-          <p:cNvPr id="4" name="Rounded Rectangle 3"/>
+          <p:cNvPr id="2" name="Rectangle 1"/>
           <p:cNvSpPr/>
           <p:nvPr/>
         </p:nvSpPr>
         <p:spPr>
           <a:xfrm>
-            <a:off x="6492240" y="1005840"/>
-            <a:ext cx="5120640" cy="1005840"/>
-          </a:xfrm>
-          <a:prstGeom prst="roundRect">
+            <a:off x="-18288" y="-18288"/>
+            <a:ext cx="12234672" cy="6894576"/>
+          </a:xfrm>
+          <a:prstGeom prst="rect">
             <a:avLst/>
           </a:prstGeom>
           <a:solidFill>
-            <a:srgbClr val="D8E8F8"/>
+            <a:srgbClr val="002C5F"/>
           </a:solidFill>
           <a:ln>
-            <a:solidFill>
-              <a:srgbClr val="0E4887"/>
-            </a:solidFill>
+            <a:noFill/>
           </a:ln>
+          <a:effectLst/>
         </p:spPr>
         <p:style>
           <a:lnRef idx="1">
@@ -3251,40 +3136,30 @@
           <a:lstStyle/>
           <a:p>
             <a:pPr algn="ctr"/>
-            <a:r>
-              <a:rPr sz="1400" b="1">
-                <a:solidFill>
-                  <a:srgbClr val="2D2D2D"/>
-                </a:solidFill>
-              </a:rPr>
-              <a:t>1 EC2 MSSQL host
-+ Client VPN + Site-to-Site VPN</a:t>
-            </a:r>
-          </a:p>
-        </p:txBody>
-      </p:sp>
-      <p:sp>
-        <p:nvSpPr>
-          <p:cNvPr id="5" name="Rounded Rectangle 4"/>
+          </a:p>
+        </p:txBody>
+      </p:sp>
+      <p:sp>
+        <p:nvSpPr>
+          <p:cNvPr id="3" name="Rectangle 2"/>
           <p:cNvSpPr/>
           <p:nvPr/>
         </p:nvSpPr>
         <p:spPr>
           <a:xfrm>
-            <a:off x="6492240" y="2240280"/>
-            <a:ext cx="2377440" cy="914400"/>
-          </a:xfrm>
-          <a:prstGeom prst="roundRect">
+            <a:off x="0" y="4224528"/>
+            <a:ext cx="12234672" cy="54864"/>
+          </a:xfrm>
+          <a:prstGeom prst="rect">
             <a:avLst/>
           </a:prstGeom>
           <a:solidFill>
-            <a:srgbClr val="E6F2FF"/>
+            <a:srgbClr val="F5A623"/>
           </a:solidFill>
           <a:ln>
-            <a:solidFill>
-              <a:srgbClr val="0E4887"/>
-            </a:solidFill>
+            <a:noFill/>
           </a:ln>
+          <a:effectLst/>
         </p:spPr>
         <p:style>
           <a:lnRef idx="1">
@@ -3305,40 +3180,139 @@
           <a:lstStyle/>
           <a:p>
             <a:pPr algn="ctr"/>
-            <a:r>
-              <a:rPr sz="1600" b="1">
-                <a:solidFill>
-                  <a:srgbClr val="2D2D2D"/>
-                </a:solidFill>
-              </a:rPr>
-              <a:t>VPC
-172.200.0.0/24</a:t>
-            </a:r>
-          </a:p>
-        </p:txBody>
-      </p:sp>
-      <p:sp>
-        <p:nvSpPr>
-          <p:cNvPr id="6" name="Rounded Rectangle 5"/>
+          </a:p>
+        </p:txBody>
+      </p:sp>
+      <p:sp>
+        <p:nvSpPr>
+          <p:cNvPr id="4" name="TextBox 3"/>
+          <p:cNvSpPr txBox="1"/>
+          <p:nvPr/>
+        </p:nvSpPr>
+        <p:spPr>
+          <a:xfrm>
+            <a:off x="822960" y="1051560"/>
+            <a:ext cx="10515600" cy="365760"/>
+          </a:xfrm>
+          <a:prstGeom prst="rect">
+            <a:avLst/>
+          </a:prstGeom>
+          <a:noFill/>
+        </p:spPr>
+        <p:txBody>
+          <a:bodyPr wrap="square" anchor="t" lIns="25400" rIns="25400" tIns="12700" bIns="12700">
+            <a:spAutoFit/>
+          </a:bodyPr>
+          <a:lstStyle/>
+          <a:p>
+            <a:pPr algn="l"/>
+            <a:r>
+              <a:rPr sz="1300" b="1" i="0">
+                <a:solidFill>
+                  <a:srgbClr val="00AAD2"/>
+                </a:solidFill>
+                <a:latin typeface="Calibri"/>
+              </a:rPr>
+              <a:t>PRD · AWS ARCHITECTURE DESIGN DOCUMENT</a:t>
+            </a:r>
+          </a:p>
+        </p:txBody>
+      </p:sp>
+      <p:sp>
+        <p:nvSpPr>
+          <p:cNvPr id="5" name="TextBox 4"/>
+          <p:cNvSpPr txBox="1"/>
+          <p:nvPr/>
+        </p:nvSpPr>
+        <p:spPr>
+          <a:xfrm>
+            <a:off x="822960" y="1417320"/>
+            <a:ext cx="10607040" cy="1188720"/>
+          </a:xfrm>
+          <a:prstGeom prst="rect">
+            <a:avLst/>
+          </a:prstGeom>
+          <a:noFill/>
+        </p:spPr>
+        <p:txBody>
+          <a:bodyPr wrap="square" anchor="t" lIns="25400" rIns="25400" tIns="12700" bIns="12700">
+            <a:spAutoFit/>
+          </a:bodyPr>
+          <a:lstStyle/>
+          <a:p>
+            <a:pPr algn="l"/>
+            <a:r>
+              <a:rPr sz="5200" b="1" i="0">
+                <a:solidFill>
+                  <a:srgbClr val="FFFFFF"/>
+                </a:solidFill>
+                <a:latin typeface="Calibri"/>
+              </a:rPr>
+              <a:t>HMSG WEC Racing</a:t>
+            </a:r>
+          </a:p>
+        </p:txBody>
+      </p:sp>
+      <p:sp>
+        <p:nvSpPr>
+          <p:cNvPr id="6" name="TextBox 5"/>
+          <p:cNvSpPr txBox="1"/>
+          <p:nvPr/>
+        </p:nvSpPr>
+        <p:spPr>
+          <a:xfrm>
+            <a:off x="822960" y="2606040"/>
+            <a:ext cx="10607040" cy="914400"/>
+          </a:xfrm>
+          <a:prstGeom prst="rect">
+            <a:avLst/>
+          </a:prstGeom>
+          <a:noFill/>
+        </p:spPr>
+        <p:txBody>
+          <a:bodyPr wrap="square" anchor="t" lIns="25400" rIns="25400" tIns="12700" bIns="12700">
+            <a:spAutoFit/>
+          </a:bodyPr>
+          <a:lstStyle/>
+          <a:p>
+            <a:pPr algn="l"/>
+            <a:r>
+              <a:rPr sz="1900" b="0" i="0">
+                <a:solidFill>
+                  <a:srgbClr val="D8E4F0"/>
+                </a:solidFill>
+                <a:latin typeface="Calibri"/>
+              </a:rPr>
+              <a:t>Windows MSSQL host · AWS Client VPN (SAML / Entra ID) · Site-to-Site VPN</a:t>
+            </a:r>
+          </a:p>
+        </p:txBody>
+      </p:sp>
+      <p:sp>
+        <p:nvSpPr>
+          <p:cNvPr id="7" name="Rounded Rectangle 6"/>
           <p:cNvSpPr/>
           <p:nvPr/>
         </p:nvSpPr>
         <p:spPr>
           <a:xfrm>
-            <a:off x="9189720" y="2240280"/>
-            <a:ext cx="2423160" cy="914400"/>
+            <a:off x="822960" y="3657600"/>
+            <a:ext cx="2377440" cy="457200"/>
           </a:xfrm>
           <a:prstGeom prst="roundRect">
-            <a:avLst/>
+            <a:avLst>
+              <a:gd name="adj" fmla="val 50000"/>
+            </a:avLst>
           </a:prstGeom>
           <a:solidFill>
-            <a:srgbClr val="E6F2FF"/>
+            <a:srgbClr val="E8F4FA"/>
           </a:solidFill>
-          <a:ln>
+          <a:ln w="12700">
             <a:solidFill>
-              <a:srgbClr val="0E4887"/>
+              <a:srgbClr val="007FA8"/>
             </a:solidFill>
           </a:ln>
+          <a:effectLst/>
         </p:spPr>
         <p:style>
           <a:lnRef idx="1">
@@ -3355,44 +3329,47 @@
           </a:fontRef>
         </p:style>
         <p:txBody>
-          <a:bodyPr rtlCol="0" anchor="ctr"/>
+          <a:bodyPr rtlCol="0" anchor="ctr" wrap="square" lIns="38100" rIns="38100"/>
           <a:lstStyle/>
           <a:p>
             <a:pPr algn="ctr"/>
             <a:r>
-              <a:rPr sz="1600" b="1">
-                <a:solidFill>
-                  <a:srgbClr val="2D2D2D"/>
-                </a:solidFill>
-              </a:rPr>
-              <a:t>eu-central-1
-Frankfurt</a:t>
-            </a:r>
-          </a:p>
-        </p:txBody>
-      </p:sp>
-      <p:sp>
-        <p:nvSpPr>
-          <p:cNvPr id="7" name="Rounded Rectangle 6"/>
+              <a:rPr sz="1200" b="1" i="0">
+                <a:solidFill>
+                  <a:srgbClr val="002C5F"/>
+                </a:solidFill>
+                <a:latin typeface="Calibri"/>
+              </a:rPr>
+              <a:t>eu-central-1 · Frankfurt</a:t>
+            </a:r>
+          </a:p>
+        </p:txBody>
+      </p:sp>
+      <p:sp>
+        <p:nvSpPr>
+          <p:cNvPr id="8" name="Rounded Rectangle 7"/>
           <p:cNvSpPr/>
           <p:nvPr/>
         </p:nvSpPr>
         <p:spPr>
           <a:xfrm>
-            <a:off x="6492240" y="3474720"/>
-            <a:ext cx="5120640" cy="914400"/>
+            <a:off x="3337560" y="3657600"/>
+            <a:ext cx="2148840" cy="457200"/>
           </a:xfrm>
           <a:prstGeom prst="roundRect">
-            <a:avLst/>
+            <a:avLst>
+              <a:gd name="adj" fmla="val 50000"/>
+            </a:avLst>
           </a:prstGeom>
           <a:solidFill>
-            <a:srgbClr val="F6F1E5"/>
+            <a:srgbClr val="E8F4FA"/>
           </a:solidFill>
-          <a:ln>
+          <a:ln w="12700">
             <a:solidFill>
-              <a:srgbClr val="0E4887"/>
+              <a:srgbClr val="007FA8"/>
             </a:solidFill>
           </a:ln>
+          <a:effectLst/>
         </p:spPr>
         <p:style>
           <a:lnRef idx="1">
@@ -3409,17 +3386,110 @@
           </a:fontRef>
         </p:style>
         <p:txBody>
-          <a:bodyPr rtlCol="0" anchor="ctr"/>
+          <a:bodyPr rtlCol="0" anchor="ctr" wrap="square" lIns="38100" rIns="38100"/>
           <a:lstStyle/>
           <a:p>
             <a:pPr algn="ctr"/>
             <a:r>
-              <a:rPr sz="1400" b="1">
-                <a:solidFill>
-                  <a:srgbClr val="D17B0D"/>
-                </a:solidFill>
-              </a:rPr>
-              <a:t>Deliverables: architecture deck, inventory, admin guide, recovery/VPN runbook, completion checklist</a:t>
+              <a:rPr sz="1200" b="1" i="0">
+                <a:solidFill>
+                  <a:srgbClr val="002C5F"/>
+                </a:solidFill>
+                <a:latin typeface="Calibri"/>
+              </a:rPr>
+              <a:t>Stack hmsg-rac-prd</a:t>
+            </a:r>
+          </a:p>
+        </p:txBody>
+      </p:sp>
+      <p:sp>
+        <p:nvSpPr>
+          <p:cNvPr id="9" name="Rounded Rectangle 8"/>
+          <p:cNvSpPr/>
+          <p:nvPr/>
+        </p:nvSpPr>
+        <p:spPr>
+          <a:xfrm>
+            <a:off x="5623560" y="3657600"/>
+            <a:ext cx="2788920" cy="457200"/>
+          </a:xfrm>
+          <a:prstGeom prst="roundRect">
+            <a:avLst>
+              <a:gd name="adj" fmla="val 50000"/>
+            </a:avLst>
+          </a:prstGeom>
+          <a:solidFill>
+            <a:srgbClr val="FDF3E7"/>
+          </a:solidFill>
+          <a:ln w="12700">
+            <a:solidFill>
+              <a:srgbClr val="F5A623"/>
+            </a:solidFill>
+          </a:ln>
+          <a:effectLst/>
+        </p:spPr>
+        <p:style>
+          <a:lnRef idx="1">
+            <a:schemeClr val="accent1"/>
+          </a:lnRef>
+          <a:fillRef idx="3">
+            <a:schemeClr val="accent1"/>
+          </a:fillRef>
+          <a:effectRef idx="2">
+            <a:schemeClr val="accent1"/>
+          </a:effectRef>
+          <a:fontRef idx="minor">
+            <a:schemeClr val="lt1"/>
+          </a:fontRef>
+        </p:style>
+        <p:txBody>
+          <a:bodyPr rtlCol="0" anchor="ctr" wrap="square" lIns="38100" rIns="38100"/>
+          <a:lstStyle/>
+          <a:p>
+            <a:pPr algn="ctr"/>
+            <a:r>
+              <a:rPr sz="1200" b="1" i="0">
+                <a:solidFill>
+                  <a:srgbClr val="002C5F"/>
+                </a:solidFill>
+                <a:latin typeface="Calibri"/>
+              </a:rPr>
+              <a:t>Week 1 deliverable</a:t>
+            </a:r>
+          </a:p>
+        </p:txBody>
+      </p:sp>
+      <p:sp>
+        <p:nvSpPr>
+          <p:cNvPr id="10" name="TextBox 9"/>
+          <p:cNvSpPr txBox="1"/>
+          <p:nvPr/>
+        </p:nvSpPr>
+        <p:spPr>
+          <a:xfrm>
+            <a:off x="822960" y="6126480"/>
+            <a:ext cx="10515600" cy="320040"/>
+          </a:xfrm>
+          <a:prstGeom prst="rect">
+            <a:avLst/>
+          </a:prstGeom>
+          <a:noFill/>
+        </p:spPr>
+        <p:txBody>
+          <a:bodyPr wrap="square" anchor="t" lIns="25400" rIns="25400" tIns="12700" bIns="12700">
+            <a:spAutoFit/>
+          </a:bodyPr>
+          <a:lstStyle/>
+          <a:p>
+            <a:pPr algn="l"/>
+            <a:r>
+              <a:rPr sz="1100" b="0" i="0">
+                <a:solidFill>
+                  <a:srgbClr val="9FB4C8"/>
+                </a:solidFill>
+                <a:latin typeface="Calibri"/>
+              </a:rPr>
+              <a:t>Prepared by the HAEE Cloud Team · 19 August 2026</a:t>
             </a:r>
           </a:p>
         </p:txBody>
@@ -3450,8 +3520,8 @@
         </p:nvSpPr>
         <p:spPr>
           <a:xfrm>
-            <a:off x="411480" y="228600"/>
-            <a:ext cx="11155680" cy="731520"/>
+            <a:off x="502920" y="256032"/>
+            <a:ext cx="11155680" cy="274320"/>
           </a:xfrm>
           <a:prstGeom prst="rect">
             <a:avLst/>
@@ -3459,18 +3529,20 @@
           <a:noFill/>
         </p:spPr>
         <p:txBody>
-          <a:bodyPr wrap="none">
+          <a:bodyPr wrap="square" anchor="t" lIns="25400" rIns="25400" tIns="12700" bIns="12700">
             <a:spAutoFit/>
           </a:bodyPr>
           <a:lstStyle/>
           <a:p>
-            <a:r>
-              <a:rPr sz="2800" b="1">
-                <a:solidFill>
-                  <a:srgbClr val="0E4887"/>
-                </a:solidFill>
-              </a:rPr>
-              <a:t>Requirements Summary</a:t>
+            <a:pPr algn="l"/>
+            <a:r>
+              <a:rPr sz="1100" b="1" i="0">
+                <a:solidFill>
+                  <a:srgbClr val="00AAD2"/>
+                </a:solidFill>
+                <a:latin typeface="Calibri"/>
+              </a:rPr>
+              <a:t>CONTENTS</a:t>
             </a:r>
           </a:p>
         </p:txBody>
@@ -3483,8 +3555,8 @@
         </p:nvSpPr>
         <p:spPr>
           <a:xfrm>
-            <a:off x="548640" y="1005840"/>
-            <a:ext cx="5486400" cy="5120640"/>
+            <a:off x="502920" y="502920"/>
+            <a:ext cx="11155680" cy="566928"/>
           </a:xfrm>
           <a:prstGeom prst="rect">
             <a:avLst/>
@@ -3492,106 +3564,45 @@
           <a:noFill/>
         </p:spPr>
         <p:txBody>
-          <a:bodyPr wrap="square" lIns="50800" rIns="50800" tIns="25400" bIns="25400">
+          <a:bodyPr wrap="square" anchor="t" lIns="25400" rIns="25400" tIns="12700" bIns="12700">
             <a:spAutoFit/>
           </a:bodyPr>
           <a:lstStyle/>
           <a:p>
-            <a:pPr>
-              <a:defRPr sz="1800">
-                <a:solidFill>
-                  <a:srgbClr val="2D2D2D"/>
-                </a:solidFill>
-              </a:defRPr>
-            </a:pPr>
-            <a:r>
-              <a:t>One Windows Server 2022 EC2 instance (m7i.2xlarge)</a:t>
-            </a:r>
-          </a:p>
-          <a:p>
-            <a:pPr>
-              <a:defRPr sz="1800">
-                <a:solidFill>
-                  <a:srgbClr val="2D2D2D"/>
-                </a:solidFill>
-              </a:defRPr>
-            </a:pPr>
-            <a:r>
-              <a:t>Client installs SQL Server on the EC2 host</a:t>
-            </a:r>
-          </a:p>
-          <a:p>
-            <a:pPr>
-              <a:defRPr sz="1800">
-                <a:solidFill>
-                  <a:srgbClr val="2D2D2D"/>
-                </a:solidFill>
-              </a:defRPr>
-            </a:pPr>
-            <a:r>
-              <a:t>Developers connect through AWS Client VPN and RDP to the private host</a:t>
-            </a:r>
-          </a:p>
-          <a:p>
-            <a:pPr>
-              <a:defRPr sz="1800">
-                <a:solidFill>
-                  <a:srgbClr val="2D2D2D"/>
-                </a:solidFill>
-              </a:defRPr>
-            </a:pPr>
-            <a:r>
-              <a:t>On-prem connectivity via Site-to-Site VPN when the client supplies the gateway IP and on-prem CIDR</a:t>
-            </a:r>
-          </a:p>
-          <a:p>
-            <a:pPr>
-              <a:defRPr sz="1800">
-                <a:solidFill>
-                  <a:srgbClr val="2D2D2D"/>
-                </a:solidFill>
-              </a:defRPr>
-            </a:pPr>
-            <a:r>
-              <a:t>Microsoft Entra ID SSO for VPN authentication is client-side responsibility</a:t>
-            </a:r>
-          </a:p>
-          <a:p>
-            <a:pPr>
-              <a:defRPr sz="1800">
-                <a:solidFill>
-                  <a:srgbClr val="2D2D2D"/>
-                </a:solidFill>
-              </a:defRPr>
-            </a:pPr>
-            <a:r>
-              <a:t>All deliverables are due by project completion, except the architecture deck (Week 1)</a:t>
-            </a:r>
-          </a:p>
-        </p:txBody>
-      </p:sp>
-      <p:sp>
-        <p:nvSpPr>
-          <p:cNvPr id="4" name="Rounded Rectangle 3"/>
+            <a:pPr algn="l"/>
+            <a:r>
+              <a:rPr sz="2900" b="1" i="0">
+                <a:solidFill>
+                  <a:srgbClr val="002C5F"/>
+                </a:solidFill>
+                <a:latin typeface="Calibri"/>
+              </a:rPr>
+              <a:t>Agenda</a:t>
+            </a:r>
+          </a:p>
+        </p:txBody>
+      </p:sp>
+      <p:sp>
+        <p:nvSpPr>
+          <p:cNvPr id="4" name="Rectangle 3"/>
           <p:cNvSpPr/>
           <p:nvPr/>
         </p:nvSpPr>
         <p:spPr>
           <a:xfrm>
-            <a:off x="6400800" y="1097280"/>
-            <a:ext cx="5212080" cy="731520"/>
-          </a:xfrm>
-          <a:prstGeom prst="roundRect">
+            <a:off x="521207" y="1170432"/>
+            <a:ext cx="1554480" cy="41148"/>
+          </a:xfrm>
+          <a:prstGeom prst="rect">
             <a:avLst/>
           </a:prstGeom>
           <a:solidFill>
-            <a:srgbClr val="E6F2FF"/>
+            <a:srgbClr val="F5A623"/>
           </a:solidFill>
           <a:ln>
-            <a:solidFill>
-              <a:srgbClr val="0E4887"/>
-            </a:solidFill>
+            <a:noFill/>
           </a:ln>
+          <a:effectLst/>
         </p:spPr>
         <p:style>
           <a:lnRef idx="1">
@@ -3612,27 +3623,74 @@
           <a:lstStyle/>
           <a:p>
             <a:pPr algn="ctr"/>
-            <a:r>
-              <a:rPr sz="1600" b="1">
-                <a:solidFill>
-                  <a:srgbClr val="2D2D2D"/>
-                </a:solidFill>
-              </a:rPr>
-              <a:t>Key inputs from the client</a:t>
-            </a:r>
-          </a:p>
-        </p:txBody>
-      </p:sp>
-      <p:sp>
-        <p:nvSpPr>
-          <p:cNvPr id="5" name="TextBox 4"/>
+          </a:p>
+        </p:txBody>
+      </p:sp>
+      <p:sp>
+        <p:nvSpPr>
+          <p:cNvPr id="5" name="Rounded Rectangle 4"/>
+          <p:cNvSpPr/>
+          <p:nvPr/>
+        </p:nvSpPr>
+        <p:spPr>
+          <a:xfrm>
+            <a:off x="685800" y="1600200"/>
+            <a:ext cx="868680" cy="621792"/>
+          </a:xfrm>
+          <a:prstGeom prst="roundRect">
+            <a:avLst>
+              <a:gd name="adj" fmla="val 50000"/>
+            </a:avLst>
+          </a:prstGeom>
+          <a:solidFill>
+            <a:srgbClr val="002C5F"/>
+          </a:solidFill>
+          <a:ln>
+            <a:noFill/>
+          </a:ln>
+          <a:effectLst/>
+        </p:spPr>
+        <p:style>
+          <a:lnRef idx="1">
+            <a:schemeClr val="accent1"/>
+          </a:lnRef>
+          <a:fillRef idx="3">
+            <a:schemeClr val="accent1"/>
+          </a:fillRef>
+          <a:effectRef idx="2">
+            <a:schemeClr val="accent1"/>
+          </a:effectRef>
+          <a:fontRef idx="minor">
+            <a:schemeClr val="lt1"/>
+          </a:fontRef>
+        </p:style>
+        <p:txBody>
+          <a:bodyPr rtlCol="0" anchor="ctr" wrap="square" lIns="38100" rIns="38100"/>
+          <a:lstStyle/>
+          <a:p>
+            <a:pPr algn="ctr"/>
+            <a:r>
+              <a:rPr sz="2000" b="1" i="0">
+                <a:solidFill>
+                  <a:srgbClr val="FFFFFF"/>
+                </a:solidFill>
+                <a:latin typeface="Calibri"/>
+              </a:rPr>
+              <a:t>01</a:t>
+            </a:r>
+          </a:p>
+        </p:txBody>
+      </p:sp>
+      <p:sp>
+        <p:nvSpPr>
+          <p:cNvPr id="6" name="TextBox 5"/>
           <p:cNvSpPr txBox="1"/>
           <p:nvPr/>
         </p:nvSpPr>
         <p:spPr>
           <a:xfrm>
-            <a:off x="6446520" y="1828800"/>
-            <a:ext cx="5029200" cy="3474720"/>
+            <a:off x="1828800" y="1728216"/>
+            <a:ext cx="8778240" cy="411480"/>
           </a:xfrm>
           <a:prstGeom prst="rect">
             <a:avLst/>
@@ -3640,56 +3698,804 @@
           <a:noFill/>
         </p:spPr>
         <p:txBody>
-          <a:bodyPr wrap="square" lIns="50800" rIns="50800" tIns="25400" bIns="25400">
+          <a:bodyPr wrap="square" anchor="t" lIns="25400" rIns="25400" tIns="12700" bIns="12700">
             <a:spAutoFit/>
           </a:bodyPr>
           <a:lstStyle/>
           <a:p>
-            <a:pPr>
-              <a:defRPr sz="1800">
-                <a:solidFill>
-                  <a:srgbClr val="2D2D2D"/>
-                </a:solidFill>
-              </a:defRPr>
-            </a:pPr>
-            <a:r>
-              <a:t>CustomerGatewayIp and OnPremCidr</a:t>
-            </a:r>
-          </a:p>
-          <a:p>
-            <a:pPr>
-              <a:defRPr sz="1800">
-                <a:solidFill>
-                  <a:srgbClr val="2D2D2D"/>
-                </a:solidFill>
-              </a:defRPr>
-            </a:pPr>
-            <a:r>
-              <a:t>Entra ID Federation Metadata XML</a:t>
-            </a:r>
-          </a:p>
-          <a:p>
-            <a:pPr>
-              <a:defRPr sz="1800">
-                <a:solidFill>
-                  <a:srgbClr val="2D2D2D"/>
-                </a:solidFill>
-              </a:defRPr>
-            </a:pPr>
-            <a:r>
-              <a:t>ACM certificate path (public DNS or imported certificate)</a:t>
-            </a:r>
-          </a:p>
-          <a:p>
-            <a:pPr>
-              <a:defRPr sz="1800">
-                <a:solidFill>
-                  <a:srgbClr val="2D2D2D"/>
-                </a:solidFill>
-              </a:defRPr>
-            </a:pPr>
-            <a:r>
-              <a:t>VPN user/group assignment policy</a:t>
+            <a:pPr algn="l"/>
+            <a:r>
+              <a:rPr sz="1700" b="1" i="0">
+                <a:solidFill>
+                  <a:srgbClr val="002C5F"/>
+                </a:solidFill>
+                <a:latin typeface="Calibri"/>
+              </a:rPr>
+              <a:t>Requirements at a glance</a:t>
+            </a:r>
+          </a:p>
+        </p:txBody>
+      </p:sp>
+      <p:sp>
+        <p:nvSpPr>
+          <p:cNvPr id="7" name="Rectangle 6"/>
+          <p:cNvSpPr/>
+          <p:nvPr/>
+        </p:nvSpPr>
+        <p:spPr>
+          <a:xfrm>
+            <a:off x="1847088" y="2167128"/>
+            <a:ext cx="8778240" cy="12801"/>
+          </a:xfrm>
+          <a:prstGeom prst="rect">
+            <a:avLst/>
+          </a:prstGeom>
+          <a:solidFill>
+            <a:srgbClr val="BFCDDA"/>
+          </a:solidFill>
+          <a:ln>
+            <a:noFill/>
+          </a:ln>
+          <a:effectLst/>
+        </p:spPr>
+        <p:style>
+          <a:lnRef idx="1">
+            <a:schemeClr val="accent1"/>
+          </a:lnRef>
+          <a:fillRef idx="3">
+            <a:schemeClr val="accent1"/>
+          </a:fillRef>
+          <a:effectRef idx="2">
+            <a:schemeClr val="accent1"/>
+          </a:effectRef>
+          <a:fontRef idx="minor">
+            <a:schemeClr val="lt1"/>
+          </a:fontRef>
+        </p:style>
+        <p:txBody>
+          <a:bodyPr rtlCol="0" anchor="ctr"/>
+          <a:lstStyle/>
+          <a:p>
+            <a:pPr algn="ctr"/>
+          </a:p>
+        </p:txBody>
+      </p:sp>
+      <p:sp>
+        <p:nvSpPr>
+          <p:cNvPr id="8" name="Rounded Rectangle 7"/>
+          <p:cNvSpPr/>
+          <p:nvPr/>
+        </p:nvSpPr>
+        <p:spPr>
+          <a:xfrm>
+            <a:off x="685800" y="2350008"/>
+            <a:ext cx="868680" cy="621792"/>
+          </a:xfrm>
+          <a:prstGeom prst="roundRect">
+            <a:avLst>
+              <a:gd name="adj" fmla="val 50000"/>
+            </a:avLst>
+          </a:prstGeom>
+          <a:solidFill>
+            <a:srgbClr val="002C5F"/>
+          </a:solidFill>
+          <a:ln>
+            <a:noFill/>
+          </a:ln>
+          <a:effectLst/>
+        </p:spPr>
+        <p:style>
+          <a:lnRef idx="1">
+            <a:schemeClr val="accent1"/>
+          </a:lnRef>
+          <a:fillRef idx="3">
+            <a:schemeClr val="accent1"/>
+          </a:fillRef>
+          <a:effectRef idx="2">
+            <a:schemeClr val="accent1"/>
+          </a:effectRef>
+          <a:fontRef idx="minor">
+            <a:schemeClr val="lt1"/>
+          </a:fontRef>
+        </p:style>
+        <p:txBody>
+          <a:bodyPr rtlCol="0" anchor="ctr" wrap="square" lIns="38100" rIns="38100"/>
+          <a:lstStyle/>
+          <a:p>
+            <a:pPr algn="ctr"/>
+            <a:r>
+              <a:rPr sz="2000" b="1" i="0">
+                <a:solidFill>
+                  <a:srgbClr val="FFFFFF"/>
+                </a:solidFill>
+                <a:latin typeface="Calibri"/>
+              </a:rPr>
+              <a:t>02</a:t>
+            </a:r>
+          </a:p>
+        </p:txBody>
+      </p:sp>
+      <p:sp>
+        <p:nvSpPr>
+          <p:cNvPr id="9" name="TextBox 8"/>
+          <p:cNvSpPr txBox="1"/>
+          <p:nvPr/>
+        </p:nvSpPr>
+        <p:spPr>
+          <a:xfrm>
+            <a:off x="1828800" y="2478024"/>
+            <a:ext cx="8778240" cy="411480"/>
+          </a:xfrm>
+          <a:prstGeom prst="rect">
+            <a:avLst/>
+          </a:prstGeom>
+          <a:noFill/>
+        </p:spPr>
+        <p:txBody>
+          <a:bodyPr wrap="square" anchor="t" lIns="25400" rIns="25400" tIns="12700" bIns="12700">
+            <a:spAutoFit/>
+          </a:bodyPr>
+          <a:lstStyle/>
+          <a:p>
+            <a:pPr algn="l"/>
+            <a:r>
+              <a:rPr sz="1700" b="1" i="0">
+                <a:solidFill>
+                  <a:srgbClr val="002C5F"/>
+                </a:solidFill>
+                <a:latin typeface="Calibri"/>
+              </a:rPr>
+              <a:t>Target architecture</a:t>
+            </a:r>
+          </a:p>
+        </p:txBody>
+      </p:sp>
+      <p:sp>
+        <p:nvSpPr>
+          <p:cNvPr id="10" name="Rectangle 9"/>
+          <p:cNvSpPr/>
+          <p:nvPr/>
+        </p:nvSpPr>
+        <p:spPr>
+          <a:xfrm>
+            <a:off x="1847088" y="2916936"/>
+            <a:ext cx="8778240" cy="12801"/>
+          </a:xfrm>
+          <a:prstGeom prst="rect">
+            <a:avLst/>
+          </a:prstGeom>
+          <a:solidFill>
+            <a:srgbClr val="BFCDDA"/>
+          </a:solidFill>
+          <a:ln>
+            <a:noFill/>
+          </a:ln>
+          <a:effectLst/>
+        </p:spPr>
+        <p:style>
+          <a:lnRef idx="1">
+            <a:schemeClr val="accent1"/>
+          </a:lnRef>
+          <a:fillRef idx="3">
+            <a:schemeClr val="accent1"/>
+          </a:fillRef>
+          <a:effectRef idx="2">
+            <a:schemeClr val="accent1"/>
+          </a:effectRef>
+          <a:fontRef idx="minor">
+            <a:schemeClr val="lt1"/>
+          </a:fontRef>
+        </p:style>
+        <p:txBody>
+          <a:bodyPr rtlCol="0" anchor="ctr"/>
+          <a:lstStyle/>
+          <a:p>
+            <a:pPr algn="ctr"/>
+          </a:p>
+        </p:txBody>
+      </p:sp>
+      <p:sp>
+        <p:nvSpPr>
+          <p:cNvPr id="11" name="Rounded Rectangle 10"/>
+          <p:cNvSpPr/>
+          <p:nvPr/>
+        </p:nvSpPr>
+        <p:spPr>
+          <a:xfrm>
+            <a:off x="685800" y="3099815"/>
+            <a:ext cx="868680" cy="621792"/>
+          </a:xfrm>
+          <a:prstGeom prst="roundRect">
+            <a:avLst>
+              <a:gd name="adj" fmla="val 50000"/>
+            </a:avLst>
+          </a:prstGeom>
+          <a:solidFill>
+            <a:srgbClr val="002C5F"/>
+          </a:solidFill>
+          <a:ln>
+            <a:noFill/>
+          </a:ln>
+          <a:effectLst/>
+        </p:spPr>
+        <p:style>
+          <a:lnRef idx="1">
+            <a:schemeClr val="accent1"/>
+          </a:lnRef>
+          <a:fillRef idx="3">
+            <a:schemeClr val="accent1"/>
+          </a:fillRef>
+          <a:effectRef idx="2">
+            <a:schemeClr val="accent1"/>
+          </a:effectRef>
+          <a:fontRef idx="minor">
+            <a:schemeClr val="lt1"/>
+          </a:fontRef>
+        </p:style>
+        <p:txBody>
+          <a:bodyPr rtlCol="0" anchor="ctr" wrap="square" lIns="38100" rIns="38100"/>
+          <a:lstStyle/>
+          <a:p>
+            <a:pPr algn="ctr"/>
+            <a:r>
+              <a:rPr sz="2000" b="1" i="0">
+                <a:solidFill>
+                  <a:srgbClr val="FFFFFF"/>
+                </a:solidFill>
+                <a:latin typeface="Calibri"/>
+              </a:rPr>
+              <a:t>03</a:t>
+            </a:r>
+          </a:p>
+        </p:txBody>
+      </p:sp>
+      <p:sp>
+        <p:nvSpPr>
+          <p:cNvPr id="12" name="TextBox 11"/>
+          <p:cNvSpPr txBox="1"/>
+          <p:nvPr/>
+        </p:nvSpPr>
+        <p:spPr>
+          <a:xfrm>
+            <a:off x="1828800" y="3227832"/>
+            <a:ext cx="8778240" cy="411480"/>
+          </a:xfrm>
+          <a:prstGeom prst="rect">
+            <a:avLst/>
+          </a:prstGeom>
+          <a:noFill/>
+        </p:spPr>
+        <p:txBody>
+          <a:bodyPr wrap="square" anchor="t" lIns="25400" rIns="25400" tIns="12700" bIns="12700">
+            <a:spAutoFit/>
+          </a:bodyPr>
+          <a:lstStyle/>
+          <a:p>
+            <a:pPr algn="l"/>
+            <a:r>
+              <a:rPr sz="1700" b="1" i="0">
+                <a:solidFill>
+                  <a:srgbClr val="002C5F"/>
+                </a:solidFill>
+                <a:latin typeface="Calibri"/>
+              </a:rPr>
+              <a:t>Network &amp; security design</a:t>
+            </a:r>
+          </a:p>
+        </p:txBody>
+      </p:sp>
+      <p:sp>
+        <p:nvSpPr>
+          <p:cNvPr id="13" name="Rectangle 12"/>
+          <p:cNvSpPr/>
+          <p:nvPr/>
+        </p:nvSpPr>
+        <p:spPr>
+          <a:xfrm>
+            <a:off x="1847088" y="3666744"/>
+            <a:ext cx="8778240" cy="12801"/>
+          </a:xfrm>
+          <a:prstGeom prst="rect">
+            <a:avLst/>
+          </a:prstGeom>
+          <a:solidFill>
+            <a:srgbClr val="BFCDDA"/>
+          </a:solidFill>
+          <a:ln>
+            <a:noFill/>
+          </a:ln>
+          <a:effectLst/>
+        </p:spPr>
+        <p:style>
+          <a:lnRef idx="1">
+            <a:schemeClr val="accent1"/>
+          </a:lnRef>
+          <a:fillRef idx="3">
+            <a:schemeClr val="accent1"/>
+          </a:fillRef>
+          <a:effectRef idx="2">
+            <a:schemeClr val="accent1"/>
+          </a:effectRef>
+          <a:fontRef idx="minor">
+            <a:schemeClr val="lt1"/>
+          </a:fontRef>
+        </p:style>
+        <p:txBody>
+          <a:bodyPr rtlCol="0" anchor="ctr"/>
+          <a:lstStyle/>
+          <a:p>
+            <a:pPr algn="ctr"/>
+          </a:p>
+        </p:txBody>
+      </p:sp>
+      <p:sp>
+        <p:nvSpPr>
+          <p:cNvPr id="14" name="Rounded Rectangle 13"/>
+          <p:cNvSpPr/>
+          <p:nvPr/>
+        </p:nvSpPr>
+        <p:spPr>
+          <a:xfrm>
+            <a:off x="685800" y="3849624"/>
+            <a:ext cx="868680" cy="621792"/>
+          </a:xfrm>
+          <a:prstGeom prst="roundRect">
+            <a:avLst>
+              <a:gd name="adj" fmla="val 50000"/>
+            </a:avLst>
+          </a:prstGeom>
+          <a:solidFill>
+            <a:srgbClr val="002C5F"/>
+          </a:solidFill>
+          <a:ln>
+            <a:noFill/>
+          </a:ln>
+          <a:effectLst/>
+        </p:spPr>
+        <p:style>
+          <a:lnRef idx="1">
+            <a:schemeClr val="accent1"/>
+          </a:lnRef>
+          <a:fillRef idx="3">
+            <a:schemeClr val="accent1"/>
+          </a:fillRef>
+          <a:effectRef idx="2">
+            <a:schemeClr val="accent1"/>
+          </a:effectRef>
+          <a:fontRef idx="minor">
+            <a:schemeClr val="lt1"/>
+          </a:fontRef>
+        </p:style>
+        <p:txBody>
+          <a:bodyPr rtlCol="0" anchor="ctr" wrap="square" lIns="38100" rIns="38100"/>
+          <a:lstStyle/>
+          <a:p>
+            <a:pPr algn="ctr"/>
+            <a:r>
+              <a:rPr sz="2000" b="1" i="0">
+                <a:solidFill>
+                  <a:srgbClr val="FFFFFF"/>
+                </a:solidFill>
+                <a:latin typeface="Calibri"/>
+              </a:rPr>
+              <a:t>04</a:t>
+            </a:r>
+          </a:p>
+        </p:txBody>
+      </p:sp>
+      <p:sp>
+        <p:nvSpPr>
+          <p:cNvPr id="15" name="TextBox 14"/>
+          <p:cNvSpPr txBox="1"/>
+          <p:nvPr/>
+        </p:nvSpPr>
+        <p:spPr>
+          <a:xfrm>
+            <a:off x="1828800" y="3977639"/>
+            <a:ext cx="8778240" cy="411480"/>
+          </a:xfrm>
+          <a:prstGeom prst="rect">
+            <a:avLst/>
+          </a:prstGeom>
+          <a:noFill/>
+        </p:spPr>
+        <p:txBody>
+          <a:bodyPr wrap="square" anchor="t" lIns="25400" rIns="25400" tIns="12700" bIns="12700">
+            <a:spAutoFit/>
+          </a:bodyPr>
+          <a:lstStyle/>
+          <a:p>
+            <a:pPr algn="l"/>
+            <a:r>
+              <a:rPr sz="1700" b="1" i="0">
+                <a:solidFill>
+                  <a:srgbClr val="002C5F"/>
+                </a:solidFill>
+                <a:latin typeface="Calibri"/>
+              </a:rPr>
+              <a:t>VPN design — Client VPN · Site-to-Site</a:t>
+            </a:r>
+          </a:p>
+        </p:txBody>
+      </p:sp>
+      <p:sp>
+        <p:nvSpPr>
+          <p:cNvPr id="16" name="Rectangle 15"/>
+          <p:cNvSpPr/>
+          <p:nvPr/>
+        </p:nvSpPr>
+        <p:spPr>
+          <a:xfrm>
+            <a:off x="1847088" y="4416552"/>
+            <a:ext cx="8778240" cy="12801"/>
+          </a:xfrm>
+          <a:prstGeom prst="rect">
+            <a:avLst/>
+          </a:prstGeom>
+          <a:solidFill>
+            <a:srgbClr val="BFCDDA"/>
+          </a:solidFill>
+          <a:ln>
+            <a:noFill/>
+          </a:ln>
+          <a:effectLst/>
+        </p:spPr>
+        <p:style>
+          <a:lnRef idx="1">
+            <a:schemeClr val="accent1"/>
+          </a:lnRef>
+          <a:fillRef idx="3">
+            <a:schemeClr val="accent1"/>
+          </a:fillRef>
+          <a:effectRef idx="2">
+            <a:schemeClr val="accent1"/>
+          </a:effectRef>
+          <a:fontRef idx="minor">
+            <a:schemeClr val="lt1"/>
+          </a:fontRef>
+        </p:style>
+        <p:txBody>
+          <a:bodyPr rtlCol="0" anchor="ctr"/>
+          <a:lstStyle/>
+          <a:p>
+            <a:pPr algn="ctr"/>
+          </a:p>
+        </p:txBody>
+      </p:sp>
+      <p:sp>
+        <p:nvSpPr>
+          <p:cNvPr id="17" name="Rounded Rectangle 16"/>
+          <p:cNvSpPr/>
+          <p:nvPr/>
+        </p:nvSpPr>
+        <p:spPr>
+          <a:xfrm>
+            <a:off x="685800" y="4599432"/>
+            <a:ext cx="868680" cy="621792"/>
+          </a:xfrm>
+          <a:prstGeom prst="roundRect">
+            <a:avLst>
+              <a:gd name="adj" fmla="val 50000"/>
+            </a:avLst>
+          </a:prstGeom>
+          <a:solidFill>
+            <a:srgbClr val="002C5F"/>
+          </a:solidFill>
+          <a:ln>
+            <a:noFill/>
+          </a:ln>
+          <a:effectLst/>
+        </p:spPr>
+        <p:style>
+          <a:lnRef idx="1">
+            <a:schemeClr val="accent1"/>
+          </a:lnRef>
+          <a:fillRef idx="3">
+            <a:schemeClr val="accent1"/>
+          </a:fillRef>
+          <a:effectRef idx="2">
+            <a:schemeClr val="accent1"/>
+          </a:effectRef>
+          <a:fontRef idx="minor">
+            <a:schemeClr val="lt1"/>
+          </a:fontRef>
+        </p:style>
+        <p:txBody>
+          <a:bodyPr rtlCol="0" anchor="ctr" wrap="square" lIns="38100" rIns="38100"/>
+          <a:lstStyle/>
+          <a:p>
+            <a:pPr algn="ctr"/>
+            <a:r>
+              <a:rPr sz="2000" b="1" i="0">
+                <a:solidFill>
+                  <a:srgbClr val="FFFFFF"/>
+                </a:solidFill>
+                <a:latin typeface="Calibri"/>
+              </a:rPr>
+              <a:t>05</a:t>
+            </a:r>
+          </a:p>
+        </p:txBody>
+      </p:sp>
+      <p:sp>
+        <p:nvSpPr>
+          <p:cNvPr id="18" name="TextBox 17"/>
+          <p:cNvSpPr txBox="1"/>
+          <p:nvPr/>
+        </p:nvSpPr>
+        <p:spPr>
+          <a:xfrm>
+            <a:off x="1828800" y="4727448"/>
+            <a:ext cx="8778240" cy="411480"/>
+          </a:xfrm>
+          <a:prstGeom prst="rect">
+            <a:avLst/>
+          </a:prstGeom>
+          <a:noFill/>
+        </p:spPr>
+        <p:txBody>
+          <a:bodyPr wrap="square" anchor="t" lIns="25400" rIns="25400" tIns="12700" bIns="12700">
+            <a:spAutoFit/>
+          </a:bodyPr>
+          <a:lstStyle/>
+          <a:p>
+            <a:pPr algn="l"/>
+            <a:r>
+              <a:rPr sz="1700" b="1" i="0">
+                <a:solidFill>
+                  <a:srgbClr val="002C5F"/>
+                </a:solidFill>
+                <a:latin typeface="Calibri"/>
+              </a:rPr>
+              <a:t>Deployment &amp; operations</a:t>
+            </a:r>
+          </a:p>
+        </p:txBody>
+      </p:sp>
+      <p:sp>
+        <p:nvSpPr>
+          <p:cNvPr id="19" name="Rectangle 18"/>
+          <p:cNvSpPr/>
+          <p:nvPr/>
+        </p:nvSpPr>
+        <p:spPr>
+          <a:xfrm>
+            <a:off x="1847088" y="5166360"/>
+            <a:ext cx="8778240" cy="12801"/>
+          </a:xfrm>
+          <a:prstGeom prst="rect">
+            <a:avLst/>
+          </a:prstGeom>
+          <a:solidFill>
+            <a:srgbClr val="BFCDDA"/>
+          </a:solidFill>
+          <a:ln>
+            <a:noFill/>
+          </a:ln>
+          <a:effectLst/>
+        </p:spPr>
+        <p:style>
+          <a:lnRef idx="1">
+            <a:schemeClr val="accent1"/>
+          </a:lnRef>
+          <a:fillRef idx="3">
+            <a:schemeClr val="accent1"/>
+          </a:fillRef>
+          <a:effectRef idx="2">
+            <a:schemeClr val="accent1"/>
+          </a:effectRef>
+          <a:fontRef idx="minor">
+            <a:schemeClr val="lt1"/>
+          </a:fontRef>
+        </p:style>
+        <p:txBody>
+          <a:bodyPr rtlCol="0" anchor="ctr"/>
+          <a:lstStyle/>
+          <a:p>
+            <a:pPr algn="ctr"/>
+          </a:p>
+        </p:txBody>
+      </p:sp>
+      <p:sp>
+        <p:nvSpPr>
+          <p:cNvPr id="20" name="Rounded Rectangle 19"/>
+          <p:cNvSpPr/>
+          <p:nvPr/>
+        </p:nvSpPr>
+        <p:spPr>
+          <a:xfrm>
+            <a:off x="685800" y="5349240"/>
+            <a:ext cx="868680" cy="621792"/>
+          </a:xfrm>
+          <a:prstGeom prst="roundRect">
+            <a:avLst>
+              <a:gd name="adj" fmla="val 50000"/>
+            </a:avLst>
+          </a:prstGeom>
+          <a:solidFill>
+            <a:srgbClr val="002C5F"/>
+          </a:solidFill>
+          <a:ln>
+            <a:noFill/>
+          </a:ln>
+          <a:effectLst/>
+        </p:spPr>
+        <p:style>
+          <a:lnRef idx="1">
+            <a:schemeClr val="accent1"/>
+          </a:lnRef>
+          <a:fillRef idx="3">
+            <a:schemeClr val="accent1"/>
+          </a:fillRef>
+          <a:effectRef idx="2">
+            <a:schemeClr val="accent1"/>
+          </a:effectRef>
+          <a:fontRef idx="minor">
+            <a:schemeClr val="lt1"/>
+          </a:fontRef>
+        </p:style>
+        <p:txBody>
+          <a:bodyPr rtlCol="0" anchor="ctr" wrap="square" lIns="38100" rIns="38100"/>
+          <a:lstStyle/>
+          <a:p>
+            <a:pPr algn="ctr"/>
+            <a:r>
+              <a:rPr sz="2000" b="1" i="0">
+                <a:solidFill>
+                  <a:srgbClr val="FFFFFF"/>
+                </a:solidFill>
+                <a:latin typeface="Calibri"/>
+              </a:rPr>
+              <a:t>06</a:t>
+            </a:r>
+          </a:p>
+        </p:txBody>
+      </p:sp>
+      <p:sp>
+        <p:nvSpPr>
+          <p:cNvPr id="21" name="TextBox 20"/>
+          <p:cNvSpPr txBox="1"/>
+          <p:nvPr/>
+        </p:nvSpPr>
+        <p:spPr>
+          <a:xfrm>
+            <a:off x="1828800" y="5477256"/>
+            <a:ext cx="8778240" cy="411480"/>
+          </a:xfrm>
+          <a:prstGeom prst="rect">
+            <a:avLst/>
+          </a:prstGeom>
+          <a:noFill/>
+        </p:spPr>
+        <p:txBody>
+          <a:bodyPr wrap="square" anchor="t" lIns="25400" rIns="25400" tIns="12700" bIns="12700">
+            <a:spAutoFit/>
+          </a:bodyPr>
+          <a:lstStyle/>
+          <a:p>
+            <a:pPr algn="l"/>
+            <a:r>
+              <a:rPr sz="1700" b="1" i="0">
+                <a:solidFill>
+                  <a:srgbClr val="002C5F"/>
+                </a:solidFill>
+                <a:latin typeface="Calibri"/>
+              </a:rPr>
+              <a:t>Deliverables &amp; next steps</a:t>
+            </a:r>
+          </a:p>
+        </p:txBody>
+      </p:sp>
+      <p:sp>
+        <p:nvSpPr>
+          <p:cNvPr id="22" name="Rectangle 21"/>
+          <p:cNvSpPr/>
+          <p:nvPr/>
+        </p:nvSpPr>
+        <p:spPr>
+          <a:xfrm>
+            <a:off x="1847088" y="5916168"/>
+            <a:ext cx="8778240" cy="12801"/>
+          </a:xfrm>
+          <a:prstGeom prst="rect">
+            <a:avLst/>
+          </a:prstGeom>
+          <a:solidFill>
+            <a:srgbClr val="BFCDDA"/>
+          </a:solidFill>
+          <a:ln>
+            <a:noFill/>
+          </a:ln>
+          <a:effectLst/>
+        </p:spPr>
+        <p:style>
+          <a:lnRef idx="1">
+            <a:schemeClr val="accent1"/>
+          </a:lnRef>
+          <a:fillRef idx="3">
+            <a:schemeClr val="accent1"/>
+          </a:fillRef>
+          <a:effectRef idx="2">
+            <a:schemeClr val="accent1"/>
+          </a:effectRef>
+          <a:fontRef idx="minor">
+            <a:schemeClr val="lt1"/>
+          </a:fontRef>
+        </p:style>
+        <p:txBody>
+          <a:bodyPr rtlCol="0" anchor="ctr"/>
+          <a:lstStyle/>
+          <a:p>
+            <a:pPr algn="ctr"/>
+          </a:p>
+        </p:txBody>
+      </p:sp>
+      <p:sp>
+        <p:nvSpPr>
+          <p:cNvPr id="23" name="TextBox 22"/>
+          <p:cNvSpPr txBox="1"/>
+          <p:nvPr/>
+        </p:nvSpPr>
+        <p:spPr>
+          <a:xfrm>
+            <a:off x="502920" y="6473952"/>
+            <a:ext cx="8229600" cy="274320"/>
+          </a:xfrm>
+          <a:prstGeom prst="rect">
+            <a:avLst/>
+          </a:prstGeom>
+          <a:noFill/>
+        </p:spPr>
+        <p:txBody>
+          <a:bodyPr wrap="square" anchor="t" lIns="25400" rIns="25400" tIns="12700" bIns="12700">
+            <a:spAutoFit/>
+          </a:bodyPr>
+          <a:lstStyle/>
+          <a:p>
+            <a:pPr algn="l"/>
+            <a:r>
+              <a:rPr sz="900" b="0" i="0">
+                <a:solidFill>
+                  <a:srgbClr val="9AA7B4"/>
+                </a:solidFill>
+                <a:latin typeface="Calibri"/>
+              </a:rPr>
+              <a:t>HMSG WEC Racing · hmsg-rac-prd · eu-central-1 (Frankfurt)</a:t>
+            </a:r>
+          </a:p>
+        </p:txBody>
+      </p:sp>
+      <p:sp>
+        <p:nvSpPr>
+          <p:cNvPr id="24" name="TextBox 23"/>
+          <p:cNvSpPr txBox="1"/>
+          <p:nvPr/>
+        </p:nvSpPr>
+        <p:spPr>
+          <a:xfrm>
+            <a:off x="10332720" y="6473952"/>
+            <a:ext cx="1371600" cy="274320"/>
+          </a:xfrm>
+          <a:prstGeom prst="rect">
+            <a:avLst/>
+          </a:prstGeom>
+          <a:noFill/>
+        </p:spPr>
+        <p:txBody>
+          <a:bodyPr wrap="square" anchor="t" lIns="25400" rIns="25400" tIns="12700" bIns="12700">
+            <a:spAutoFit/>
+          </a:bodyPr>
+          <a:lstStyle/>
+          <a:p>
+            <a:pPr algn="r"/>
+            <a:r>
+              <a:rPr sz="900" b="0" i="0">
+                <a:solidFill>
+                  <a:srgbClr val="9AA7B4"/>
+                </a:solidFill>
+                <a:latin typeface="Calibri"/>
+              </a:rPr>
+              <a:t>02 / 08</a:t>
             </a:r>
           </a:p>
         </p:txBody>
@@ -3720,8 +4526,8 @@
         </p:nvSpPr>
         <p:spPr>
           <a:xfrm>
-            <a:off x="411480" y="228600"/>
-            <a:ext cx="11155680" cy="731520"/>
+            <a:off x="502920" y="256032"/>
+            <a:ext cx="11155680" cy="274320"/>
           </a:xfrm>
           <a:prstGeom prst="rect">
             <a:avLst/>
@@ -3729,44 +4535,80 @@
           <a:noFill/>
         </p:spPr>
         <p:txBody>
-          <a:bodyPr wrap="none">
+          <a:bodyPr wrap="square" anchor="t" lIns="25400" rIns="25400" tIns="12700" bIns="12700">
             <a:spAutoFit/>
           </a:bodyPr>
           <a:lstStyle/>
           <a:p>
-            <a:r>
-              <a:rPr sz="2800" b="1">
-                <a:solidFill>
-                  <a:srgbClr val="0E4887"/>
-                </a:solidFill>
-              </a:rPr>
-              <a:t>Target Architecture</a:t>
-            </a:r>
-          </a:p>
-        </p:txBody>
-      </p:sp>
-      <p:sp>
-        <p:nvSpPr>
-          <p:cNvPr id="3" name="Rounded Rectangle 2"/>
+            <a:pPr algn="l"/>
+            <a:r>
+              <a:rPr sz="1100" b="1" i="0">
+                <a:solidFill>
+                  <a:srgbClr val="00AAD2"/>
+                </a:solidFill>
+                <a:latin typeface="Calibri"/>
+              </a:rPr>
+              <a:t>01 · REQUIREMENTS</a:t>
+            </a:r>
+          </a:p>
+        </p:txBody>
+      </p:sp>
+      <p:sp>
+        <p:nvSpPr>
+          <p:cNvPr id="3" name="TextBox 2"/>
+          <p:cNvSpPr txBox="1"/>
+          <p:nvPr/>
+        </p:nvSpPr>
+        <p:spPr>
+          <a:xfrm>
+            <a:off x="502920" y="502920"/>
+            <a:ext cx="11155680" cy="566928"/>
+          </a:xfrm>
+          <a:prstGeom prst="rect">
+            <a:avLst/>
+          </a:prstGeom>
+          <a:noFill/>
+        </p:spPr>
+        <p:txBody>
+          <a:bodyPr wrap="square" anchor="t" lIns="25400" rIns="25400" tIns="12700" bIns="12700">
+            <a:spAutoFit/>
+          </a:bodyPr>
+          <a:lstStyle/>
+          <a:p>
+            <a:pPr algn="l"/>
+            <a:r>
+              <a:rPr sz="2900" b="1" i="0">
+                <a:solidFill>
+                  <a:srgbClr val="002C5F"/>
+                </a:solidFill>
+                <a:latin typeface="Calibri"/>
+              </a:rPr>
+              <a:t>Requirements at a glance</a:t>
+            </a:r>
+          </a:p>
+        </p:txBody>
+      </p:sp>
+      <p:sp>
+        <p:nvSpPr>
+          <p:cNvPr id="4" name="Rectangle 3"/>
           <p:cNvSpPr/>
           <p:nvPr/>
         </p:nvSpPr>
         <p:spPr>
           <a:xfrm>
-            <a:off x="365760" y="1417320"/>
-            <a:ext cx="2011680" cy="914400"/>
-          </a:xfrm>
-          <a:prstGeom prst="roundRect">
+            <a:off x="521207" y="1170432"/>
+            <a:ext cx="1554480" cy="41148"/>
+          </a:xfrm>
+          <a:prstGeom prst="rect">
             <a:avLst/>
           </a:prstGeom>
           <a:solidFill>
-            <a:srgbClr val="F3F7FB"/>
+            <a:srgbClr val="F5A623"/>
           </a:solidFill>
           <a:ln>
-            <a:solidFill>
-              <a:srgbClr val="0E4887"/>
-            </a:solidFill>
+            <a:noFill/>
           </a:ln>
+          <a:effectLst/>
         </p:spPr>
         <p:style>
           <a:lnRef idx="1">
@@ -3787,40 +4629,34 @@
           <a:lstStyle/>
           <a:p>
             <a:pPr algn="ctr"/>
-            <a:r>
-              <a:rPr sz="1500" b="1">
-                <a:solidFill>
-                  <a:srgbClr val="2D2D2D"/>
-                </a:solidFill>
-              </a:rPr>
-              <a:t>Remote users
-Dev laptops</a:t>
-            </a:r>
-          </a:p>
-        </p:txBody>
-      </p:sp>
-      <p:sp>
-        <p:nvSpPr>
-          <p:cNvPr id="4" name="Rounded Rectangle 3"/>
+          </a:p>
+        </p:txBody>
+      </p:sp>
+      <p:sp>
+        <p:nvSpPr>
+          <p:cNvPr id="5" name="Rounded Rectangle 4"/>
           <p:cNvSpPr/>
           <p:nvPr/>
         </p:nvSpPr>
         <p:spPr>
           <a:xfrm>
-            <a:off x="365760" y="2788920"/>
-            <a:ext cx="2011680" cy="960120"/>
+            <a:off x="502920" y="1463040"/>
+            <a:ext cx="5577840" cy="3291840"/>
           </a:xfrm>
           <a:prstGeom prst="roundRect">
-            <a:avLst/>
+            <a:avLst>
+              <a:gd name="adj" fmla="val 4500"/>
+            </a:avLst>
           </a:prstGeom>
           <a:solidFill>
-            <a:srgbClr val="E3F0FC"/>
+            <a:srgbClr val="FFFFFF"/>
           </a:solidFill>
-          <a:ln>
+          <a:ln w="12700">
             <a:solidFill>
-              <a:srgbClr val="0E4887"/>
+              <a:srgbClr val="BFCDDA"/>
             </a:solidFill>
           </a:ln>
+          <a:effectLst/>
         </p:spPr>
         <p:style>
           <a:lnRef idx="1">
@@ -3841,40 +4677,32 @@
           <a:lstStyle/>
           <a:p>
             <a:pPr algn="ctr"/>
-            <a:r>
-              <a:rPr sz="1500" b="1">
-                <a:solidFill>
-                  <a:srgbClr val="2D2D2D"/>
-                </a:solidFill>
-              </a:rPr>
-              <a:t>AWS Client VPN
-UDP 443 + SAML</a:t>
-            </a:r>
-          </a:p>
-        </p:txBody>
-      </p:sp>
-      <p:sp>
-        <p:nvSpPr>
-          <p:cNvPr id="5" name="Rounded Rectangle 4"/>
+          </a:p>
+        </p:txBody>
+      </p:sp>
+      <p:sp>
+        <p:nvSpPr>
+          <p:cNvPr id="6" name="Rounded Rectangle 5"/>
           <p:cNvSpPr/>
           <p:nvPr/>
         </p:nvSpPr>
         <p:spPr>
           <a:xfrm>
-            <a:off x="9646920" y="2103120"/>
-            <a:ext cx="2148840" cy="1051560"/>
+            <a:off x="502920" y="1463040"/>
+            <a:ext cx="5577840" cy="146304"/>
           </a:xfrm>
           <a:prstGeom prst="roundRect">
-            <a:avLst/>
+            <a:avLst>
+              <a:gd name="adj" fmla="val 50000"/>
+            </a:avLst>
           </a:prstGeom>
           <a:solidFill>
-            <a:srgbClr val="F3F7FB"/>
+            <a:srgbClr val="002C5F"/>
           </a:solidFill>
           <a:ln>
-            <a:solidFill>
-              <a:srgbClr val="0E4887"/>
-            </a:solidFill>
+            <a:noFill/>
           </a:ln>
+          <a:effectLst/>
         </p:spPr>
         <p:style>
           <a:lnRef idx="1">
@@ -3895,40 +4723,164 @@
           <a:lstStyle/>
           <a:p>
             <a:pPr algn="ctr"/>
-            <a:r>
-              <a:rPr sz="1500" b="1">
-                <a:solidFill>
-                  <a:srgbClr val="2D2D2D"/>
-                </a:solidFill>
-              </a:rPr>
-              <a:t>On-prem Hyundai
-racing site</a:t>
-            </a:r>
-          </a:p>
-        </p:txBody>
-      </p:sp>
-      <p:sp>
-        <p:nvSpPr>
-          <p:cNvPr id="6" name="Rectangle 5"/>
+          </a:p>
+        </p:txBody>
+      </p:sp>
+      <p:sp>
+        <p:nvSpPr>
+          <p:cNvPr id="7" name="TextBox 6"/>
+          <p:cNvSpPr txBox="1"/>
+          <p:nvPr/>
+        </p:nvSpPr>
+        <p:spPr>
+          <a:xfrm>
+            <a:off x="777240" y="1627632"/>
+            <a:ext cx="5029200" cy="320040"/>
+          </a:xfrm>
+          <a:prstGeom prst="rect">
+            <a:avLst/>
+          </a:prstGeom>
+          <a:noFill/>
+        </p:spPr>
+        <p:txBody>
+          <a:bodyPr wrap="square" anchor="t" lIns="25400" rIns="25400" tIns="12700" bIns="12700">
+            <a:spAutoFit/>
+          </a:bodyPr>
+          <a:lstStyle/>
+          <a:p>
+            <a:pPr algn="l"/>
+            <a:r>
+              <a:rPr sz="1500" b="1" i="0">
+                <a:solidFill>
+                  <a:srgbClr val="002C5F"/>
+                </a:solidFill>
+                <a:latin typeface="Calibri"/>
+              </a:rPr>
+              <a:t>Scope of this build</a:t>
+            </a:r>
+          </a:p>
+        </p:txBody>
+      </p:sp>
+      <p:sp>
+        <p:nvSpPr>
+          <p:cNvPr id="8" name="TextBox 7"/>
+          <p:cNvSpPr txBox="1"/>
+          <p:nvPr/>
+        </p:nvSpPr>
+        <p:spPr>
+          <a:xfrm>
+            <a:off x="822960" y="2103120"/>
+            <a:ext cx="5029200" cy="2468880"/>
+          </a:xfrm>
+          <a:prstGeom prst="rect">
+            <a:avLst/>
+          </a:prstGeom>
+          <a:noFill/>
+        </p:spPr>
+        <p:txBody>
+          <a:bodyPr wrap="square" lIns="25400" rIns="25400" tIns="12700" bIns="12700">
+            <a:spAutoFit/>
+          </a:bodyPr>
+          <a:lstStyle/>
+          <a:p>
+            <a:pPr marL="182880" indent="-182880">
+              <a:spcAft>
+                <a:spcPts val="400"/>
+              </a:spcAft>
+              <a:buFont typeface="Arial"/>
+              <a:buChar char="•"/>
+            </a:pPr>
+            <a:r>
+              <a:rPr sz="1350" b="0" i="0">
+                <a:solidFill>
+                  <a:srgbClr val="595959"/>
+                </a:solidFill>
+                <a:latin typeface="Calibri"/>
+              </a:rPr>
+              <a:t>One Windows Server 2022 EC2 instance — m7i.2xlarge (8 vCPU / 32 GiB)</a:t>
+            </a:r>
+          </a:p>
+          <a:p>
+            <a:pPr marL="182880" indent="-182880">
+              <a:spcAft>
+                <a:spcPts val="400"/>
+              </a:spcAft>
+              <a:buFont typeface="Arial"/>
+              <a:buChar char="•"/>
+            </a:pPr>
+            <a:r>
+              <a:rPr sz="1350" b="0" i="0">
+                <a:solidFill>
+                  <a:srgbClr val="595959"/>
+                </a:solidFill>
+                <a:latin typeface="Calibri"/>
+              </a:rPr>
+              <a:t>Root 250 GB + data 4 TB (D: · NTFS · 64K) — SQL Server installed by the client</a:t>
+            </a:r>
+          </a:p>
+          <a:p>
+            <a:pPr marL="182880" indent="-182880">
+              <a:spcAft>
+                <a:spcPts val="400"/>
+              </a:spcAft>
+              <a:buFont typeface="Arial"/>
+              <a:buChar char="•"/>
+            </a:pPr>
+            <a:r>
+              <a:rPr sz="1350" b="0" i="0">
+                <a:solidFill>
+                  <a:srgbClr val="595959"/>
+                </a:solidFill>
+                <a:latin typeface="Calibri"/>
+              </a:rPr>
+              <a:t>No public IP and no internet egress on the DB host</a:t>
+            </a:r>
+          </a:p>
+          <a:p>
+            <a:pPr marL="182880" indent="-182880">
+              <a:spcAft>
+                <a:spcPts val="400"/>
+              </a:spcAft>
+              <a:buFont typeface="Arial"/>
+              <a:buChar char="•"/>
+            </a:pPr>
+            <a:r>
+              <a:rPr sz="1350" b="0" i="0">
+                <a:solidFill>
+                  <a:srgbClr val="595959"/>
+                </a:solidFill>
+                <a:latin typeface="Calibri"/>
+              </a:rPr>
+              <a:t>Private access only: Client VPN for developers, optional Site-to-Site VPN for on-prem</a:t>
+            </a:r>
+          </a:p>
+        </p:txBody>
+      </p:sp>
+      <p:sp>
+        <p:nvSpPr>
+          <p:cNvPr id="9" name="Rounded Rectangle 8"/>
           <p:cNvSpPr/>
           <p:nvPr/>
         </p:nvSpPr>
         <p:spPr>
           <a:xfrm>
-            <a:off x="2743200" y="1234440"/>
-            <a:ext cx="6492240" cy="4297680"/>
-          </a:xfrm>
-          <a:prstGeom prst="rect">
-            <a:avLst/>
+            <a:off x="6355080" y="1463040"/>
+            <a:ext cx="5349240" cy="3291840"/>
+          </a:xfrm>
+          <a:prstGeom prst="roundRect">
+            <a:avLst>
+              <a:gd name="adj" fmla="val 4500"/>
+            </a:avLst>
           </a:prstGeom>
           <a:solidFill>
-            <a:srgbClr val="FAFAFA"/>
+            <a:srgbClr val="FFFFFF"/>
           </a:solidFill>
-          <a:ln>
+          <a:ln w="12700">
             <a:solidFill>
-              <a:srgbClr val="0E4887"/>
+              <a:srgbClr val="BFCDDA"/>
             </a:solidFill>
           </a:ln>
+          <a:effectLst/>
         </p:spPr>
         <p:style>
           <a:lnRef idx="1">
@@ -3947,31 +4899,34 @@
         <p:txBody>
           <a:bodyPr rtlCol="0" anchor="ctr"/>
           <a:lstStyle/>
-          <a:p/>
-        </p:txBody>
-      </p:sp>
-      <p:sp>
-        <p:nvSpPr>
-          <p:cNvPr id="7" name="Rounded Rectangle 6"/>
+          <a:p>
+            <a:pPr algn="ctr"/>
+          </a:p>
+        </p:txBody>
+      </p:sp>
+      <p:sp>
+        <p:nvSpPr>
+          <p:cNvPr id="10" name="Rounded Rectangle 9"/>
           <p:cNvSpPr/>
           <p:nvPr/>
         </p:nvSpPr>
         <p:spPr>
           <a:xfrm>
-            <a:off x="2971800" y="1554480"/>
-            <a:ext cx="6035040" cy="822960"/>
+            <a:off x="6355080" y="1463040"/>
+            <a:ext cx="5349240" cy="146304"/>
           </a:xfrm>
           <a:prstGeom prst="roundRect">
-            <a:avLst/>
+            <a:avLst>
+              <a:gd name="adj" fmla="val 50000"/>
+            </a:avLst>
           </a:prstGeom>
           <a:solidFill>
-            <a:srgbClr val="EAF3FC"/>
+            <a:srgbClr val="007FA8"/>
           </a:solidFill>
           <a:ln>
-            <a:solidFill>
-              <a:srgbClr val="6E6E6E"/>
-            </a:solidFill>
+            <a:noFill/>
           </a:ln>
+          <a:effectLst/>
         </p:spPr>
         <p:style>
           <a:lnRef idx="1">
@@ -3992,41 +4947,182 @@
           <a:lstStyle/>
           <a:p>
             <a:pPr algn="ctr"/>
-            <a:r>
-              <a:rPr sz="1300" b="1">
-                <a:solidFill>
-                  <a:srgbClr val="2D2D2D"/>
-                </a:solidFill>
-              </a:rPr>
-              <a:t>Public subnets
-172.200.0.0/27 + 172.200.0.32/27
-NAT gateway</a:t>
-            </a:r>
-          </a:p>
-        </p:txBody>
-      </p:sp>
-      <p:sp>
-        <p:nvSpPr>
-          <p:cNvPr id="8" name="Rounded Rectangle 7"/>
+          </a:p>
+        </p:txBody>
+      </p:sp>
+      <p:sp>
+        <p:nvSpPr>
+          <p:cNvPr id="11" name="TextBox 10"/>
+          <p:cNvSpPr txBox="1"/>
+          <p:nvPr/>
+        </p:nvSpPr>
+        <p:spPr>
+          <a:xfrm>
+            <a:off x="6629400" y="1627632"/>
+            <a:ext cx="4846320" cy="320040"/>
+          </a:xfrm>
+          <a:prstGeom prst="rect">
+            <a:avLst/>
+          </a:prstGeom>
+          <a:noFill/>
+        </p:spPr>
+        <p:txBody>
+          <a:bodyPr wrap="square" anchor="t" lIns="25400" rIns="25400" tIns="12700" bIns="12700">
+            <a:spAutoFit/>
+          </a:bodyPr>
+          <a:lstStyle/>
+          <a:p>
+            <a:pPr algn="l"/>
+            <a:r>
+              <a:rPr sz="1500" b="1" i="0">
+                <a:solidFill>
+                  <a:srgbClr val="002C5F"/>
+                </a:solidFill>
+                <a:latin typeface="Calibri"/>
+              </a:rPr>
+              <a:t>Client-side responsibilities</a:t>
+            </a:r>
+          </a:p>
+        </p:txBody>
+      </p:sp>
+      <p:sp>
+        <p:nvSpPr>
+          <p:cNvPr id="12" name="TextBox 11"/>
+          <p:cNvSpPr txBox="1"/>
+          <p:nvPr/>
+        </p:nvSpPr>
+        <p:spPr>
+          <a:xfrm>
+            <a:off x="6675120" y="2103120"/>
+            <a:ext cx="4846320" cy="2468880"/>
+          </a:xfrm>
+          <a:prstGeom prst="rect">
+            <a:avLst/>
+          </a:prstGeom>
+          <a:noFill/>
+        </p:spPr>
+        <p:txBody>
+          <a:bodyPr wrap="square" lIns="25400" rIns="25400" tIns="12700" bIns="12700">
+            <a:spAutoFit/>
+          </a:bodyPr>
+          <a:lstStyle/>
+          <a:p>
+            <a:pPr marL="182880" indent="-182880">
+              <a:spcAft>
+                <a:spcPts val="400"/>
+              </a:spcAft>
+              <a:buFont typeface="Arial"/>
+              <a:buChar char="•"/>
+            </a:pPr>
+            <a:r>
+              <a:rPr sz="1350" b="0" i="0">
+                <a:solidFill>
+                  <a:srgbClr val="595959"/>
+                </a:solidFill>
+                <a:latin typeface="Calibri"/>
+              </a:rPr>
+              <a:t>Microsoft Entra ID Enterprise Application (SAML federation)</a:t>
+            </a:r>
+          </a:p>
+          <a:p>
+            <a:pPr marL="182880" indent="-182880">
+              <a:spcAft>
+                <a:spcPts val="400"/>
+              </a:spcAft>
+              <a:buFont typeface="Arial"/>
+              <a:buChar char="•"/>
+            </a:pPr>
+            <a:r>
+              <a:rPr sz="1350" b="0" i="0">
+                <a:solidFill>
+                  <a:srgbClr val="595959"/>
+                </a:solidFill>
+                <a:latin typeface="Calibri"/>
+              </a:rPr>
+              <a:t>Entra ID Federation Metadata XML</a:t>
+            </a:r>
+          </a:p>
+          <a:p>
+            <a:pPr marL="182880" indent="-182880">
+              <a:spcAft>
+                <a:spcPts val="400"/>
+              </a:spcAft>
+              <a:buFont typeface="Arial"/>
+              <a:buChar char="•"/>
+            </a:pPr>
+            <a:r>
+              <a:rPr sz="1350" b="0" i="0">
+                <a:solidFill>
+                  <a:srgbClr val="595959"/>
+                </a:solidFill>
+                <a:latin typeface="Calibri"/>
+              </a:rPr>
+              <a:t>CustomerGatewayIp + OnPremCidr (enables the Site-to-Site VPN)</a:t>
+            </a:r>
+          </a:p>
+          <a:p>
+            <a:pPr marL="182880" indent="-182880">
+              <a:spcAft>
+                <a:spcPts val="400"/>
+              </a:spcAft>
+              <a:buFont typeface="Arial"/>
+              <a:buChar char="•"/>
+            </a:pPr>
+            <a:r>
+              <a:rPr sz="1350" b="0" i="0">
+                <a:solidFill>
+                  <a:srgbClr val="595959"/>
+                </a:solidFill>
+                <a:latin typeface="Calibri"/>
+              </a:rPr>
+              <a:t>SQL Server installation on the EC2 host</a:t>
+            </a:r>
+          </a:p>
+          <a:p>
+            <a:pPr marL="182880" indent="-182880">
+              <a:spcAft>
+                <a:spcPts val="400"/>
+              </a:spcAft>
+              <a:buFont typeface="Arial"/>
+              <a:buChar char="•"/>
+            </a:pPr>
+            <a:r>
+              <a:rPr sz="1350" b="0" i="0">
+                <a:solidFill>
+                  <a:srgbClr val="595959"/>
+                </a:solidFill>
+                <a:latin typeface="Calibri"/>
+              </a:rPr>
+              <a:t>VPN user management after handover</a:t>
+            </a:r>
+          </a:p>
+        </p:txBody>
+      </p:sp>
+      <p:sp>
+        <p:nvSpPr>
+          <p:cNvPr id="13" name="Rounded Rectangle 12"/>
           <p:cNvSpPr/>
           <p:nvPr/>
         </p:nvSpPr>
         <p:spPr>
           <a:xfrm>
-            <a:off x="2971800" y="2697480"/>
-            <a:ext cx="6035040" cy="822960"/>
+            <a:off x="502920" y="5029200"/>
+            <a:ext cx="11201400" cy="1234440"/>
           </a:xfrm>
           <a:prstGeom prst="roundRect">
-            <a:avLst/>
+            <a:avLst>
+              <a:gd name="adj" fmla="val 9000"/>
+            </a:avLst>
           </a:prstGeom>
           <a:solidFill>
-            <a:srgbClr val="F2F8E9"/>
+            <a:srgbClr val="FDF3E7"/>
           </a:solidFill>
-          <a:ln>
+          <a:ln w="12700">
             <a:solidFill>
-              <a:srgbClr val="6E6E6E"/>
+              <a:srgbClr val="F5A623"/>
             </a:solidFill>
           </a:ln>
+          <a:effectLst/>
         </p:spPr>
         <p:style>
           <a:lnRef idx="1">
@@ -4047,373 +5143,138 @@
           <a:lstStyle/>
           <a:p>
             <a:pPr algn="ctr"/>
-            <a:r>
-              <a:rPr sz="1300" b="1">
-                <a:solidFill>
-                  <a:srgbClr val="2D2D2D"/>
-                </a:solidFill>
-              </a:rPr>
-              <a:t>Private subnets
-172.200.0.64/27 + 172.200.0.96/27
-Client VPN target networks</a:t>
-            </a:r>
-          </a:p>
-        </p:txBody>
-      </p:sp>
-      <p:sp>
-        <p:nvSpPr>
-          <p:cNvPr id="9" name="Rounded Rectangle 8"/>
-          <p:cNvSpPr/>
-          <p:nvPr/>
-        </p:nvSpPr>
-        <p:spPr>
-          <a:xfrm>
-            <a:off x="2971800" y="3840480"/>
-            <a:ext cx="6035040" cy="822960"/>
-          </a:xfrm>
-          <a:prstGeom prst="roundRect">
-            <a:avLst/>
-          </a:prstGeom>
-          <a:solidFill>
-            <a:srgbClr val="FCEFEF"/>
-          </a:solidFill>
-          <a:ln>
-            <a:solidFill>
-              <a:srgbClr val="6E6E6E"/>
-            </a:solidFill>
-          </a:ln>
-        </p:spPr>
-        <p:style>
-          <a:lnRef idx="1">
-            <a:schemeClr val="accent1"/>
-          </a:lnRef>
-          <a:fillRef idx="3">
-            <a:schemeClr val="accent1"/>
-          </a:fillRef>
-          <a:effectRef idx="2">
-            <a:schemeClr val="accent1"/>
-          </a:effectRef>
-          <a:fontRef idx="minor">
-            <a:schemeClr val="lt1"/>
-          </a:fontRef>
-        </p:style>
-        <p:txBody>
-          <a:bodyPr rtlCol="0" anchor="ctr"/>
-          <a:lstStyle/>
-          <a:p>
-            <a:pPr algn="ctr"/>
-            <a:r>
-              <a:rPr sz="1300" b="1">
-                <a:solidFill>
-                  <a:srgbClr val="2D2D2D"/>
-                </a:solidFill>
-              </a:rPr>
-              <a:t>DB subnets
-172.200.0.128/27 + 172.200.0.160/27
-Windows EC2 MSSQL host</a:t>
-            </a:r>
-          </a:p>
-        </p:txBody>
-      </p:sp>
-      <p:sp>
-        <p:nvSpPr>
-          <p:cNvPr id="10" name="Rounded Rectangle 9"/>
-          <p:cNvSpPr/>
-          <p:nvPr/>
-        </p:nvSpPr>
-        <p:spPr>
-          <a:xfrm>
-            <a:off x="2971800" y="4800600"/>
-            <a:ext cx="1920240" cy="502920"/>
-          </a:xfrm>
-          <a:prstGeom prst="roundRect">
-            <a:avLst/>
-          </a:prstGeom>
-          <a:solidFill>
-            <a:srgbClr val="E6F2FF"/>
-          </a:solidFill>
-          <a:ln>
-            <a:solidFill>
-              <a:srgbClr val="0E4887"/>
-            </a:solidFill>
-          </a:ln>
-        </p:spPr>
-        <p:style>
-          <a:lnRef idx="1">
-            <a:schemeClr val="accent1"/>
-          </a:lnRef>
-          <a:fillRef idx="3">
-            <a:schemeClr val="accent1"/>
-          </a:fillRef>
-          <a:effectRef idx="2">
-            <a:schemeClr val="accent1"/>
-          </a:effectRef>
-          <a:fontRef idx="minor">
-            <a:schemeClr val="lt1"/>
-          </a:fontRef>
-        </p:style>
-        <p:txBody>
-          <a:bodyPr rtlCol="0" anchor="ctr"/>
-          <a:lstStyle/>
-          <a:p>
-            <a:pPr algn="ctr"/>
-            <a:r>
-              <a:rPr sz="1200" b="1">
-                <a:solidFill>
-                  <a:srgbClr val="2D2D2D"/>
-                </a:solidFill>
-              </a:rPr>
-              <a:t>Secrets Manager</a:t>
-            </a:r>
-          </a:p>
-        </p:txBody>
-      </p:sp>
-      <p:sp>
-        <p:nvSpPr>
-          <p:cNvPr id="11" name="Rounded Rectangle 10"/>
-          <p:cNvSpPr/>
-          <p:nvPr/>
-        </p:nvSpPr>
-        <p:spPr>
-          <a:xfrm>
-            <a:off x="4983480" y="4800600"/>
-            <a:ext cx="1828800" cy="502920"/>
-          </a:xfrm>
-          <a:prstGeom prst="roundRect">
-            <a:avLst/>
-          </a:prstGeom>
-          <a:solidFill>
-            <a:srgbClr val="E6F2FF"/>
-          </a:solidFill>
-          <a:ln>
-            <a:solidFill>
-              <a:srgbClr val="0E4887"/>
-            </a:solidFill>
-          </a:ln>
-        </p:spPr>
-        <p:style>
-          <a:lnRef idx="1">
-            <a:schemeClr val="accent1"/>
-          </a:lnRef>
-          <a:fillRef idx="3">
-            <a:schemeClr val="accent1"/>
-          </a:fillRef>
-          <a:effectRef idx="2">
-            <a:schemeClr val="accent1"/>
-          </a:effectRef>
-          <a:fontRef idx="minor">
-            <a:schemeClr val="lt1"/>
-          </a:fontRef>
-        </p:style>
-        <p:txBody>
-          <a:bodyPr rtlCol="0" anchor="ctr"/>
-          <a:lstStyle/>
-          <a:p>
-            <a:pPr algn="ctr"/>
-            <a:r>
-              <a:rPr sz="1200" b="1">
-                <a:solidFill>
-                  <a:srgbClr val="2D2D2D"/>
-                </a:solidFill>
-              </a:rPr>
-              <a:t>SSM</a:t>
-            </a:r>
-          </a:p>
-        </p:txBody>
-      </p:sp>
-      <p:sp>
-        <p:nvSpPr>
-          <p:cNvPr id="12" name="Rounded Rectangle 11"/>
-          <p:cNvSpPr/>
-          <p:nvPr/>
-        </p:nvSpPr>
-        <p:spPr>
-          <a:xfrm>
-            <a:off x="6903720" y="4800600"/>
-            <a:ext cx="2057400" cy="502920"/>
-          </a:xfrm>
-          <a:prstGeom prst="roundRect">
-            <a:avLst/>
-          </a:prstGeom>
-          <a:solidFill>
-            <a:srgbClr val="E6F2FF"/>
-          </a:solidFill>
-          <a:ln>
-            <a:solidFill>
-              <a:srgbClr val="0E4887"/>
-            </a:solidFill>
-          </a:ln>
-        </p:spPr>
-        <p:style>
-          <a:lnRef idx="1">
-            <a:schemeClr val="accent1"/>
-          </a:lnRef>
-          <a:fillRef idx="3">
-            <a:schemeClr val="accent1"/>
-          </a:fillRef>
-          <a:effectRef idx="2">
-            <a:schemeClr val="accent1"/>
-          </a:effectRef>
-          <a:fontRef idx="minor">
-            <a:schemeClr val="lt1"/>
-          </a:fontRef>
-        </p:style>
-        <p:txBody>
-          <a:bodyPr rtlCol="0" anchor="ctr"/>
-          <a:lstStyle/>
-          <a:p>
-            <a:pPr algn="ctr"/>
-            <a:r>
-              <a:rPr sz="1200" b="1">
-                <a:solidFill>
-                  <a:srgbClr val="2D2D2D"/>
-                </a:solidFill>
-              </a:rPr>
-              <a:t>Flow logs / CloudWatch</a:t>
-            </a:r>
-          </a:p>
-        </p:txBody>
-      </p:sp>
-      <p:cxnSp>
-        <p:nvCxnSpPr>
-          <p:cNvPr id="13" name="Connector 12"/>
-          <p:cNvCxnSpPr/>
-          <p:nvPr/>
-        </p:nvCxnSpPr>
-        <p:spPr>
-          <a:xfrm>
-            <a:off x="2377440" y="1874519"/>
-            <a:ext cx="365760" cy="0"/>
-          </a:xfrm>
-          <a:prstGeom prst="line">
-            <a:avLst/>
-          </a:prstGeom>
-          <a:ln w="25400">
-            <a:solidFill>
-              <a:srgbClr val="0E4887"/>
-            </a:solidFill>
-          </a:ln>
-        </p:spPr>
-        <p:style>
-          <a:lnRef idx="2">
-            <a:schemeClr val="accent1"/>
-          </a:lnRef>
-          <a:fillRef idx="0">
-            <a:schemeClr val="accent1"/>
-          </a:fillRef>
-          <a:effectRef idx="1">
-            <a:schemeClr val="accent1"/>
-          </a:effectRef>
-          <a:fontRef idx="minor">
-            <a:schemeClr val="tx1"/>
-          </a:fontRef>
-        </p:style>
-      </p:cxnSp>
-      <p:cxnSp>
-        <p:nvCxnSpPr>
-          <p:cNvPr id="14" name="Connector 13"/>
-          <p:cNvCxnSpPr/>
-          <p:nvPr/>
-        </p:nvCxnSpPr>
-        <p:spPr>
-          <a:xfrm>
-            <a:off x="2377440" y="3291840"/>
-            <a:ext cx="365760" cy="0"/>
-          </a:xfrm>
-          <a:prstGeom prst="line">
-            <a:avLst/>
-          </a:prstGeom>
-          <a:ln w="25400">
-            <a:solidFill>
-              <a:srgbClr val="0E4887"/>
-            </a:solidFill>
-          </a:ln>
-        </p:spPr>
-        <p:style>
-          <a:lnRef idx="2">
-            <a:schemeClr val="accent1"/>
-          </a:lnRef>
-          <a:fillRef idx="0">
-            <a:schemeClr val="accent1"/>
-          </a:fillRef>
-          <a:effectRef idx="1">
-            <a:schemeClr val="accent1"/>
-          </a:effectRef>
-          <a:fontRef idx="minor">
-            <a:schemeClr val="tx1"/>
-          </a:fontRef>
-        </p:style>
-      </p:cxnSp>
-      <p:cxnSp>
-        <p:nvCxnSpPr>
-          <p:cNvPr id="15" name="Connector 14"/>
-          <p:cNvCxnSpPr/>
-          <p:nvPr/>
-        </p:nvCxnSpPr>
-        <p:spPr>
-          <a:xfrm>
-            <a:off x="9235440" y="2743200"/>
-            <a:ext cx="411480" cy="0"/>
-          </a:xfrm>
-          <a:prstGeom prst="line">
-            <a:avLst/>
-          </a:prstGeom>
-          <a:ln w="25400">
-            <a:solidFill>
-              <a:srgbClr val="0E4887"/>
-            </a:solidFill>
-          </a:ln>
-        </p:spPr>
-        <p:style>
-          <a:lnRef idx="2">
-            <a:schemeClr val="accent1"/>
-          </a:lnRef>
-          <a:fillRef idx="0">
-            <a:schemeClr val="accent1"/>
-          </a:fillRef>
-          <a:effectRef idx="1">
-            <a:schemeClr val="accent1"/>
-          </a:effectRef>
-          <a:fontRef idx="minor">
-            <a:schemeClr val="tx1"/>
-          </a:fontRef>
-        </p:style>
-      </p:cxnSp>
-      <p:cxnSp>
-        <p:nvCxnSpPr>
-          <p:cNvPr id="16" name="Connector 15"/>
-          <p:cNvCxnSpPr/>
-          <p:nvPr/>
-        </p:nvCxnSpPr>
-        <p:spPr>
-          <a:xfrm>
-            <a:off x="5943600" y="4434840"/>
-            <a:ext cx="2011679" cy="0"/>
-          </a:xfrm>
-          <a:prstGeom prst="line">
-            <a:avLst/>
-          </a:prstGeom>
-          <a:ln w="25400">
-            <a:solidFill>
-              <a:srgbClr val="0E4887"/>
-            </a:solidFill>
-          </a:ln>
-        </p:spPr>
-        <p:style>
-          <a:lnRef idx="2">
-            <a:schemeClr val="accent1"/>
-          </a:lnRef>
-          <a:fillRef idx="0">
-            <a:schemeClr val="accent1"/>
-          </a:fillRef>
-          <a:effectRef idx="1">
-            <a:schemeClr val="accent1"/>
-          </a:effectRef>
-          <a:fontRef idx="minor">
-            <a:schemeClr val="tx1"/>
-          </a:fontRef>
-        </p:style>
-      </p:cxnSp>
+          </a:p>
+        </p:txBody>
+      </p:sp>
+      <p:sp>
+        <p:nvSpPr>
+          <p:cNvPr id="14" name="TextBox 13"/>
+          <p:cNvSpPr txBox="1"/>
+          <p:nvPr/>
+        </p:nvSpPr>
+        <p:spPr>
+          <a:xfrm>
+            <a:off x="822960" y="5138928"/>
+            <a:ext cx="10698480" cy="292608"/>
+          </a:xfrm>
+          <a:prstGeom prst="rect">
+            <a:avLst/>
+          </a:prstGeom>
+          <a:noFill/>
+        </p:spPr>
+        <p:txBody>
+          <a:bodyPr wrap="square" anchor="t" lIns="25400" rIns="25400" tIns="12700" bIns="12700">
+            <a:spAutoFit/>
+          </a:bodyPr>
+          <a:lstStyle/>
+          <a:p>
+            <a:pPr algn="l"/>
+            <a:r>
+              <a:rPr sz="1250" b="1" i="0">
+                <a:solidFill>
+                  <a:srgbClr val="002C5F"/>
+                </a:solidFill>
+                <a:latin typeface="Calibri"/>
+              </a:rPr>
+              <a:t>Constraints &amp; notes</a:t>
+            </a:r>
+          </a:p>
+        </p:txBody>
+      </p:sp>
+      <p:sp>
+        <p:nvSpPr>
+          <p:cNvPr id="15" name="TextBox 14"/>
+          <p:cNvSpPr txBox="1"/>
+          <p:nvPr/>
+        </p:nvSpPr>
+        <p:spPr>
+          <a:xfrm>
+            <a:off x="822960" y="5449824"/>
+            <a:ext cx="10698480" cy="777240"/>
+          </a:xfrm>
+          <a:prstGeom prst="rect">
+            <a:avLst/>
+          </a:prstGeom>
+          <a:noFill/>
+        </p:spPr>
+        <p:txBody>
+          <a:bodyPr wrap="square" lIns="25400" rIns="25400" tIns="12700" bIns="12700">
+            <a:spAutoFit/>
+          </a:bodyPr>
+          <a:lstStyle/>
+          <a:p>
+            <a:pPr marL="182880" indent="-182880">
+              <a:spcAft>
+                <a:spcPts val="200"/>
+              </a:spcAft>
+              <a:buFont typeface="Arial"/>
+              <a:buChar char="•"/>
+            </a:pPr>
+            <a:r>
+              <a:rPr sz="1150" b="0" i="0">
+                <a:solidFill>
+                  <a:srgbClr val="595959"/>
+                </a:solidFill>
+                <a:latin typeface="Calibri"/>
+              </a:rPr>
+              <a:t>VPC 172.200.0.0/24 is not RFC1918 private space — confirm with the client, or deploy with 172.20.0.0/24 instead.</a:t>
+            </a:r>
+          </a:p>
+          <a:p>
+            <a:pPr marL="182880" indent="-182880">
+              <a:spcAft>
+                <a:spcPts val="200"/>
+              </a:spcAft>
+              <a:buFont typeface="Arial"/>
+              <a:buChar char="•"/>
+            </a:pPr>
+            <a:r>
+              <a:rPr sz="1150" b="0" i="0">
+                <a:solidFill>
+                  <a:srgbClr val="595959"/>
+                </a:solidFill>
+                <a:latin typeface="Calibri"/>
+              </a:rPr>
+              <a:t>Up to 10 developers access via Client VPN · Entra ID MFA is the client tenant's policy.</a:t>
+            </a:r>
+          </a:p>
+        </p:txBody>
+      </p:sp>
+      <p:sp>
+        <p:nvSpPr>
+          <p:cNvPr id="16" name="TextBox 15"/>
+          <p:cNvSpPr txBox="1"/>
+          <p:nvPr/>
+        </p:nvSpPr>
+        <p:spPr>
+          <a:xfrm>
+            <a:off x="502920" y="6473952"/>
+            <a:ext cx="8229600" cy="274320"/>
+          </a:xfrm>
+          <a:prstGeom prst="rect">
+            <a:avLst/>
+          </a:prstGeom>
+          <a:noFill/>
+        </p:spPr>
+        <p:txBody>
+          <a:bodyPr wrap="square" anchor="t" lIns="25400" rIns="25400" tIns="12700" bIns="12700">
+            <a:spAutoFit/>
+          </a:bodyPr>
+          <a:lstStyle/>
+          <a:p>
+            <a:pPr algn="l"/>
+            <a:r>
+              <a:rPr sz="900" b="0" i="0">
+                <a:solidFill>
+                  <a:srgbClr val="9AA7B4"/>
+                </a:solidFill>
+                <a:latin typeface="Calibri"/>
+              </a:rPr>
+              <a:t>HMSG WEC Racing · hmsg-rac-prd · eu-central-1 (Frankfurt)</a:t>
+            </a:r>
+          </a:p>
+        </p:txBody>
+      </p:sp>
       <p:sp>
         <p:nvSpPr>
           <p:cNvPr id="17" name="TextBox 16"/>
@@ -4422,8 +5283,8 @@
         </p:nvSpPr>
         <p:spPr>
           <a:xfrm>
-            <a:off x="502920" y="5623560"/>
-            <a:ext cx="10972800" cy="822960"/>
+            <a:off x="10332720" y="6473952"/>
+            <a:ext cx="1371600" cy="274320"/>
           </a:xfrm>
           <a:prstGeom prst="rect">
             <a:avLst/>
@@ -4431,20 +5292,20 @@
           <a:noFill/>
         </p:spPr>
         <p:txBody>
-          <a:bodyPr wrap="square" lIns="50800" rIns="50800" tIns="25400" bIns="25400">
+          <a:bodyPr wrap="square" anchor="t" lIns="25400" rIns="25400" tIns="12700" bIns="12700">
             <a:spAutoFit/>
           </a:bodyPr>
           <a:lstStyle/>
           <a:p>
-            <a:pPr>
-              <a:defRPr sz="1200">
-                <a:solidFill>
-                  <a:srgbClr val="2D2D2D"/>
-                </a:solidFill>
-              </a:defRPr>
-            </a:pPr>
-            <a:r>
-              <a:t>Client VPN provides developer access; Site-to-Site VPN is optional and added only when the on-prem values are supplied.</a:t>
+            <a:pPr algn="r"/>
+            <a:r>
+              <a:rPr sz="900" b="0" i="0">
+                <a:solidFill>
+                  <a:srgbClr val="9AA7B4"/>
+                </a:solidFill>
+                <a:latin typeface="Calibri"/>
+              </a:rPr>
+              <a:t>03 / 08</a:t>
             </a:r>
           </a:p>
         </p:txBody>
@@ -4475,8 +5336,8 @@
         </p:nvSpPr>
         <p:spPr>
           <a:xfrm>
-            <a:off x="411480" y="228600"/>
-            <a:ext cx="11155680" cy="731520"/>
+            <a:off x="502920" y="256032"/>
+            <a:ext cx="11155680" cy="274320"/>
           </a:xfrm>
           <a:prstGeom prst="rect">
             <a:avLst/>
@@ -4484,44 +5345,80 @@
           <a:noFill/>
         </p:spPr>
         <p:txBody>
-          <a:bodyPr wrap="none">
+          <a:bodyPr wrap="square" anchor="t" lIns="25400" rIns="25400" tIns="12700" bIns="12700">
             <a:spAutoFit/>
           </a:bodyPr>
           <a:lstStyle/>
           <a:p>
-            <a:r>
-              <a:rPr sz="2800" b="1">
-                <a:solidFill>
-                  <a:srgbClr val="0E4887"/>
-                </a:solidFill>
-              </a:rPr>
-              <a:t>Network and Security Design</a:t>
-            </a:r>
-          </a:p>
-        </p:txBody>
-      </p:sp>
-      <p:sp>
-        <p:nvSpPr>
-          <p:cNvPr id="3" name="Rounded Rectangle 2"/>
+            <a:pPr algn="l"/>
+            <a:r>
+              <a:rPr sz="1100" b="1" i="0">
+                <a:solidFill>
+                  <a:srgbClr val="00AAD2"/>
+                </a:solidFill>
+                <a:latin typeface="Calibri"/>
+              </a:rPr>
+              <a:t>02 · ARCHITECTURE</a:t>
+            </a:r>
+          </a:p>
+        </p:txBody>
+      </p:sp>
+      <p:sp>
+        <p:nvSpPr>
+          <p:cNvPr id="3" name="TextBox 2"/>
+          <p:cNvSpPr txBox="1"/>
+          <p:nvPr/>
+        </p:nvSpPr>
+        <p:spPr>
+          <a:xfrm>
+            <a:off x="502920" y="502920"/>
+            <a:ext cx="11155680" cy="566928"/>
+          </a:xfrm>
+          <a:prstGeom prst="rect">
+            <a:avLst/>
+          </a:prstGeom>
+          <a:noFill/>
+        </p:spPr>
+        <p:txBody>
+          <a:bodyPr wrap="square" anchor="t" lIns="25400" rIns="25400" tIns="12700" bIns="12700">
+            <a:spAutoFit/>
+          </a:bodyPr>
+          <a:lstStyle/>
+          <a:p>
+            <a:pPr algn="l"/>
+            <a:r>
+              <a:rPr sz="2900" b="1" i="0">
+                <a:solidFill>
+                  <a:srgbClr val="002C5F"/>
+                </a:solidFill>
+                <a:latin typeface="Calibri"/>
+              </a:rPr>
+              <a:t>Target architecture</a:t>
+            </a:r>
+          </a:p>
+        </p:txBody>
+      </p:sp>
+      <p:sp>
+        <p:nvSpPr>
+          <p:cNvPr id="4" name="Rectangle 3"/>
           <p:cNvSpPr/>
           <p:nvPr/>
         </p:nvSpPr>
         <p:spPr>
           <a:xfrm>
-            <a:off x="502920" y="1005840"/>
-            <a:ext cx="5303520" cy="594360"/>
-          </a:xfrm>
-          <a:prstGeom prst="roundRect">
+            <a:off x="521207" y="1170432"/>
+            <a:ext cx="1554480" cy="41148"/>
+          </a:xfrm>
+          <a:prstGeom prst="rect">
             <a:avLst/>
           </a:prstGeom>
           <a:solidFill>
-            <a:srgbClr val="E6F2FF"/>
+            <a:srgbClr val="F5A623"/>
           </a:solidFill>
           <a:ln>
-            <a:solidFill>
-              <a:srgbClr val="0E4887"/>
-            </a:solidFill>
+            <a:noFill/>
           </a:ln>
+          <a:effectLst/>
         </p:spPr>
         <p:style>
           <a:lnRef idx="1">
@@ -4542,97 +5439,6 @@
           <a:lstStyle/>
           <a:p>
             <a:pPr algn="ctr"/>
-            <a:r>
-              <a:rPr sz="1500" b="1">
-                <a:solidFill>
-                  <a:srgbClr val="2D2D2D"/>
-                </a:solidFill>
-              </a:rPr>
-              <a:t>Security groups</a:t>
-            </a:r>
-          </a:p>
-        </p:txBody>
-      </p:sp>
-      <p:sp>
-        <p:nvSpPr>
-          <p:cNvPr id="4" name="TextBox 3"/>
-          <p:cNvSpPr txBox="1"/>
-          <p:nvPr/>
-        </p:nvSpPr>
-        <p:spPr>
-          <a:xfrm>
-            <a:off x="640080" y="1737360"/>
-            <a:ext cx="4846320" cy="3200400"/>
-          </a:xfrm>
-          <a:prstGeom prst="rect">
-            <a:avLst/>
-          </a:prstGeom>
-          <a:noFill/>
-        </p:spPr>
-        <p:txBody>
-          <a:bodyPr wrap="square" lIns="50800" rIns="50800" tIns="25400" bIns="25400">
-            <a:spAutoFit/>
-          </a:bodyPr>
-          <a:lstStyle/>
-          <a:p>
-            <a:pPr>
-              <a:defRPr sz="1800">
-                <a:solidFill>
-                  <a:srgbClr val="2D2D2D"/>
-                </a:solidFill>
-              </a:defRPr>
-            </a:pPr>
-            <a:r>
-              <a:t>Client VPN SG: UDP 443 inbound from 0.0.0.0/0</a:t>
-            </a:r>
-          </a:p>
-          <a:p>
-            <a:pPr>
-              <a:defRPr sz="1800">
-                <a:solidFill>
-                  <a:srgbClr val="2D2D2D"/>
-                </a:solidFill>
-              </a:defRPr>
-            </a:pPr>
-            <a:r>
-              <a:t>Common SG: RDP 3389 from ClientVpnCidr; optional on-prem rule via S2S VPN</a:t>
-            </a:r>
-          </a:p>
-          <a:p>
-            <a:pPr>
-              <a:defRPr sz="1800">
-                <a:solidFill>
-                  <a:srgbClr val="2D2D2D"/>
-                </a:solidFill>
-              </a:defRPr>
-            </a:pPr>
-            <a:r>
-              <a:t>MSSQL SG: 1433 from ClientVpnCidr; optional on-prem rule via S2S VPN</a:t>
-            </a:r>
-          </a:p>
-          <a:p>
-            <a:pPr>
-              <a:defRPr sz="1800">
-                <a:solidFill>
-                  <a:srgbClr val="2D2D2D"/>
-                </a:solidFill>
-              </a:defRPr>
-            </a:pPr>
-            <a:r>
-              <a:t>VpcEndpoint SG: 443 from VpcCidr only</a:t>
-            </a:r>
-          </a:p>
-          <a:p>
-            <a:pPr>
-              <a:defRPr sz="1800">
-                <a:solidFill>
-                  <a:srgbClr val="2D2D2D"/>
-                </a:solidFill>
-              </a:defRPr>
-            </a:pPr>
-            <a:r>
-              <a:t>EC2 has no public IP and no direct internet route</a:t>
-            </a:r>
           </a:p>
         </p:txBody>
       </p:sp>
@@ -4644,20 +5450,23 @@
         </p:nvSpPr>
         <p:spPr>
           <a:xfrm>
-            <a:off x="6172200" y="1005840"/>
-            <a:ext cx="5303520" cy="594360"/>
+            <a:off x="2880360" y="1371600"/>
+            <a:ext cx="6355080" cy="4526280"/>
           </a:xfrm>
           <a:prstGeom prst="roundRect">
-            <a:avLst/>
+            <a:avLst>
+              <a:gd name="adj" fmla="val 3000"/>
+            </a:avLst>
           </a:prstGeom>
           <a:solidFill>
-            <a:srgbClr val="E6F2FF"/>
+            <a:srgbClr val="F7FAFD"/>
           </a:solidFill>
-          <a:ln>
+          <a:ln w="19050">
             <a:solidFill>
-              <a:srgbClr val="0E4887"/>
+              <a:srgbClr val="002C5F"/>
             </a:solidFill>
           </a:ln>
+          <a:effectLst/>
         </p:spPr>
         <p:style>
           <a:lnRef idx="1">
@@ -4678,14 +5487,6 @@
           <a:lstStyle/>
           <a:p>
             <a:pPr algn="ctr"/>
-            <a:r>
-              <a:rPr sz="1500" b="1">
-                <a:solidFill>
-                  <a:srgbClr val="2D2D2D"/>
-                </a:solidFill>
-              </a:rPr>
-              <a:t>Routing and logging</a:t>
-            </a:r>
           </a:p>
         </p:txBody>
       </p:sp>
@@ -4697,8 +5498,8 @@
         </p:nvSpPr>
         <p:spPr>
           <a:xfrm>
-            <a:off x="6309360" y="1737360"/>
-            <a:ext cx="4800600" cy="3200400"/>
+            <a:off x="3063240" y="1426464"/>
+            <a:ext cx="6035040" cy="274320"/>
           </a:xfrm>
           <a:prstGeom prst="rect">
             <a:avLst/>
@@ -4706,68 +5507,1273 @@
           <a:noFill/>
         </p:spPr>
         <p:txBody>
-          <a:bodyPr wrap="square" lIns="50800" rIns="50800" tIns="25400" bIns="25400">
+          <a:bodyPr wrap="square" anchor="t" lIns="25400" rIns="25400" tIns="12700" bIns="12700">
             <a:spAutoFit/>
           </a:bodyPr>
           <a:lstStyle/>
           <a:p>
-            <a:pPr>
-              <a:defRPr sz="1800">
-                <a:solidFill>
-                  <a:srgbClr val="2D2D2D"/>
-                </a:solidFill>
-              </a:defRPr>
-            </a:pPr>
-            <a:r>
-              <a:t>Public route table → IGW</a:t>
-            </a:r>
-          </a:p>
-          <a:p>
-            <a:pPr>
-              <a:defRPr sz="1800">
-                <a:solidFill>
-                  <a:srgbClr val="2D2D2D"/>
-                </a:solidFill>
-              </a:defRPr>
-            </a:pPr>
-            <a:r>
-              <a:t>Private route table → NAT gateway</a:t>
-            </a:r>
-          </a:p>
-          <a:p>
-            <a:pPr>
-              <a:defRPr sz="1800">
-                <a:solidFill>
-                  <a:srgbClr val="2D2D2D"/>
-                </a:solidFill>
-              </a:defRPr>
-            </a:pPr>
-            <a:r>
-              <a:t>DB route table → no NAT/IGW; AWS API access only through VPC endpoints</a:t>
-            </a:r>
-          </a:p>
-          <a:p>
-            <a:pPr>
-              <a:defRPr sz="1800">
-                <a:solidFill>
-                  <a:srgbClr val="2D2D2D"/>
-                </a:solidFill>
-              </a:defRPr>
-            </a:pPr>
-            <a:r>
-              <a:t>VPC flow logs go to S3 with lifecycle expiry</a:t>
-            </a:r>
-          </a:p>
-          <a:p>
-            <a:pPr>
-              <a:defRPr sz="1800">
-                <a:solidFill>
-                  <a:srgbClr val="2D2D2D"/>
-                </a:solidFill>
-              </a:defRPr>
-            </a:pPr>
-            <a:r>
-              <a:t>Client VPN logs go to CloudWatch Logs with 90-day retention</a:t>
+            <a:pPr algn="l"/>
+            <a:r>
+              <a:rPr sz="1150" b="1" i="0">
+                <a:solidFill>
+                  <a:srgbClr val="002C5F"/>
+                </a:solidFill>
+                <a:latin typeface="Calibri"/>
+              </a:rPr>
+              <a:t>AWS Cloud · VPC hmsg-rac-prd-vpc-ec1 — 172.200.0.0/24</a:t>
+            </a:r>
+          </a:p>
+        </p:txBody>
+      </p:sp>
+      <p:sp>
+        <p:nvSpPr>
+          <p:cNvPr id="7" name="Rounded Rectangle 6"/>
+          <p:cNvSpPr/>
+          <p:nvPr/>
+        </p:nvSpPr>
+        <p:spPr>
+          <a:xfrm>
+            <a:off x="3063240" y="1847088"/>
+            <a:ext cx="5989320" cy="621792"/>
+          </a:xfrm>
+          <a:prstGeom prst="roundRect">
+            <a:avLst>
+              <a:gd name="adj" fmla="val 12000"/>
+            </a:avLst>
+          </a:prstGeom>
+          <a:solidFill>
+            <a:srgbClr val="E8F4FA"/>
+          </a:solidFill>
+          <a:ln w="12700">
+            <a:solidFill>
+              <a:srgbClr val="007FA8"/>
+            </a:solidFill>
+          </a:ln>
+          <a:effectLst/>
+        </p:spPr>
+        <p:style>
+          <a:lnRef idx="1">
+            <a:schemeClr val="accent1"/>
+          </a:lnRef>
+          <a:fillRef idx="3">
+            <a:schemeClr val="accent1"/>
+          </a:fillRef>
+          <a:effectRef idx="2">
+            <a:schemeClr val="accent1"/>
+          </a:effectRef>
+          <a:fontRef idx="minor">
+            <a:schemeClr val="lt1"/>
+          </a:fontRef>
+        </p:style>
+        <p:txBody>
+          <a:bodyPr rtlCol="0" anchor="ctr"/>
+          <a:lstStyle/>
+          <a:p>
+            <a:pPr algn="ctr"/>
+          </a:p>
+        </p:txBody>
+      </p:sp>
+      <p:sp>
+        <p:nvSpPr>
+          <p:cNvPr id="8" name="TextBox 7"/>
+          <p:cNvSpPr txBox="1"/>
+          <p:nvPr/>
+        </p:nvSpPr>
+        <p:spPr>
+          <a:xfrm>
+            <a:off x="3246120" y="2002536"/>
+            <a:ext cx="5669280" cy="365760"/>
+          </a:xfrm>
+          <a:prstGeom prst="rect">
+            <a:avLst/>
+          </a:prstGeom>
+          <a:noFill/>
+        </p:spPr>
+        <p:txBody>
+          <a:bodyPr wrap="square" anchor="t" lIns="25400" rIns="25400" tIns="12700" bIns="12700">
+            <a:spAutoFit/>
+          </a:bodyPr>
+          <a:lstStyle/>
+          <a:p>
+            <a:pPr algn="l"/>
+            <a:r>
+              <a:rPr sz="1200" b="1" i="0">
+                <a:solidFill>
+                  <a:srgbClr val="002C5F"/>
+                </a:solidFill>
+                <a:latin typeface="Calibri"/>
+              </a:rPr>
+              <a:t>PUBLIC · pub-ec1a / pub-ec1c — NAT gateway + Elastic IP</a:t>
+            </a:r>
+          </a:p>
+        </p:txBody>
+      </p:sp>
+      <p:sp>
+        <p:nvSpPr>
+          <p:cNvPr id="9" name="Rounded Rectangle 8"/>
+          <p:cNvSpPr/>
+          <p:nvPr/>
+        </p:nvSpPr>
+        <p:spPr>
+          <a:xfrm>
+            <a:off x="3063240" y="2670048"/>
+            <a:ext cx="5989320" cy="621792"/>
+          </a:xfrm>
+          <a:prstGeom prst="roundRect">
+            <a:avLst>
+              <a:gd name="adj" fmla="val 12000"/>
+            </a:avLst>
+          </a:prstGeom>
+          <a:solidFill>
+            <a:srgbClr val="EAF6EA"/>
+          </a:solidFill>
+          <a:ln w="12700">
+            <a:solidFill>
+              <a:srgbClr val="1E8449"/>
+            </a:solidFill>
+          </a:ln>
+          <a:effectLst/>
+        </p:spPr>
+        <p:style>
+          <a:lnRef idx="1">
+            <a:schemeClr val="accent1"/>
+          </a:lnRef>
+          <a:fillRef idx="3">
+            <a:schemeClr val="accent1"/>
+          </a:fillRef>
+          <a:effectRef idx="2">
+            <a:schemeClr val="accent1"/>
+          </a:effectRef>
+          <a:fontRef idx="minor">
+            <a:schemeClr val="lt1"/>
+          </a:fontRef>
+        </p:style>
+        <p:txBody>
+          <a:bodyPr rtlCol="0" anchor="ctr"/>
+          <a:lstStyle/>
+          <a:p>
+            <a:pPr algn="ctr"/>
+          </a:p>
+        </p:txBody>
+      </p:sp>
+      <p:sp>
+        <p:nvSpPr>
+          <p:cNvPr id="10" name="TextBox 9"/>
+          <p:cNvSpPr txBox="1"/>
+          <p:nvPr/>
+        </p:nvSpPr>
+        <p:spPr>
+          <a:xfrm>
+            <a:off x="3246120" y="2825496"/>
+            <a:ext cx="5669280" cy="365760"/>
+          </a:xfrm>
+          <a:prstGeom prst="rect">
+            <a:avLst/>
+          </a:prstGeom>
+          <a:noFill/>
+        </p:spPr>
+        <p:txBody>
+          <a:bodyPr wrap="square" anchor="t" lIns="25400" rIns="25400" tIns="12700" bIns="12700">
+            <a:spAutoFit/>
+          </a:bodyPr>
+          <a:lstStyle/>
+          <a:p>
+            <a:pPr algn="l"/>
+            <a:r>
+              <a:rPr sz="1200" b="1" i="0">
+                <a:solidFill>
+                  <a:srgbClr val="002C5F"/>
+                </a:solidFill>
+                <a:latin typeface="Calibri"/>
+              </a:rPr>
+              <a:t>PRIVATE · pri-ec1a / pri-ec1c — Client VPN target networks</a:t>
+            </a:r>
+          </a:p>
+        </p:txBody>
+      </p:sp>
+      <p:sp>
+        <p:nvSpPr>
+          <p:cNvPr id="11" name="Rounded Rectangle 10"/>
+          <p:cNvSpPr/>
+          <p:nvPr/>
+        </p:nvSpPr>
+        <p:spPr>
+          <a:xfrm>
+            <a:off x="3063240" y="3493008"/>
+            <a:ext cx="5989320" cy="621792"/>
+          </a:xfrm>
+          <a:prstGeom prst="roundRect">
+            <a:avLst>
+              <a:gd name="adj" fmla="val 12000"/>
+            </a:avLst>
+          </a:prstGeom>
+          <a:solidFill>
+            <a:srgbClr val="FDF3E7"/>
+          </a:solidFill>
+          <a:ln w="12700">
+            <a:solidFill>
+              <a:srgbClr val="F5A623"/>
+            </a:solidFill>
+          </a:ln>
+          <a:effectLst/>
+        </p:spPr>
+        <p:style>
+          <a:lnRef idx="1">
+            <a:schemeClr val="accent1"/>
+          </a:lnRef>
+          <a:fillRef idx="3">
+            <a:schemeClr val="accent1"/>
+          </a:fillRef>
+          <a:effectRef idx="2">
+            <a:schemeClr val="accent1"/>
+          </a:effectRef>
+          <a:fontRef idx="minor">
+            <a:schemeClr val="lt1"/>
+          </a:fontRef>
+        </p:style>
+        <p:txBody>
+          <a:bodyPr rtlCol="0" anchor="ctr"/>
+          <a:lstStyle/>
+          <a:p>
+            <a:pPr algn="ctr"/>
+          </a:p>
+        </p:txBody>
+      </p:sp>
+      <p:sp>
+        <p:nvSpPr>
+          <p:cNvPr id="12" name="TextBox 11"/>
+          <p:cNvSpPr txBox="1"/>
+          <p:nvPr/>
+        </p:nvSpPr>
+        <p:spPr>
+          <a:xfrm>
+            <a:off x="3246120" y="3648456"/>
+            <a:ext cx="5669280" cy="365760"/>
+          </a:xfrm>
+          <a:prstGeom prst="rect">
+            <a:avLst/>
+          </a:prstGeom>
+          <a:noFill/>
+        </p:spPr>
+        <p:txBody>
+          <a:bodyPr wrap="square" anchor="t" lIns="25400" rIns="25400" tIns="12700" bIns="12700">
+            <a:spAutoFit/>
+          </a:bodyPr>
+          <a:lstStyle/>
+          <a:p>
+            <a:pPr algn="l"/>
+            <a:r>
+              <a:rPr sz="1200" b="1" i="0">
+                <a:solidFill>
+                  <a:srgbClr val="002C5F"/>
+                </a:solidFill>
+                <a:latin typeface="Calibri"/>
+              </a:rPr>
+              <a:t>DB · db-ec1a / db-ec1c — MSSQL host (m7i.2xlarge)</a:t>
+            </a:r>
+          </a:p>
+        </p:txBody>
+      </p:sp>
+      <p:sp>
+        <p:nvSpPr>
+          <p:cNvPr id="13" name="TextBox 12"/>
+          <p:cNvSpPr txBox="1"/>
+          <p:nvPr/>
+        </p:nvSpPr>
+        <p:spPr>
+          <a:xfrm>
+            <a:off x="3063240" y="4590288"/>
+            <a:ext cx="6035040" cy="256032"/>
+          </a:xfrm>
+          <a:prstGeom prst="rect">
+            <a:avLst/>
+          </a:prstGeom>
+          <a:noFill/>
+        </p:spPr>
+        <p:txBody>
+          <a:bodyPr wrap="square" anchor="t" lIns="25400" rIns="25400" tIns="12700" bIns="12700">
+            <a:spAutoFit/>
+          </a:bodyPr>
+          <a:lstStyle/>
+          <a:p>
+            <a:pPr algn="l"/>
+            <a:r>
+              <a:rPr sz="1050" b="0" i="0">
+                <a:solidFill>
+                  <a:srgbClr val="595959"/>
+                </a:solidFill>
+                <a:latin typeface="Calibri"/>
+              </a:rPr>
+              <a:t>VPC interface endpoints (Secrets Manager · SSM · SSM Messages · EC2 Messages)</a:t>
+            </a:r>
+          </a:p>
+        </p:txBody>
+      </p:sp>
+      <p:sp>
+        <p:nvSpPr>
+          <p:cNvPr id="14" name="Rounded Rectangle 13"/>
+          <p:cNvSpPr/>
+          <p:nvPr/>
+        </p:nvSpPr>
+        <p:spPr>
+          <a:xfrm>
+            <a:off x="3063240" y="4864608"/>
+            <a:ext cx="1426464" cy="457200"/>
+          </a:xfrm>
+          <a:prstGeom prst="roundRect">
+            <a:avLst>
+              <a:gd name="adj" fmla="val 50000"/>
+            </a:avLst>
+          </a:prstGeom>
+          <a:solidFill>
+            <a:srgbClr val="E8F4FA"/>
+          </a:solidFill>
+          <a:ln w="12700">
+            <a:solidFill>
+              <a:srgbClr val="007FA8"/>
+            </a:solidFill>
+          </a:ln>
+          <a:effectLst/>
+        </p:spPr>
+        <p:style>
+          <a:lnRef idx="1">
+            <a:schemeClr val="accent1"/>
+          </a:lnRef>
+          <a:fillRef idx="3">
+            <a:schemeClr val="accent1"/>
+          </a:fillRef>
+          <a:effectRef idx="2">
+            <a:schemeClr val="accent1"/>
+          </a:effectRef>
+          <a:fontRef idx="minor">
+            <a:schemeClr val="lt1"/>
+          </a:fontRef>
+        </p:style>
+        <p:txBody>
+          <a:bodyPr rtlCol="0" anchor="ctr" wrap="square" lIns="38100" rIns="38100"/>
+          <a:lstStyle/>
+          <a:p>
+            <a:pPr algn="ctr"/>
+            <a:r>
+              <a:rPr sz="1100" b="1" i="0">
+                <a:solidFill>
+                  <a:srgbClr val="002C5F"/>
+                </a:solidFill>
+                <a:latin typeface="Calibri"/>
+              </a:rPr>
+              <a:t>Secrets Manager</a:t>
+            </a:r>
+          </a:p>
+        </p:txBody>
+      </p:sp>
+      <p:sp>
+        <p:nvSpPr>
+          <p:cNvPr id="15" name="Rounded Rectangle 14"/>
+          <p:cNvSpPr/>
+          <p:nvPr/>
+        </p:nvSpPr>
+        <p:spPr>
+          <a:xfrm>
+            <a:off x="4581144" y="4864608"/>
+            <a:ext cx="1426464" cy="457200"/>
+          </a:xfrm>
+          <a:prstGeom prst="roundRect">
+            <a:avLst>
+              <a:gd name="adj" fmla="val 50000"/>
+            </a:avLst>
+          </a:prstGeom>
+          <a:solidFill>
+            <a:srgbClr val="E8F4FA"/>
+          </a:solidFill>
+          <a:ln w="12700">
+            <a:solidFill>
+              <a:srgbClr val="007FA8"/>
+            </a:solidFill>
+          </a:ln>
+          <a:effectLst/>
+        </p:spPr>
+        <p:style>
+          <a:lnRef idx="1">
+            <a:schemeClr val="accent1"/>
+          </a:lnRef>
+          <a:fillRef idx="3">
+            <a:schemeClr val="accent1"/>
+          </a:fillRef>
+          <a:effectRef idx="2">
+            <a:schemeClr val="accent1"/>
+          </a:effectRef>
+          <a:fontRef idx="minor">
+            <a:schemeClr val="lt1"/>
+          </a:fontRef>
+        </p:style>
+        <p:txBody>
+          <a:bodyPr rtlCol="0" anchor="ctr" wrap="square" lIns="38100" rIns="38100"/>
+          <a:lstStyle/>
+          <a:p>
+            <a:pPr algn="ctr"/>
+            <a:r>
+              <a:rPr sz="1100" b="1" i="0">
+                <a:solidFill>
+                  <a:srgbClr val="002C5F"/>
+                </a:solidFill>
+                <a:latin typeface="Calibri"/>
+              </a:rPr>
+              <a:t>SSM</a:t>
+            </a:r>
+          </a:p>
+        </p:txBody>
+      </p:sp>
+      <p:sp>
+        <p:nvSpPr>
+          <p:cNvPr id="16" name="Rounded Rectangle 15"/>
+          <p:cNvSpPr/>
+          <p:nvPr/>
+        </p:nvSpPr>
+        <p:spPr>
+          <a:xfrm>
+            <a:off x="6099048" y="4864608"/>
+            <a:ext cx="1426464" cy="457200"/>
+          </a:xfrm>
+          <a:prstGeom prst="roundRect">
+            <a:avLst>
+              <a:gd name="adj" fmla="val 50000"/>
+            </a:avLst>
+          </a:prstGeom>
+          <a:solidFill>
+            <a:srgbClr val="E8F4FA"/>
+          </a:solidFill>
+          <a:ln w="12700">
+            <a:solidFill>
+              <a:srgbClr val="007FA8"/>
+            </a:solidFill>
+          </a:ln>
+          <a:effectLst/>
+        </p:spPr>
+        <p:style>
+          <a:lnRef idx="1">
+            <a:schemeClr val="accent1"/>
+          </a:lnRef>
+          <a:fillRef idx="3">
+            <a:schemeClr val="accent1"/>
+          </a:fillRef>
+          <a:effectRef idx="2">
+            <a:schemeClr val="accent1"/>
+          </a:effectRef>
+          <a:fontRef idx="minor">
+            <a:schemeClr val="lt1"/>
+          </a:fontRef>
+        </p:style>
+        <p:txBody>
+          <a:bodyPr rtlCol="0" anchor="ctr" wrap="square" lIns="38100" rIns="38100"/>
+          <a:lstStyle/>
+          <a:p>
+            <a:pPr algn="ctr"/>
+            <a:r>
+              <a:rPr sz="1100" b="1" i="0">
+                <a:solidFill>
+                  <a:srgbClr val="002C5F"/>
+                </a:solidFill>
+                <a:latin typeface="Calibri"/>
+              </a:rPr>
+              <a:t>CloudWatch</a:t>
+            </a:r>
+          </a:p>
+        </p:txBody>
+      </p:sp>
+      <p:sp>
+        <p:nvSpPr>
+          <p:cNvPr id="17" name="Rounded Rectangle 16"/>
+          <p:cNvSpPr/>
+          <p:nvPr/>
+        </p:nvSpPr>
+        <p:spPr>
+          <a:xfrm>
+            <a:off x="7616952" y="4864608"/>
+            <a:ext cx="1426464" cy="457200"/>
+          </a:xfrm>
+          <a:prstGeom prst="roundRect">
+            <a:avLst>
+              <a:gd name="adj" fmla="val 50000"/>
+            </a:avLst>
+          </a:prstGeom>
+          <a:solidFill>
+            <a:srgbClr val="E8F4FA"/>
+          </a:solidFill>
+          <a:ln w="12700">
+            <a:solidFill>
+              <a:srgbClr val="007FA8"/>
+            </a:solidFill>
+          </a:ln>
+          <a:effectLst/>
+        </p:spPr>
+        <p:style>
+          <a:lnRef idx="1">
+            <a:schemeClr val="accent1"/>
+          </a:lnRef>
+          <a:fillRef idx="3">
+            <a:schemeClr val="accent1"/>
+          </a:fillRef>
+          <a:effectRef idx="2">
+            <a:schemeClr val="accent1"/>
+          </a:effectRef>
+          <a:fontRef idx="minor">
+            <a:schemeClr val="lt1"/>
+          </a:fontRef>
+        </p:style>
+        <p:txBody>
+          <a:bodyPr rtlCol="0" anchor="ctr" wrap="square" lIns="38100" rIns="38100"/>
+          <a:lstStyle/>
+          <a:p>
+            <a:pPr algn="ctr"/>
+            <a:r>
+              <a:rPr sz="1100" b="1" i="0">
+                <a:solidFill>
+                  <a:srgbClr val="002C5F"/>
+                </a:solidFill>
+                <a:latin typeface="Calibri"/>
+              </a:rPr>
+              <a:t>S3 — flow logs</a:t>
+            </a:r>
+          </a:p>
+        </p:txBody>
+      </p:sp>
+      <p:sp>
+        <p:nvSpPr>
+          <p:cNvPr id="18" name="TextBox 17"/>
+          <p:cNvSpPr txBox="1"/>
+          <p:nvPr/>
+        </p:nvSpPr>
+        <p:spPr>
+          <a:xfrm>
+            <a:off x="3063240" y="5468112"/>
+            <a:ext cx="6035040" cy="274320"/>
+          </a:xfrm>
+          <a:prstGeom prst="rect">
+            <a:avLst/>
+          </a:prstGeom>
+          <a:noFill/>
+        </p:spPr>
+        <p:txBody>
+          <a:bodyPr wrap="square" anchor="t" lIns="25400" rIns="25400" tIns="12700" bIns="12700">
+            <a:spAutoFit/>
+          </a:bodyPr>
+          <a:lstStyle/>
+          <a:p>
+            <a:pPr algn="l"/>
+            <a:r>
+              <a:rPr sz="1000" b="0" i="0">
+                <a:solidFill>
+                  <a:srgbClr val="9AA7B4"/>
+                </a:solidFill>
+                <a:latin typeface="Calibri"/>
+              </a:rPr>
+              <a:t>Flow logs → S3 (lifecycle 30d → Glacier, expire 1y) · Client VPN logs → CloudWatch (90d)</a:t>
+            </a:r>
+          </a:p>
+        </p:txBody>
+      </p:sp>
+      <p:sp>
+        <p:nvSpPr>
+          <p:cNvPr id="19" name="Rounded Rectangle 18"/>
+          <p:cNvSpPr/>
+          <p:nvPr/>
+        </p:nvSpPr>
+        <p:spPr>
+          <a:xfrm>
+            <a:off x="9555480" y="2377440"/>
+            <a:ext cx="2331720" cy="960120"/>
+          </a:xfrm>
+          <a:prstGeom prst="roundRect">
+            <a:avLst>
+              <a:gd name="adj" fmla="val 8000"/>
+            </a:avLst>
+          </a:prstGeom>
+          <a:solidFill>
+            <a:srgbClr val="F2F2F2"/>
+          </a:solidFill>
+          <a:ln w="12700">
+            <a:solidFill>
+              <a:srgbClr val="595959"/>
+            </a:solidFill>
+          </a:ln>
+          <a:effectLst/>
+        </p:spPr>
+        <p:style>
+          <a:lnRef idx="1">
+            <a:schemeClr val="accent1"/>
+          </a:lnRef>
+          <a:fillRef idx="3">
+            <a:schemeClr val="accent1"/>
+          </a:fillRef>
+          <a:effectRef idx="2">
+            <a:schemeClr val="accent1"/>
+          </a:effectRef>
+          <a:fontRef idx="minor">
+            <a:schemeClr val="lt1"/>
+          </a:fontRef>
+        </p:style>
+        <p:txBody>
+          <a:bodyPr rtlCol="0" anchor="ctr"/>
+          <a:lstStyle/>
+          <a:p>
+            <a:pPr algn="ctr"/>
+          </a:p>
+        </p:txBody>
+      </p:sp>
+      <p:sp>
+        <p:nvSpPr>
+          <p:cNvPr id="20" name="TextBox 19"/>
+          <p:cNvSpPr txBox="1"/>
+          <p:nvPr/>
+        </p:nvSpPr>
+        <p:spPr>
+          <a:xfrm>
+            <a:off x="9692640" y="2487168"/>
+            <a:ext cx="2103120" cy="292608"/>
+          </a:xfrm>
+          <a:prstGeom prst="rect">
+            <a:avLst/>
+          </a:prstGeom>
+          <a:noFill/>
+        </p:spPr>
+        <p:txBody>
+          <a:bodyPr wrap="square" anchor="t" lIns="25400" rIns="25400" tIns="12700" bIns="12700">
+            <a:spAutoFit/>
+          </a:bodyPr>
+          <a:lstStyle/>
+          <a:p>
+            <a:pPr algn="l"/>
+            <a:r>
+              <a:rPr sz="1300" b="1" i="0">
+                <a:solidFill>
+                  <a:srgbClr val="002C5F"/>
+                </a:solidFill>
+                <a:latin typeface="Calibri"/>
+              </a:rPr>
+              <a:t>On-prem racing site</a:t>
+            </a:r>
+          </a:p>
+        </p:txBody>
+      </p:sp>
+      <p:sp>
+        <p:nvSpPr>
+          <p:cNvPr id="21" name="TextBox 20"/>
+          <p:cNvSpPr txBox="1"/>
+          <p:nvPr/>
+        </p:nvSpPr>
+        <p:spPr>
+          <a:xfrm>
+            <a:off x="9692640" y="2788920"/>
+            <a:ext cx="2103120" cy="457200"/>
+          </a:xfrm>
+          <a:prstGeom prst="rect">
+            <a:avLst/>
+          </a:prstGeom>
+          <a:noFill/>
+        </p:spPr>
+        <p:txBody>
+          <a:bodyPr wrap="square" anchor="t" lIns="25400" rIns="25400" tIns="12700" bIns="12700">
+            <a:spAutoFit/>
+          </a:bodyPr>
+          <a:lstStyle/>
+          <a:p>
+            <a:pPr algn="l"/>
+            <a:r>
+              <a:rPr sz="1050" b="0" i="0">
+                <a:solidFill>
+                  <a:srgbClr val="595959"/>
+                </a:solidFill>
+                <a:latin typeface="Calibri"/>
+              </a:rPr>
+              <a:t>Hyundai firewall</a:t>
+            </a:r>
+          </a:p>
+          <a:p>
+            <a:pPr algn="l"/>
+            <a:r>
+              <a:rPr sz="1050" b="0" i="0">
+                <a:solidFill>
+                  <a:srgbClr val="595959"/>
+                </a:solidFill>
+                <a:latin typeface="Calibri"/>
+              </a:rPr>
+              <a:t>IPsec.1 · static</a:t>
+            </a:r>
+          </a:p>
+        </p:txBody>
+      </p:sp>
+      <p:sp>
+        <p:nvSpPr>
+          <p:cNvPr id="22" name="Rounded Rectangle 21"/>
+          <p:cNvSpPr/>
+          <p:nvPr/>
+        </p:nvSpPr>
+        <p:spPr>
+          <a:xfrm>
+            <a:off x="9317736" y="3035808"/>
+            <a:ext cx="502920" cy="274320"/>
+          </a:xfrm>
+          <a:prstGeom prst="roundRect">
+            <a:avLst>
+              <a:gd name="adj" fmla="val 50000"/>
+            </a:avLst>
+          </a:prstGeom>
+          <a:solidFill>
+            <a:srgbClr val="002C5F"/>
+          </a:solidFill>
+          <a:ln>
+            <a:noFill/>
+          </a:ln>
+          <a:effectLst/>
+        </p:spPr>
+        <p:style>
+          <a:lnRef idx="1">
+            <a:schemeClr val="accent1"/>
+          </a:lnRef>
+          <a:fillRef idx="3">
+            <a:schemeClr val="accent1"/>
+          </a:fillRef>
+          <a:effectRef idx="2">
+            <a:schemeClr val="accent1"/>
+          </a:effectRef>
+          <a:fontRef idx="minor">
+            <a:schemeClr val="lt1"/>
+          </a:fontRef>
+        </p:style>
+        <p:txBody>
+          <a:bodyPr rtlCol="0" anchor="ctr" wrap="square" lIns="38100" rIns="38100"/>
+          <a:lstStyle/>
+          <a:p>
+            <a:pPr algn="ctr"/>
+            <a:r>
+              <a:rPr sz="900" b="1" i="0">
+                <a:solidFill>
+                  <a:srgbClr val="FFFFFF"/>
+                </a:solidFill>
+                <a:latin typeface="Calibri"/>
+              </a:rPr>
+              <a:t>VGW</a:t>
+            </a:r>
+          </a:p>
+        </p:txBody>
+      </p:sp>
+      <p:cxnSp>
+        <p:nvCxnSpPr>
+          <p:cNvPr id="23" name="Connector 22"/>
+          <p:cNvCxnSpPr/>
+          <p:nvPr/>
+        </p:nvCxnSpPr>
+        <p:spPr>
+          <a:xfrm>
+            <a:off x="9555480" y="2862072"/>
+            <a:ext cx="155448" cy="292608"/>
+          </a:xfrm>
+          <a:prstGeom prst="line">
+            <a:avLst/>
+          </a:prstGeom>
+          <a:ln w="22225">
+            <a:solidFill>
+              <a:srgbClr val="595959"/>
+            </a:solidFill>
+            <a:prstDash val="dash"/>
+            <a:tailEnd type="triangle" w="med" len="med"/>
+          </a:ln>
+        </p:spPr>
+        <p:style>
+          <a:lnRef idx="2">
+            <a:schemeClr val="accent1"/>
+          </a:lnRef>
+          <a:fillRef idx="0">
+            <a:schemeClr val="accent1"/>
+          </a:fillRef>
+          <a:effectRef idx="1">
+            <a:schemeClr val="accent1"/>
+          </a:effectRef>
+          <a:fontRef idx="minor">
+            <a:schemeClr val="tx1"/>
+          </a:fontRef>
+        </p:style>
+      </p:cxnSp>
+      <p:sp>
+        <p:nvSpPr>
+          <p:cNvPr id="24" name="TextBox 23"/>
+          <p:cNvSpPr txBox="1"/>
+          <p:nvPr/>
+        </p:nvSpPr>
+        <p:spPr>
+          <a:xfrm>
+            <a:off x="9464040" y="3429000"/>
+            <a:ext cx="2377440" cy="502920"/>
+          </a:xfrm>
+          <a:prstGeom prst="rect">
+            <a:avLst/>
+          </a:prstGeom>
+          <a:noFill/>
+        </p:spPr>
+        <p:txBody>
+          <a:bodyPr wrap="square" anchor="t" lIns="25400" rIns="25400" tIns="12700" bIns="12700">
+            <a:spAutoFit/>
+          </a:bodyPr>
+          <a:lstStyle/>
+          <a:p>
+            <a:pPr algn="l"/>
+            <a:r>
+              <a:rPr sz="1000" b="0" i="0">
+                <a:solidFill>
+                  <a:srgbClr val="9AA7B4"/>
+                </a:solidFill>
+                <a:latin typeface="Calibri"/>
+              </a:rPr>
+              <a:t>Site-to-Site VPN</a:t>
+            </a:r>
+          </a:p>
+          <a:p>
+            <a:pPr algn="l"/>
+            <a:r>
+              <a:rPr sz="1000" b="0" i="0">
+                <a:solidFill>
+                  <a:srgbClr val="9AA7B4"/>
+                </a:solidFill>
+                <a:latin typeface="Calibri"/>
+              </a:rPr>
+              <a:t>only when on-prem values are supplied</a:t>
+            </a:r>
+          </a:p>
+        </p:txBody>
+      </p:sp>
+      <p:sp>
+        <p:nvSpPr>
+          <p:cNvPr id="25" name="Rounded Rectangle 24"/>
+          <p:cNvSpPr/>
+          <p:nvPr/>
+        </p:nvSpPr>
+        <p:spPr>
+          <a:xfrm>
+            <a:off x="457200" y="1920240"/>
+            <a:ext cx="2011680" cy="822960"/>
+          </a:xfrm>
+          <a:prstGeom prst="roundRect">
+            <a:avLst>
+              <a:gd name="adj" fmla="val 8000"/>
+            </a:avLst>
+          </a:prstGeom>
+          <a:solidFill>
+            <a:srgbClr val="F2F2F2"/>
+          </a:solidFill>
+          <a:ln w="12700">
+            <a:solidFill>
+              <a:srgbClr val="595959"/>
+            </a:solidFill>
+          </a:ln>
+          <a:effectLst/>
+        </p:spPr>
+        <p:style>
+          <a:lnRef idx="1">
+            <a:schemeClr val="accent1"/>
+          </a:lnRef>
+          <a:fillRef idx="3">
+            <a:schemeClr val="accent1"/>
+          </a:fillRef>
+          <a:effectRef idx="2">
+            <a:schemeClr val="accent1"/>
+          </a:effectRef>
+          <a:fontRef idx="minor">
+            <a:schemeClr val="lt1"/>
+          </a:fontRef>
+        </p:style>
+        <p:txBody>
+          <a:bodyPr rtlCol="0" anchor="ctr"/>
+          <a:lstStyle/>
+          <a:p>
+            <a:pPr algn="ctr"/>
+          </a:p>
+        </p:txBody>
+      </p:sp>
+      <p:sp>
+        <p:nvSpPr>
+          <p:cNvPr id="26" name="TextBox 25"/>
+          <p:cNvSpPr txBox="1"/>
+          <p:nvPr/>
+        </p:nvSpPr>
+        <p:spPr>
+          <a:xfrm>
+            <a:off x="594360" y="2029968"/>
+            <a:ext cx="1783080" cy="274320"/>
+          </a:xfrm>
+          <a:prstGeom prst="rect">
+            <a:avLst/>
+          </a:prstGeom>
+          <a:noFill/>
+        </p:spPr>
+        <p:txBody>
+          <a:bodyPr wrap="square" anchor="t" lIns="25400" rIns="25400" tIns="12700" bIns="12700">
+            <a:spAutoFit/>
+          </a:bodyPr>
+          <a:lstStyle/>
+          <a:p>
+            <a:pPr algn="l"/>
+            <a:r>
+              <a:rPr sz="1300" b="1" i="0">
+                <a:solidFill>
+                  <a:srgbClr val="002C5F"/>
+                </a:solidFill>
+                <a:latin typeface="Calibri"/>
+              </a:rPr>
+              <a:t>Developers (≤10)</a:t>
+            </a:r>
+          </a:p>
+        </p:txBody>
+      </p:sp>
+      <p:sp>
+        <p:nvSpPr>
+          <p:cNvPr id="27" name="TextBox 26"/>
+          <p:cNvSpPr txBox="1"/>
+          <p:nvPr/>
+        </p:nvSpPr>
+        <p:spPr>
+          <a:xfrm>
+            <a:off x="594360" y="2331720"/>
+            <a:ext cx="1783080" cy="365760"/>
+          </a:xfrm>
+          <a:prstGeom prst="rect">
+            <a:avLst/>
+          </a:prstGeom>
+          <a:noFill/>
+        </p:spPr>
+        <p:txBody>
+          <a:bodyPr wrap="square" anchor="t" lIns="25400" rIns="25400" tIns="12700" bIns="12700">
+            <a:spAutoFit/>
+          </a:bodyPr>
+          <a:lstStyle/>
+          <a:p>
+            <a:pPr algn="l"/>
+            <a:r>
+              <a:rPr sz="1050" b="0" i="0">
+                <a:solidFill>
+                  <a:srgbClr val="595959"/>
+                </a:solidFill>
+                <a:latin typeface="Calibri"/>
+              </a:rPr>
+              <a:t>Entra ID SSO · MFA</a:t>
+            </a:r>
+          </a:p>
+        </p:txBody>
+      </p:sp>
+      <p:sp>
+        <p:nvSpPr>
+          <p:cNvPr id="28" name="Rounded Rectangle 27"/>
+          <p:cNvSpPr/>
+          <p:nvPr/>
+        </p:nvSpPr>
+        <p:spPr>
+          <a:xfrm>
+            <a:off x="457200" y="3291840"/>
+            <a:ext cx="2011680" cy="1005840"/>
+          </a:xfrm>
+          <a:prstGeom prst="roundRect">
+            <a:avLst>
+              <a:gd name="adj" fmla="val 8000"/>
+            </a:avLst>
+          </a:prstGeom>
+          <a:solidFill>
+            <a:srgbClr val="E8F4FA"/>
+          </a:solidFill>
+          <a:ln w="12700">
+            <a:solidFill>
+              <a:srgbClr val="007FA8"/>
+            </a:solidFill>
+          </a:ln>
+          <a:effectLst/>
+        </p:spPr>
+        <p:style>
+          <a:lnRef idx="1">
+            <a:schemeClr val="accent1"/>
+          </a:lnRef>
+          <a:fillRef idx="3">
+            <a:schemeClr val="accent1"/>
+          </a:fillRef>
+          <a:effectRef idx="2">
+            <a:schemeClr val="accent1"/>
+          </a:effectRef>
+          <a:fontRef idx="minor">
+            <a:schemeClr val="lt1"/>
+          </a:fontRef>
+        </p:style>
+        <p:txBody>
+          <a:bodyPr rtlCol="0" anchor="ctr"/>
+          <a:lstStyle/>
+          <a:p>
+            <a:pPr algn="ctr"/>
+          </a:p>
+        </p:txBody>
+      </p:sp>
+      <p:sp>
+        <p:nvSpPr>
+          <p:cNvPr id="29" name="TextBox 28"/>
+          <p:cNvSpPr txBox="1"/>
+          <p:nvPr/>
+        </p:nvSpPr>
+        <p:spPr>
+          <a:xfrm>
+            <a:off x="594360" y="3401568"/>
+            <a:ext cx="1783080" cy="274320"/>
+          </a:xfrm>
+          <a:prstGeom prst="rect">
+            <a:avLst/>
+          </a:prstGeom>
+          <a:noFill/>
+        </p:spPr>
+        <p:txBody>
+          <a:bodyPr wrap="square" anchor="t" lIns="25400" rIns="25400" tIns="12700" bIns="12700">
+            <a:spAutoFit/>
+          </a:bodyPr>
+          <a:lstStyle/>
+          <a:p>
+            <a:pPr algn="l"/>
+            <a:r>
+              <a:rPr sz="1300" b="1" i="0">
+                <a:solidFill>
+                  <a:srgbClr val="002C5F"/>
+                </a:solidFill>
+                <a:latin typeface="Calibri"/>
+              </a:rPr>
+              <a:t>AWS Client VPN</a:t>
+            </a:r>
+          </a:p>
+        </p:txBody>
+      </p:sp>
+      <p:sp>
+        <p:nvSpPr>
+          <p:cNvPr id="30" name="TextBox 29"/>
+          <p:cNvSpPr txBox="1"/>
+          <p:nvPr/>
+        </p:nvSpPr>
+        <p:spPr>
+          <a:xfrm>
+            <a:off x="594360" y="3703320"/>
+            <a:ext cx="1783080" cy="502920"/>
+          </a:xfrm>
+          <a:prstGeom prst="rect">
+            <a:avLst/>
+          </a:prstGeom>
+          <a:noFill/>
+        </p:spPr>
+        <p:txBody>
+          <a:bodyPr wrap="square" anchor="t" lIns="25400" rIns="25400" tIns="12700" bIns="12700">
+            <a:spAutoFit/>
+          </a:bodyPr>
+          <a:lstStyle/>
+          <a:p>
+            <a:pPr algn="l"/>
+            <a:r>
+              <a:rPr sz="1050" b="0" i="0">
+                <a:solidFill>
+                  <a:srgbClr val="595959"/>
+                </a:solidFill>
+                <a:latin typeface="Calibri"/>
+              </a:rPr>
+              <a:t>UDP 443 · SAML</a:t>
+            </a:r>
+          </a:p>
+          <a:p>
+            <a:pPr algn="l"/>
+            <a:r>
+              <a:rPr sz="1050" b="0" i="0">
+                <a:solidFill>
+                  <a:srgbClr val="595959"/>
+                </a:solidFill>
+                <a:latin typeface="Calibri"/>
+              </a:rPr>
+              <a:t>split tunnel</a:t>
+            </a:r>
+          </a:p>
+        </p:txBody>
+      </p:sp>
+      <p:cxnSp>
+        <p:nvCxnSpPr>
+          <p:cNvPr id="31" name="Connector 30"/>
+          <p:cNvCxnSpPr/>
+          <p:nvPr/>
+        </p:nvCxnSpPr>
+        <p:spPr>
+          <a:xfrm>
+            <a:off x="1463040" y="2743200"/>
+            <a:ext cx="0" cy="548640"/>
+          </a:xfrm>
+          <a:prstGeom prst="line">
+            <a:avLst/>
+          </a:prstGeom>
+          <a:ln w="22225">
+            <a:solidFill>
+              <a:srgbClr val="002C5F"/>
+            </a:solidFill>
+            <a:tailEnd type="triangle" w="med" len="med"/>
+          </a:ln>
+        </p:spPr>
+        <p:style>
+          <a:lnRef idx="2">
+            <a:schemeClr val="accent1"/>
+          </a:lnRef>
+          <a:fillRef idx="0">
+            <a:schemeClr val="accent1"/>
+          </a:fillRef>
+          <a:effectRef idx="1">
+            <a:schemeClr val="accent1"/>
+          </a:effectRef>
+          <a:fontRef idx="minor">
+            <a:schemeClr val="tx1"/>
+          </a:fontRef>
+        </p:style>
+      </p:cxnSp>
+      <p:cxnSp>
+        <p:nvCxnSpPr>
+          <p:cNvPr id="32" name="Connector 31"/>
+          <p:cNvCxnSpPr/>
+          <p:nvPr/>
+        </p:nvCxnSpPr>
+        <p:spPr>
+          <a:xfrm flipV="1">
+            <a:off x="2468880" y="2999232"/>
+            <a:ext cx="594360" cy="795528"/>
+          </a:xfrm>
+          <a:prstGeom prst="line">
+            <a:avLst/>
+          </a:prstGeom>
+          <a:ln w="25400">
+            <a:solidFill>
+              <a:srgbClr val="002C5F"/>
+            </a:solidFill>
+            <a:tailEnd type="triangle" w="med" len="med"/>
+          </a:ln>
+        </p:spPr>
+        <p:style>
+          <a:lnRef idx="2">
+            <a:schemeClr val="accent1"/>
+          </a:lnRef>
+          <a:fillRef idx="0">
+            <a:schemeClr val="accent1"/>
+          </a:fillRef>
+          <a:effectRef idx="1">
+            <a:schemeClr val="accent1"/>
+          </a:effectRef>
+          <a:fontRef idx="minor">
+            <a:schemeClr val="tx1"/>
+          </a:fontRef>
+        </p:style>
+      </p:cxnSp>
+      <p:sp>
+        <p:nvSpPr>
+          <p:cNvPr id="33" name="TextBox 32"/>
+          <p:cNvSpPr txBox="1"/>
+          <p:nvPr/>
+        </p:nvSpPr>
+        <p:spPr>
+          <a:xfrm>
+            <a:off x="1600200" y="3611880"/>
+            <a:ext cx="1554480" cy="411480"/>
+          </a:xfrm>
+          <a:prstGeom prst="rect">
+            <a:avLst/>
+          </a:prstGeom>
+          <a:noFill/>
+        </p:spPr>
+        <p:txBody>
+          <a:bodyPr wrap="square" anchor="t" lIns="25400" rIns="25400" tIns="12700" bIns="12700">
+            <a:spAutoFit/>
+          </a:bodyPr>
+          <a:lstStyle/>
+          <a:p>
+            <a:pPr algn="l"/>
+            <a:r>
+              <a:rPr sz="900" b="0" i="0">
+                <a:solidFill>
+                  <a:srgbClr val="595959"/>
+                </a:solidFill>
+                <a:latin typeface="Calibri"/>
+              </a:rPr>
+              <a:t>UDP 443</a:t>
+            </a:r>
+          </a:p>
+          <a:p>
+            <a:pPr algn="l"/>
+            <a:r>
+              <a:rPr sz="900" b="0" i="0">
+                <a:solidFill>
+                  <a:srgbClr val="595959"/>
+                </a:solidFill>
+                <a:latin typeface="Calibri"/>
+              </a:rPr>
+              <a:t>SAML SSO</a:t>
+            </a:r>
+          </a:p>
+        </p:txBody>
+      </p:sp>
+      <p:sp>
+        <p:nvSpPr>
+          <p:cNvPr id="34" name="TextBox 33"/>
+          <p:cNvSpPr txBox="1"/>
+          <p:nvPr/>
+        </p:nvSpPr>
+        <p:spPr>
+          <a:xfrm>
+            <a:off x="502920" y="6473952"/>
+            <a:ext cx="8229600" cy="274320"/>
+          </a:xfrm>
+          <a:prstGeom prst="rect">
+            <a:avLst/>
+          </a:prstGeom>
+          <a:noFill/>
+        </p:spPr>
+        <p:txBody>
+          <a:bodyPr wrap="square" anchor="t" lIns="25400" rIns="25400" tIns="12700" bIns="12700">
+            <a:spAutoFit/>
+          </a:bodyPr>
+          <a:lstStyle/>
+          <a:p>
+            <a:pPr algn="l"/>
+            <a:r>
+              <a:rPr sz="900" b="0" i="0">
+                <a:solidFill>
+                  <a:srgbClr val="9AA7B4"/>
+                </a:solidFill>
+                <a:latin typeface="Calibri"/>
+              </a:rPr>
+              <a:t>HMSG WEC Racing · hmsg-rac-prd · eu-central-1 (Frankfurt)</a:t>
+            </a:r>
+          </a:p>
+        </p:txBody>
+      </p:sp>
+      <p:sp>
+        <p:nvSpPr>
+          <p:cNvPr id="35" name="TextBox 34"/>
+          <p:cNvSpPr txBox="1"/>
+          <p:nvPr/>
+        </p:nvSpPr>
+        <p:spPr>
+          <a:xfrm>
+            <a:off x="10332720" y="6473952"/>
+            <a:ext cx="1371600" cy="274320"/>
+          </a:xfrm>
+          <a:prstGeom prst="rect">
+            <a:avLst/>
+          </a:prstGeom>
+          <a:noFill/>
+        </p:spPr>
+        <p:txBody>
+          <a:bodyPr wrap="square" anchor="t" lIns="25400" rIns="25400" tIns="12700" bIns="12700">
+            <a:spAutoFit/>
+          </a:bodyPr>
+          <a:lstStyle/>
+          <a:p>
+            <a:pPr algn="r"/>
+            <a:r>
+              <a:rPr sz="900" b="0" i="0">
+                <a:solidFill>
+                  <a:srgbClr val="9AA7B4"/>
+                </a:solidFill>
+                <a:latin typeface="Calibri"/>
+              </a:rPr>
+              <a:t>04 / 08</a:t>
             </a:r>
           </a:p>
         </p:txBody>
@@ -4798,8 +6804,8 @@
         </p:nvSpPr>
         <p:spPr>
           <a:xfrm>
-            <a:off x="411480" y="228600"/>
-            <a:ext cx="11155680" cy="731520"/>
+            <a:off x="502920" y="256032"/>
+            <a:ext cx="11155680" cy="274320"/>
           </a:xfrm>
           <a:prstGeom prst="rect">
             <a:avLst/>
@@ -4807,44 +6813,80 @@
           <a:noFill/>
         </p:spPr>
         <p:txBody>
-          <a:bodyPr wrap="none">
+          <a:bodyPr wrap="square" anchor="t" lIns="25400" rIns="25400" tIns="12700" bIns="12700">
             <a:spAutoFit/>
           </a:bodyPr>
           <a:lstStyle/>
           <a:p>
-            <a:r>
-              <a:rPr sz="2800" b="1">
-                <a:solidFill>
-                  <a:srgbClr val="0E4887"/>
-                </a:solidFill>
-              </a:rPr>
-              <a:t>VPN Design</a:t>
-            </a:r>
-          </a:p>
-        </p:txBody>
-      </p:sp>
-      <p:sp>
-        <p:nvSpPr>
-          <p:cNvPr id="3" name="Rounded Rectangle 2"/>
+            <a:pPr algn="l"/>
+            <a:r>
+              <a:rPr sz="1100" b="1" i="0">
+                <a:solidFill>
+                  <a:srgbClr val="00AAD2"/>
+                </a:solidFill>
+                <a:latin typeface="Calibri"/>
+              </a:rPr>
+              <a:t>03 · SECURITY</a:t>
+            </a:r>
+          </a:p>
+        </p:txBody>
+      </p:sp>
+      <p:sp>
+        <p:nvSpPr>
+          <p:cNvPr id="3" name="TextBox 2"/>
+          <p:cNvSpPr txBox="1"/>
+          <p:nvPr/>
+        </p:nvSpPr>
+        <p:spPr>
+          <a:xfrm>
+            <a:off x="502920" y="502920"/>
+            <a:ext cx="11155680" cy="566928"/>
+          </a:xfrm>
+          <a:prstGeom prst="rect">
+            <a:avLst/>
+          </a:prstGeom>
+          <a:noFill/>
+        </p:spPr>
+        <p:txBody>
+          <a:bodyPr wrap="square" anchor="t" lIns="25400" rIns="25400" tIns="12700" bIns="12700">
+            <a:spAutoFit/>
+          </a:bodyPr>
+          <a:lstStyle/>
+          <a:p>
+            <a:pPr algn="l"/>
+            <a:r>
+              <a:rPr sz="2900" b="1" i="0">
+                <a:solidFill>
+                  <a:srgbClr val="002C5F"/>
+                </a:solidFill>
+                <a:latin typeface="Calibri"/>
+              </a:rPr>
+              <a:t>Network &amp; security design</a:t>
+            </a:r>
+          </a:p>
+        </p:txBody>
+      </p:sp>
+      <p:sp>
+        <p:nvSpPr>
+          <p:cNvPr id="4" name="Rectangle 3"/>
           <p:cNvSpPr/>
           <p:nvPr/>
         </p:nvSpPr>
         <p:spPr>
           <a:xfrm>
-            <a:off x="502920" y="1005840"/>
-            <a:ext cx="5212080" cy="548640"/>
-          </a:xfrm>
-          <a:prstGeom prst="roundRect">
+            <a:off x="521207" y="1170432"/>
+            <a:ext cx="1554480" cy="41148"/>
+          </a:xfrm>
+          <a:prstGeom prst="rect">
             <a:avLst/>
           </a:prstGeom>
           <a:solidFill>
-            <a:srgbClr val="E3F0FC"/>
+            <a:srgbClr val="F5A623"/>
           </a:solidFill>
           <a:ln>
-            <a:solidFill>
-              <a:srgbClr val="0E4887"/>
-            </a:solidFill>
+            <a:noFill/>
           </a:ln>
+          <a:effectLst/>
         </p:spPr>
         <p:style>
           <a:lnRef idx="1">
@@ -4865,109 +6907,6 @@
           <a:lstStyle/>
           <a:p>
             <a:pPr algn="ctr"/>
-            <a:r>
-              <a:rPr sz="1500" b="1">
-                <a:solidFill>
-                  <a:srgbClr val="2D2D2D"/>
-                </a:solidFill>
-              </a:rPr>
-              <a:t>Client VPN</a:t>
-            </a:r>
-          </a:p>
-        </p:txBody>
-      </p:sp>
-      <p:sp>
-        <p:nvSpPr>
-          <p:cNvPr id="4" name="TextBox 3"/>
-          <p:cNvSpPr txBox="1"/>
-          <p:nvPr/>
-        </p:nvSpPr>
-        <p:spPr>
-          <a:xfrm>
-            <a:off x="640080" y="1691640"/>
-            <a:ext cx="4663440" cy="3291840"/>
-          </a:xfrm>
-          <a:prstGeom prst="rect">
-            <a:avLst/>
-          </a:prstGeom>
-          <a:noFill/>
-        </p:spPr>
-        <p:txBody>
-          <a:bodyPr wrap="square" lIns="50800" rIns="50800" tIns="25400" bIns="25400">
-            <a:spAutoFit/>
-          </a:bodyPr>
-          <a:lstStyle/>
-          <a:p>
-            <a:pPr>
-              <a:defRPr sz="1800">
-                <a:solidFill>
-                  <a:srgbClr val="2D2D2D"/>
-                </a:solidFill>
-              </a:defRPr>
-            </a:pPr>
-            <a:r>
-              <a:t>Client CIDR: 10.200.0.0/22</a:t>
-            </a:r>
-          </a:p>
-          <a:p>
-            <a:pPr>
-              <a:defRPr sz="1800">
-                <a:solidFill>
-                  <a:srgbClr val="2D2D2D"/>
-                </a:solidFill>
-              </a:defRPr>
-            </a:pPr>
-            <a:r>
-              <a:t>Authentication: Federated SAML via Entra ID</a:t>
-            </a:r>
-          </a:p>
-          <a:p>
-            <a:pPr>
-              <a:defRPr sz="1800">
-                <a:solidFill>
-                  <a:srgbClr val="2D2D2D"/>
-                </a:solidFill>
-              </a:defRPr>
-            </a:pPr>
-            <a:r>
-              <a:t>Transport: UDP 443</a:t>
-            </a:r>
-          </a:p>
-          <a:p>
-            <a:pPr>
-              <a:defRPr sz="1800">
-                <a:solidFill>
-                  <a:srgbClr val="2D2D2D"/>
-                </a:solidFill>
-              </a:defRPr>
-            </a:pPr>
-            <a:r>
-              <a:t>Split tunnel enabled</a:t>
-            </a:r>
-          </a:p>
-          <a:p>
-            <a:pPr>
-              <a:defRPr sz="1800">
-                <a:solidFill>
-                  <a:srgbClr val="2D2D2D"/>
-                </a:solidFill>
-              </a:defRPr>
-            </a:pPr>
-            <a:r>
-              <a:t>Target networks: PriSubnetA and PriSubnetC</a:t>
-            </a:r>
-          </a:p>
-          <a:p>
-            <a:pPr>
-              <a:defRPr sz="1800">
-                <a:solidFill>
-                  <a:srgbClr val="2D2D2D"/>
-                </a:solidFill>
-              </a:defRPr>
-            </a:pPr>
-            <a:r>
-              <a:t>Authorization: all groups to the whole VPC CIDR</a:t>
-            </a:r>
           </a:p>
         </p:txBody>
       </p:sp>
@@ -4979,20 +6918,23 @@
         </p:nvSpPr>
         <p:spPr>
           <a:xfrm>
-            <a:off x="6263640" y="1005840"/>
-            <a:ext cx="5212080" cy="548640"/>
+            <a:off x="502920" y="1463040"/>
+            <a:ext cx="2377440" cy="1965960"/>
           </a:xfrm>
           <a:prstGeom prst="roundRect">
-            <a:avLst/>
+            <a:avLst>
+              <a:gd name="adj" fmla="val 6000"/>
+            </a:avLst>
           </a:prstGeom>
           <a:solidFill>
-            <a:srgbClr val="FCEFEF"/>
+            <a:srgbClr val="FFFFFF"/>
           </a:solidFill>
-          <a:ln>
+          <a:ln w="12700">
             <a:solidFill>
-              <a:srgbClr val="0E4887"/>
+              <a:srgbClr val="BFCDDA"/>
             </a:solidFill>
           </a:ln>
+          <a:effectLst/>
         </p:spPr>
         <p:style>
           <a:lnRef idx="1">
@@ -5013,27 +6955,65 @@
           <a:lstStyle/>
           <a:p>
             <a:pPr algn="ctr"/>
-            <a:r>
-              <a:rPr sz="1500" b="1">
-                <a:solidFill>
-                  <a:srgbClr val="2D2D2D"/>
-                </a:solidFill>
-              </a:rPr>
-              <a:t>Site-to-Site VPN</a:t>
-            </a:r>
-          </a:p>
-        </p:txBody>
-      </p:sp>
-      <p:sp>
-        <p:nvSpPr>
-          <p:cNvPr id="6" name="TextBox 5"/>
+          </a:p>
+        </p:txBody>
+      </p:sp>
+      <p:sp>
+        <p:nvSpPr>
+          <p:cNvPr id="6" name="Rounded Rectangle 5"/>
+          <p:cNvSpPr/>
+          <p:nvPr/>
+        </p:nvSpPr>
+        <p:spPr>
+          <a:xfrm>
+            <a:off x="502920" y="1463040"/>
+            <a:ext cx="2377440" cy="502920"/>
+          </a:xfrm>
+          <a:prstGeom prst="roundRect">
+            <a:avLst>
+              <a:gd name="adj" fmla="val 35000"/>
+            </a:avLst>
+          </a:prstGeom>
+          <a:solidFill>
+            <a:srgbClr val="E8F4FA"/>
+          </a:solidFill>
+          <a:ln>
+            <a:noFill/>
+          </a:ln>
+          <a:effectLst/>
+        </p:spPr>
+        <p:style>
+          <a:lnRef idx="1">
+            <a:schemeClr val="accent1"/>
+          </a:lnRef>
+          <a:fillRef idx="3">
+            <a:schemeClr val="accent1"/>
+          </a:fillRef>
+          <a:effectRef idx="2">
+            <a:schemeClr val="accent1"/>
+          </a:effectRef>
+          <a:fontRef idx="minor">
+            <a:schemeClr val="lt1"/>
+          </a:fontRef>
+        </p:style>
+        <p:txBody>
+          <a:bodyPr rtlCol="0" anchor="ctr"/>
+          <a:lstStyle/>
+          <a:p>
+            <a:pPr algn="ctr"/>
+          </a:p>
+        </p:txBody>
+      </p:sp>
+      <p:sp>
+        <p:nvSpPr>
+          <p:cNvPr id="7" name="TextBox 6"/>
           <p:cNvSpPr txBox="1"/>
           <p:nvPr/>
         </p:nvSpPr>
         <p:spPr>
           <a:xfrm>
-            <a:off x="6400800" y="1691640"/>
-            <a:ext cx="4663440" cy="3291840"/>
+            <a:off x="667512" y="1572768"/>
+            <a:ext cx="2103120" cy="320040"/>
           </a:xfrm>
           <a:prstGeom prst="rect">
             <a:avLst/>
@@ -5041,68 +7021,891 @@
           <a:noFill/>
         </p:spPr>
         <p:txBody>
-          <a:bodyPr wrap="square" lIns="50800" rIns="50800" tIns="25400" bIns="25400">
+          <a:bodyPr wrap="square" anchor="t" lIns="25400" rIns="25400" tIns="12700" bIns="12700">
             <a:spAutoFit/>
           </a:bodyPr>
           <a:lstStyle/>
           <a:p>
-            <a:pPr>
-              <a:defRPr sz="1800">
-                <a:solidFill>
-                  <a:srgbClr val="2D2D2D"/>
-                </a:solidFill>
-              </a:defRPr>
+            <a:pPr algn="l"/>
+            <a:r>
+              <a:rPr sz="1300" b="1" i="0">
+                <a:solidFill>
+                  <a:srgbClr val="002C5F"/>
+                </a:solidFill>
+                <a:latin typeface="Calibri"/>
+              </a:rPr>
+              <a:t>Client VPN SG</a:t>
+            </a:r>
+          </a:p>
+        </p:txBody>
+      </p:sp>
+      <p:sp>
+        <p:nvSpPr>
+          <p:cNvPr id="8" name="TextBox 7"/>
+          <p:cNvSpPr txBox="1"/>
+          <p:nvPr/>
+        </p:nvSpPr>
+        <p:spPr>
+          <a:xfrm>
+            <a:off x="685800" y="2121408"/>
+            <a:ext cx="2057400" cy="1234440"/>
+          </a:xfrm>
+          <a:prstGeom prst="rect">
+            <a:avLst/>
+          </a:prstGeom>
+          <a:noFill/>
+        </p:spPr>
+        <p:txBody>
+          <a:bodyPr wrap="square" lIns="25400" rIns="25400" tIns="12700" bIns="12700">
+            <a:spAutoFit/>
+          </a:bodyPr>
+          <a:lstStyle/>
+          <a:p>
+            <a:pPr marL="182880" indent="-182880">
+              <a:spcAft>
+                <a:spcPts val="400"/>
+              </a:spcAft>
+              <a:buFont typeface="Arial"/>
+              <a:buChar char="•"/>
             </a:pPr>
             <a:r>
-              <a:t>Conditional: created only when CustomerGatewayIp and OnPremCidr are supplied</a:t>
-            </a:r>
-          </a:p>
-          <a:p>
-            <a:pPr>
-              <a:defRPr sz="1800">
-                <a:solidFill>
-                  <a:srgbClr val="2D2D2D"/>
-                </a:solidFill>
-              </a:defRPr>
+              <a:rPr sz="1050" b="0" i="0">
+                <a:solidFill>
+                  <a:srgbClr val="595959"/>
+                </a:solidFill>
+                <a:latin typeface="Calibri"/>
+              </a:rPr>
+              <a:t>UDP 443 in — 0.0.0.0/0 (endpoint must be reachable)</a:t>
+            </a:r>
+          </a:p>
+          <a:p>
+            <a:pPr marL="182880" indent="-182880">
+              <a:spcAft>
+                <a:spcPts val="400"/>
+              </a:spcAft>
+              <a:buFont typeface="Arial"/>
+              <a:buChar char="•"/>
             </a:pPr>
             <a:r>
-              <a:t>Customer gateway type: ipsec.1</a:t>
-            </a:r>
-          </a:p>
-          <a:p>
-            <a:pPr>
-              <a:defRPr sz="1800">
-                <a:solidFill>
-                  <a:srgbClr val="2D2D2D"/>
-                </a:solidFill>
-              </a:defRPr>
+              <a:rPr sz="1050" b="0" i="0">
+                <a:solidFill>
+                  <a:srgbClr val="595959"/>
+                </a:solidFill>
+                <a:latin typeface="Calibri"/>
+              </a:rPr>
+              <a:t>egress 3389 / 1433 → VPC CIDR (tunnel traffic)</a:t>
+            </a:r>
+          </a:p>
+        </p:txBody>
+      </p:sp>
+      <p:sp>
+        <p:nvSpPr>
+          <p:cNvPr id="9" name="Rounded Rectangle 8"/>
+          <p:cNvSpPr/>
+          <p:nvPr/>
+        </p:nvSpPr>
+        <p:spPr>
+          <a:xfrm>
+            <a:off x="3108960" y="1463040"/>
+            <a:ext cx="2377440" cy="1965960"/>
+          </a:xfrm>
+          <a:prstGeom prst="roundRect">
+            <a:avLst>
+              <a:gd name="adj" fmla="val 6000"/>
+            </a:avLst>
+          </a:prstGeom>
+          <a:solidFill>
+            <a:srgbClr val="FFFFFF"/>
+          </a:solidFill>
+          <a:ln w="12700">
+            <a:solidFill>
+              <a:srgbClr val="BFCDDA"/>
+            </a:solidFill>
+          </a:ln>
+          <a:effectLst/>
+        </p:spPr>
+        <p:style>
+          <a:lnRef idx="1">
+            <a:schemeClr val="accent1"/>
+          </a:lnRef>
+          <a:fillRef idx="3">
+            <a:schemeClr val="accent1"/>
+          </a:fillRef>
+          <a:effectRef idx="2">
+            <a:schemeClr val="accent1"/>
+          </a:effectRef>
+          <a:fontRef idx="minor">
+            <a:schemeClr val="lt1"/>
+          </a:fontRef>
+        </p:style>
+        <p:txBody>
+          <a:bodyPr rtlCol="0" anchor="ctr"/>
+          <a:lstStyle/>
+          <a:p>
+            <a:pPr algn="ctr"/>
+          </a:p>
+        </p:txBody>
+      </p:sp>
+      <p:sp>
+        <p:nvSpPr>
+          <p:cNvPr id="10" name="Rounded Rectangle 9"/>
+          <p:cNvSpPr/>
+          <p:nvPr/>
+        </p:nvSpPr>
+        <p:spPr>
+          <a:xfrm>
+            <a:off x="3108960" y="1463040"/>
+            <a:ext cx="2377440" cy="502920"/>
+          </a:xfrm>
+          <a:prstGeom prst="roundRect">
+            <a:avLst>
+              <a:gd name="adj" fmla="val 35000"/>
+            </a:avLst>
+          </a:prstGeom>
+          <a:solidFill>
+            <a:srgbClr val="EAF6EA"/>
+          </a:solidFill>
+          <a:ln>
+            <a:noFill/>
+          </a:ln>
+          <a:effectLst/>
+        </p:spPr>
+        <p:style>
+          <a:lnRef idx="1">
+            <a:schemeClr val="accent1"/>
+          </a:lnRef>
+          <a:fillRef idx="3">
+            <a:schemeClr val="accent1"/>
+          </a:fillRef>
+          <a:effectRef idx="2">
+            <a:schemeClr val="accent1"/>
+          </a:effectRef>
+          <a:fontRef idx="minor">
+            <a:schemeClr val="lt1"/>
+          </a:fontRef>
+        </p:style>
+        <p:txBody>
+          <a:bodyPr rtlCol="0" anchor="ctr"/>
+          <a:lstStyle/>
+          <a:p>
+            <a:pPr algn="ctr"/>
+          </a:p>
+        </p:txBody>
+      </p:sp>
+      <p:sp>
+        <p:nvSpPr>
+          <p:cNvPr id="11" name="TextBox 10"/>
+          <p:cNvSpPr txBox="1"/>
+          <p:nvPr/>
+        </p:nvSpPr>
+        <p:spPr>
+          <a:xfrm>
+            <a:off x="3273552" y="1572768"/>
+            <a:ext cx="2103120" cy="320040"/>
+          </a:xfrm>
+          <a:prstGeom prst="rect">
+            <a:avLst/>
+          </a:prstGeom>
+          <a:noFill/>
+        </p:spPr>
+        <p:txBody>
+          <a:bodyPr wrap="square" anchor="t" lIns="25400" rIns="25400" tIns="12700" bIns="12700">
+            <a:spAutoFit/>
+          </a:bodyPr>
+          <a:lstStyle/>
+          <a:p>
+            <a:pPr algn="l"/>
+            <a:r>
+              <a:rPr sz="1300" b="1" i="0">
+                <a:solidFill>
+                  <a:srgbClr val="002C5F"/>
+                </a:solidFill>
+                <a:latin typeface="Calibri"/>
+              </a:rPr>
+              <a:t>Common SG — RDP</a:t>
+            </a:r>
+          </a:p>
+        </p:txBody>
+      </p:sp>
+      <p:sp>
+        <p:nvSpPr>
+          <p:cNvPr id="12" name="TextBox 11"/>
+          <p:cNvSpPr txBox="1"/>
+          <p:nvPr/>
+        </p:nvSpPr>
+        <p:spPr>
+          <a:xfrm>
+            <a:off x="3291840" y="2121408"/>
+            <a:ext cx="2057400" cy="1234440"/>
+          </a:xfrm>
+          <a:prstGeom prst="rect">
+            <a:avLst/>
+          </a:prstGeom>
+          <a:noFill/>
+        </p:spPr>
+        <p:txBody>
+          <a:bodyPr wrap="square" lIns="25400" rIns="25400" tIns="12700" bIns="12700">
+            <a:spAutoFit/>
+          </a:bodyPr>
+          <a:lstStyle/>
+          <a:p>
+            <a:pPr marL="182880" indent="-182880">
+              <a:spcAft>
+                <a:spcPts val="400"/>
+              </a:spcAft>
+              <a:buFont typeface="Arial"/>
+              <a:buChar char="•"/>
             </a:pPr>
             <a:r>
-              <a:t>Static routing only</a:t>
-            </a:r>
-          </a:p>
-          <a:p>
-            <a:pPr>
-              <a:defRPr sz="1800">
-                <a:solidFill>
-                  <a:srgbClr val="2D2D2D"/>
-                </a:solidFill>
-              </a:defRPr>
+              <a:rPr sz="1050" b="0" i="0">
+                <a:solidFill>
+                  <a:srgbClr val="595959"/>
+                </a:solidFill>
+                <a:latin typeface="Calibri"/>
+              </a:rPr>
+              <a:t>TCP 3389 in — 10.200.0.0/22 (Client VPN)</a:t>
+            </a:r>
+          </a:p>
+          <a:p>
+            <a:pPr marL="182880" indent="-182880">
+              <a:spcAft>
+                <a:spcPts val="400"/>
+              </a:spcAft>
+              <a:buFont typeface="Arial"/>
+              <a:buChar char="•"/>
             </a:pPr>
             <a:r>
-              <a:t>Routes propagated to private and DB route tables</a:t>
-            </a:r>
-          </a:p>
-          <a:p>
-            <a:pPr>
-              <a:defRPr sz="1800">
-                <a:solidFill>
-                  <a:srgbClr val="2D2D2D"/>
-                </a:solidFill>
-              </a:defRPr>
+              <a:rPr sz="1050" b="0" i="0">
+                <a:solidFill>
+                  <a:srgbClr val="595959"/>
+                </a:solidFill>
+                <a:latin typeface="Calibri"/>
+              </a:rPr>
+              <a:t>optional: on-prem CIDR via Site-to-Site VPN</a:t>
+            </a:r>
+          </a:p>
+        </p:txBody>
+      </p:sp>
+      <p:sp>
+        <p:nvSpPr>
+          <p:cNvPr id="13" name="Rounded Rectangle 12"/>
+          <p:cNvSpPr/>
+          <p:nvPr/>
+        </p:nvSpPr>
+        <p:spPr>
+          <a:xfrm>
+            <a:off x="5715000" y="1463040"/>
+            <a:ext cx="2377440" cy="1965960"/>
+          </a:xfrm>
+          <a:prstGeom prst="roundRect">
+            <a:avLst>
+              <a:gd name="adj" fmla="val 6000"/>
+            </a:avLst>
+          </a:prstGeom>
+          <a:solidFill>
+            <a:srgbClr val="FFFFFF"/>
+          </a:solidFill>
+          <a:ln w="12700">
+            <a:solidFill>
+              <a:srgbClr val="BFCDDA"/>
+            </a:solidFill>
+          </a:ln>
+          <a:effectLst/>
+        </p:spPr>
+        <p:style>
+          <a:lnRef idx="1">
+            <a:schemeClr val="accent1"/>
+          </a:lnRef>
+          <a:fillRef idx="3">
+            <a:schemeClr val="accent1"/>
+          </a:fillRef>
+          <a:effectRef idx="2">
+            <a:schemeClr val="accent1"/>
+          </a:effectRef>
+          <a:fontRef idx="minor">
+            <a:schemeClr val="lt1"/>
+          </a:fontRef>
+        </p:style>
+        <p:txBody>
+          <a:bodyPr rtlCol="0" anchor="ctr"/>
+          <a:lstStyle/>
+          <a:p>
+            <a:pPr algn="ctr"/>
+          </a:p>
+        </p:txBody>
+      </p:sp>
+      <p:sp>
+        <p:nvSpPr>
+          <p:cNvPr id="14" name="Rounded Rectangle 13"/>
+          <p:cNvSpPr/>
+          <p:nvPr/>
+        </p:nvSpPr>
+        <p:spPr>
+          <a:xfrm>
+            <a:off x="5715000" y="1463040"/>
+            <a:ext cx="2377440" cy="502920"/>
+          </a:xfrm>
+          <a:prstGeom prst="roundRect">
+            <a:avLst>
+              <a:gd name="adj" fmla="val 35000"/>
+            </a:avLst>
+          </a:prstGeom>
+          <a:solidFill>
+            <a:srgbClr val="FDF3E7"/>
+          </a:solidFill>
+          <a:ln>
+            <a:noFill/>
+          </a:ln>
+          <a:effectLst/>
+        </p:spPr>
+        <p:style>
+          <a:lnRef idx="1">
+            <a:schemeClr val="accent1"/>
+          </a:lnRef>
+          <a:fillRef idx="3">
+            <a:schemeClr val="accent1"/>
+          </a:fillRef>
+          <a:effectRef idx="2">
+            <a:schemeClr val="accent1"/>
+          </a:effectRef>
+          <a:fontRef idx="minor">
+            <a:schemeClr val="lt1"/>
+          </a:fontRef>
+        </p:style>
+        <p:txBody>
+          <a:bodyPr rtlCol="0" anchor="ctr"/>
+          <a:lstStyle/>
+          <a:p>
+            <a:pPr algn="ctr"/>
+          </a:p>
+        </p:txBody>
+      </p:sp>
+      <p:sp>
+        <p:nvSpPr>
+          <p:cNvPr id="15" name="TextBox 14"/>
+          <p:cNvSpPr txBox="1"/>
+          <p:nvPr/>
+        </p:nvSpPr>
+        <p:spPr>
+          <a:xfrm>
+            <a:off x="5879592" y="1572768"/>
+            <a:ext cx="2103120" cy="320040"/>
+          </a:xfrm>
+          <a:prstGeom prst="rect">
+            <a:avLst/>
+          </a:prstGeom>
+          <a:noFill/>
+        </p:spPr>
+        <p:txBody>
+          <a:bodyPr wrap="square" anchor="t" lIns="25400" rIns="25400" tIns="12700" bIns="12700">
+            <a:spAutoFit/>
+          </a:bodyPr>
+          <a:lstStyle/>
+          <a:p>
+            <a:pPr algn="l"/>
+            <a:r>
+              <a:rPr sz="1300" b="1" i="0">
+                <a:solidFill>
+                  <a:srgbClr val="002C5F"/>
+                </a:solidFill>
+                <a:latin typeface="Calibri"/>
+              </a:rPr>
+              <a:t>MSSQL SG — 1433</a:t>
+            </a:r>
+          </a:p>
+        </p:txBody>
+      </p:sp>
+      <p:sp>
+        <p:nvSpPr>
+          <p:cNvPr id="16" name="TextBox 15"/>
+          <p:cNvSpPr txBox="1"/>
+          <p:nvPr/>
+        </p:nvSpPr>
+        <p:spPr>
+          <a:xfrm>
+            <a:off x="5897880" y="2121408"/>
+            <a:ext cx="2057400" cy="1234440"/>
+          </a:xfrm>
+          <a:prstGeom prst="rect">
+            <a:avLst/>
+          </a:prstGeom>
+          <a:noFill/>
+        </p:spPr>
+        <p:txBody>
+          <a:bodyPr wrap="square" lIns="25400" rIns="25400" tIns="12700" bIns="12700">
+            <a:spAutoFit/>
+          </a:bodyPr>
+          <a:lstStyle/>
+          <a:p>
+            <a:pPr marL="182880" indent="-182880">
+              <a:spcAft>
+                <a:spcPts val="400"/>
+              </a:spcAft>
+              <a:buFont typeface="Arial"/>
+              <a:buChar char="•"/>
             </a:pPr>
             <a:r>
-              <a:t>Use the VPC console to download the tunnel configuration</a:t>
+              <a:rPr sz="1050" b="0" i="0">
+                <a:solidFill>
+                  <a:srgbClr val="595959"/>
+                </a:solidFill>
+                <a:latin typeface="Calibri"/>
+              </a:rPr>
+              <a:t>TCP 1433 in — 10.200.0.0/22 (Client VPN)</a:t>
+            </a:r>
+          </a:p>
+          <a:p>
+            <a:pPr marL="182880" indent="-182880">
+              <a:spcAft>
+                <a:spcPts val="400"/>
+              </a:spcAft>
+              <a:buFont typeface="Arial"/>
+              <a:buChar char="•"/>
+            </a:pPr>
+            <a:r>
+              <a:rPr sz="1050" b="0" i="0">
+                <a:solidFill>
+                  <a:srgbClr val="595959"/>
+                </a:solidFill>
+                <a:latin typeface="Calibri"/>
+              </a:rPr>
+              <a:t>optional: on-prem CIDR via Site-to-Site VPN</a:t>
+            </a:r>
+          </a:p>
+        </p:txBody>
+      </p:sp>
+      <p:sp>
+        <p:nvSpPr>
+          <p:cNvPr id="17" name="Rounded Rectangle 16"/>
+          <p:cNvSpPr/>
+          <p:nvPr/>
+        </p:nvSpPr>
+        <p:spPr>
+          <a:xfrm>
+            <a:off x="8321040" y="1463040"/>
+            <a:ext cx="2377440" cy="1965960"/>
+          </a:xfrm>
+          <a:prstGeom prst="roundRect">
+            <a:avLst>
+              <a:gd name="adj" fmla="val 6000"/>
+            </a:avLst>
+          </a:prstGeom>
+          <a:solidFill>
+            <a:srgbClr val="FFFFFF"/>
+          </a:solidFill>
+          <a:ln w="12700">
+            <a:solidFill>
+              <a:srgbClr val="BFCDDA"/>
+            </a:solidFill>
+          </a:ln>
+          <a:effectLst/>
+        </p:spPr>
+        <p:style>
+          <a:lnRef idx="1">
+            <a:schemeClr val="accent1"/>
+          </a:lnRef>
+          <a:fillRef idx="3">
+            <a:schemeClr val="accent1"/>
+          </a:fillRef>
+          <a:effectRef idx="2">
+            <a:schemeClr val="accent1"/>
+          </a:effectRef>
+          <a:fontRef idx="minor">
+            <a:schemeClr val="lt1"/>
+          </a:fontRef>
+        </p:style>
+        <p:txBody>
+          <a:bodyPr rtlCol="0" anchor="ctr"/>
+          <a:lstStyle/>
+          <a:p>
+            <a:pPr algn="ctr"/>
+          </a:p>
+        </p:txBody>
+      </p:sp>
+      <p:sp>
+        <p:nvSpPr>
+          <p:cNvPr id="18" name="Rounded Rectangle 17"/>
+          <p:cNvSpPr/>
+          <p:nvPr/>
+        </p:nvSpPr>
+        <p:spPr>
+          <a:xfrm>
+            <a:off x="8321040" y="1463040"/>
+            <a:ext cx="2377440" cy="502920"/>
+          </a:xfrm>
+          <a:prstGeom prst="roundRect">
+            <a:avLst>
+              <a:gd name="adj" fmla="val 35000"/>
+            </a:avLst>
+          </a:prstGeom>
+          <a:solidFill>
+            <a:srgbClr val="ECEFF3"/>
+          </a:solidFill>
+          <a:ln>
+            <a:noFill/>
+          </a:ln>
+          <a:effectLst/>
+        </p:spPr>
+        <p:style>
+          <a:lnRef idx="1">
+            <a:schemeClr val="accent1"/>
+          </a:lnRef>
+          <a:fillRef idx="3">
+            <a:schemeClr val="accent1"/>
+          </a:fillRef>
+          <a:effectRef idx="2">
+            <a:schemeClr val="accent1"/>
+          </a:effectRef>
+          <a:fontRef idx="minor">
+            <a:schemeClr val="lt1"/>
+          </a:fontRef>
+        </p:style>
+        <p:txBody>
+          <a:bodyPr rtlCol="0" anchor="ctr"/>
+          <a:lstStyle/>
+          <a:p>
+            <a:pPr algn="ctr"/>
+          </a:p>
+        </p:txBody>
+      </p:sp>
+      <p:sp>
+        <p:nvSpPr>
+          <p:cNvPr id="19" name="TextBox 18"/>
+          <p:cNvSpPr txBox="1"/>
+          <p:nvPr/>
+        </p:nvSpPr>
+        <p:spPr>
+          <a:xfrm>
+            <a:off x="8485632" y="1572768"/>
+            <a:ext cx="2103120" cy="320040"/>
+          </a:xfrm>
+          <a:prstGeom prst="rect">
+            <a:avLst/>
+          </a:prstGeom>
+          <a:noFill/>
+        </p:spPr>
+        <p:txBody>
+          <a:bodyPr wrap="square" anchor="t" lIns="25400" rIns="25400" tIns="12700" bIns="12700">
+            <a:spAutoFit/>
+          </a:bodyPr>
+          <a:lstStyle/>
+          <a:p>
+            <a:pPr algn="l"/>
+            <a:r>
+              <a:rPr sz="1300" b="1" i="0">
+                <a:solidFill>
+                  <a:srgbClr val="002C5F"/>
+                </a:solidFill>
+                <a:latin typeface="Calibri"/>
+              </a:rPr>
+              <a:t>VPC endpoint SG</a:t>
+            </a:r>
+          </a:p>
+        </p:txBody>
+      </p:sp>
+      <p:sp>
+        <p:nvSpPr>
+          <p:cNvPr id="20" name="TextBox 19"/>
+          <p:cNvSpPr txBox="1"/>
+          <p:nvPr/>
+        </p:nvSpPr>
+        <p:spPr>
+          <a:xfrm>
+            <a:off x="8503919" y="2121408"/>
+            <a:ext cx="2057400" cy="1234440"/>
+          </a:xfrm>
+          <a:prstGeom prst="rect">
+            <a:avLst/>
+          </a:prstGeom>
+          <a:noFill/>
+        </p:spPr>
+        <p:txBody>
+          <a:bodyPr wrap="square" lIns="25400" rIns="25400" tIns="12700" bIns="12700">
+            <a:spAutoFit/>
+          </a:bodyPr>
+          <a:lstStyle/>
+          <a:p>
+            <a:pPr marL="182880" indent="-182880">
+              <a:spcAft>
+                <a:spcPts val="400"/>
+              </a:spcAft>
+              <a:buFont typeface="Arial"/>
+              <a:buChar char="•"/>
+            </a:pPr>
+            <a:r>
+              <a:rPr sz="1050" b="0" i="0">
+                <a:solidFill>
+                  <a:srgbClr val="595959"/>
+                </a:solidFill>
+                <a:latin typeface="Calibri"/>
+              </a:rPr>
+              <a:t>TCP 443 in — VPC CIDR only</a:t>
+            </a:r>
+          </a:p>
+          <a:p>
+            <a:pPr marL="182880" indent="-182880">
+              <a:spcAft>
+                <a:spcPts val="400"/>
+              </a:spcAft>
+              <a:buFont typeface="Arial"/>
+              <a:buChar char="•"/>
+            </a:pPr>
+            <a:r>
+              <a:rPr sz="1050" b="0" i="0">
+                <a:solidFill>
+                  <a:srgbClr val="595959"/>
+                </a:solidFill>
+                <a:latin typeface="Calibri"/>
+              </a:rPr>
+              <a:t>Response traffic to endpoint ENIs</a:t>
+            </a:r>
+          </a:p>
+        </p:txBody>
+      </p:sp>
+      <p:sp>
+        <p:nvSpPr>
+          <p:cNvPr id="21" name="Rounded Rectangle 20"/>
+          <p:cNvSpPr/>
+          <p:nvPr/>
+        </p:nvSpPr>
+        <p:spPr>
+          <a:xfrm>
+            <a:off x="502920" y="3749039"/>
+            <a:ext cx="11201400" cy="2011680"/>
+          </a:xfrm>
+          <a:prstGeom prst="roundRect">
+            <a:avLst>
+              <a:gd name="adj" fmla="val 5000"/>
+            </a:avLst>
+          </a:prstGeom>
+          <a:solidFill>
+            <a:srgbClr val="F2F7FB"/>
+          </a:solidFill>
+          <a:ln w="12700">
+            <a:solidFill>
+              <a:srgbClr val="BFCDDA"/>
+            </a:solidFill>
+          </a:ln>
+          <a:effectLst/>
+        </p:spPr>
+        <p:style>
+          <a:lnRef idx="1">
+            <a:schemeClr val="accent1"/>
+          </a:lnRef>
+          <a:fillRef idx="3">
+            <a:schemeClr val="accent1"/>
+          </a:fillRef>
+          <a:effectRef idx="2">
+            <a:schemeClr val="accent1"/>
+          </a:effectRef>
+          <a:fontRef idx="minor">
+            <a:schemeClr val="lt1"/>
+          </a:fontRef>
+        </p:style>
+        <p:txBody>
+          <a:bodyPr rtlCol="0" anchor="ctr"/>
+          <a:lstStyle/>
+          <a:p>
+            <a:pPr algn="ctr"/>
+          </a:p>
+        </p:txBody>
+      </p:sp>
+      <p:sp>
+        <p:nvSpPr>
+          <p:cNvPr id="22" name="TextBox 21"/>
+          <p:cNvSpPr txBox="1"/>
+          <p:nvPr/>
+        </p:nvSpPr>
+        <p:spPr>
+          <a:xfrm>
+            <a:off x="822960" y="3886200"/>
+            <a:ext cx="10607040" cy="292608"/>
+          </a:xfrm>
+          <a:prstGeom prst="rect">
+            <a:avLst/>
+          </a:prstGeom>
+          <a:noFill/>
+        </p:spPr>
+        <p:txBody>
+          <a:bodyPr wrap="square" anchor="t" lIns="25400" rIns="25400" tIns="12700" bIns="12700">
+            <a:spAutoFit/>
+          </a:bodyPr>
+          <a:lstStyle/>
+          <a:p>
+            <a:pPr algn="l"/>
+            <a:r>
+              <a:rPr sz="1250" b="1" i="0">
+                <a:solidFill>
+                  <a:srgbClr val="002C5F"/>
+                </a:solidFill>
+                <a:latin typeface="Calibri"/>
+              </a:rPr>
+              <a:t>EC2 hardening &amp; guardrails</a:t>
+            </a:r>
+          </a:p>
+        </p:txBody>
+      </p:sp>
+      <p:sp>
+        <p:nvSpPr>
+          <p:cNvPr id="23" name="TextBox 22"/>
+          <p:cNvSpPr txBox="1"/>
+          <p:nvPr/>
+        </p:nvSpPr>
+        <p:spPr>
+          <a:xfrm>
+            <a:off x="822960" y="4224528"/>
+            <a:ext cx="10607040" cy="1417320"/>
+          </a:xfrm>
+          <a:prstGeom prst="rect">
+            <a:avLst/>
+          </a:prstGeom>
+          <a:noFill/>
+        </p:spPr>
+        <p:txBody>
+          <a:bodyPr wrap="square" lIns="25400" rIns="25400" tIns="12700" bIns="12700">
+            <a:spAutoFit/>
+          </a:bodyPr>
+          <a:lstStyle/>
+          <a:p>
+            <a:pPr marL="182880" indent="-182880">
+              <a:spcAft>
+                <a:spcPts val="300"/>
+              </a:spcAft>
+              <a:buFont typeface="Arial"/>
+              <a:buChar char="•"/>
+            </a:pPr>
+            <a:r>
+              <a:rPr sz="1150" b="0" i="0">
+                <a:solidFill>
+                  <a:srgbClr val="595959"/>
+                </a:solidFill>
+                <a:latin typeface="Calibri"/>
+              </a:rPr>
+              <a:t>EC2: IMDSv2 required · EBS volumes encrypted · no public IP · termination protected (DeletionPolicy: Retain)</a:t>
+            </a:r>
+          </a:p>
+          <a:p>
+            <a:pPr marL="182880" indent="-182880">
+              <a:spcAft>
+                <a:spcPts val="300"/>
+              </a:spcAft>
+              <a:buFont typeface="Arial"/>
+              <a:buChar char="•"/>
+            </a:pPr>
+            <a:r>
+              <a:rPr sz="1150" b="0" i="0">
+                <a:solidFill>
+                  <a:srgbClr val="595959"/>
+                </a:solidFill>
+                <a:latin typeface="Calibri"/>
+              </a:rPr>
+              <a:t>Windows Firewall: RDP 3389 and MSSQL 1433 pre-opened (SQL Server installed later by the client)</a:t>
+            </a:r>
+          </a:p>
+          <a:p>
+            <a:pPr marL="182880" indent="-182880">
+              <a:spcAft>
+                <a:spcPts val="300"/>
+              </a:spcAft>
+              <a:buFont typeface="Arial"/>
+              <a:buChar char="•"/>
+            </a:pPr>
+            <a:r>
+              <a:rPr sz="1150" b="0" i="0">
+                <a:solidFill>
+                  <a:srgbClr val="595959"/>
+                </a:solidFill>
+                <a:latin typeface="Calibri"/>
+              </a:rPr>
+              <a:t>Data volume D: formatted NTFS 64K, labelled SQLData — SQL data / log files go here</a:t>
+            </a:r>
+          </a:p>
+          <a:p>
+            <a:pPr marL="182880" indent="-182880">
+              <a:spcAft>
+                <a:spcPts val="300"/>
+              </a:spcAft>
+              <a:buFont typeface="Arial"/>
+              <a:buChar char="•"/>
+            </a:pPr>
+            <a:r>
+              <a:rPr sz="1150" b="0" i="0">
+                <a:solidFill>
+                  <a:srgbClr val="595959"/>
+                </a:solidFill>
+                <a:latin typeface="Calibri"/>
+              </a:rPr>
+              <a:t>AWS API access only via VPC interface endpoints — the DB subnet has no NAT / IGW route (by design)</a:t>
+            </a:r>
+          </a:p>
+        </p:txBody>
+      </p:sp>
+      <p:sp>
+        <p:nvSpPr>
+          <p:cNvPr id="24" name="TextBox 23"/>
+          <p:cNvSpPr txBox="1"/>
+          <p:nvPr/>
+        </p:nvSpPr>
+        <p:spPr>
+          <a:xfrm>
+            <a:off x="502920" y="6473952"/>
+            <a:ext cx="8229600" cy="274320"/>
+          </a:xfrm>
+          <a:prstGeom prst="rect">
+            <a:avLst/>
+          </a:prstGeom>
+          <a:noFill/>
+        </p:spPr>
+        <p:txBody>
+          <a:bodyPr wrap="square" anchor="t" lIns="25400" rIns="25400" tIns="12700" bIns="12700">
+            <a:spAutoFit/>
+          </a:bodyPr>
+          <a:lstStyle/>
+          <a:p>
+            <a:pPr algn="l"/>
+            <a:r>
+              <a:rPr sz="900" b="0" i="0">
+                <a:solidFill>
+                  <a:srgbClr val="9AA7B4"/>
+                </a:solidFill>
+                <a:latin typeface="Calibri"/>
+              </a:rPr>
+              <a:t>HMSG WEC Racing · hmsg-rac-prd · eu-central-1 (Frankfurt)</a:t>
+            </a:r>
+          </a:p>
+        </p:txBody>
+      </p:sp>
+      <p:sp>
+        <p:nvSpPr>
+          <p:cNvPr id="25" name="TextBox 24"/>
+          <p:cNvSpPr txBox="1"/>
+          <p:nvPr/>
+        </p:nvSpPr>
+        <p:spPr>
+          <a:xfrm>
+            <a:off x="10332720" y="6473952"/>
+            <a:ext cx="1371600" cy="274320"/>
+          </a:xfrm>
+          <a:prstGeom prst="rect">
+            <a:avLst/>
+          </a:prstGeom>
+          <a:noFill/>
+        </p:spPr>
+        <p:txBody>
+          <a:bodyPr wrap="square" anchor="t" lIns="25400" rIns="25400" tIns="12700" bIns="12700">
+            <a:spAutoFit/>
+          </a:bodyPr>
+          <a:lstStyle/>
+          <a:p>
+            <a:pPr algn="r"/>
+            <a:r>
+              <a:rPr sz="900" b="0" i="0">
+                <a:solidFill>
+                  <a:srgbClr val="9AA7B4"/>
+                </a:solidFill>
+                <a:latin typeface="Calibri"/>
+              </a:rPr>
+              <a:t>05 / 08</a:t>
             </a:r>
           </a:p>
         </p:txBody>
@@ -5133,8 +7936,8 @@
         </p:nvSpPr>
         <p:spPr>
           <a:xfrm>
-            <a:off x="411480" y="228600"/>
-            <a:ext cx="11155680" cy="731520"/>
+            <a:off x="502920" y="256032"/>
+            <a:ext cx="11155680" cy="274320"/>
           </a:xfrm>
           <a:prstGeom prst="rect">
             <a:avLst/>
@@ -5142,18 +7945,20 @@
           <a:noFill/>
         </p:spPr>
         <p:txBody>
-          <a:bodyPr wrap="none">
+          <a:bodyPr wrap="square" anchor="t" lIns="25400" rIns="25400" tIns="12700" bIns="12700">
             <a:spAutoFit/>
           </a:bodyPr>
           <a:lstStyle/>
           <a:p>
-            <a:r>
-              <a:rPr sz="2800" b="1">
-                <a:solidFill>
-                  <a:srgbClr val="0E4887"/>
-                </a:solidFill>
-              </a:rPr>
-              <a:t>Next Steps / Deliverables</a:t>
+            <a:pPr algn="l"/>
+            <a:r>
+              <a:rPr sz="1100" b="1" i="0">
+                <a:solidFill>
+                  <a:srgbClr val="00AAD2"/>
+                </a:solidFill>
+                <a:latin typeface="Calibri"/>
+              </a:rPr>
+              <a:t>04 · VPN</a:t>
             </a:r>
           </a:p>
         </p:txBody>
@@ -5166,8 +7971,8 @@
         </p:nvSpPr>
         <p:spPr>
           <a:xfrm>
-            <a:off x="548640" y="914400"/>
-            <a:ext cx="5486400" cy="5303520"/>
+            <a:off x="502920" y="502920"/>
+            <a:ext cx="11155680" cy="566928"/>
           </a:xfrm>
           <a:prstGeom prst="rect">
             <a:avLst/>
@@ -5175,94 +7980,45 @@
           <a:noFill/>
         </p:spPr>
         <p:txBody>
-          <a:bodyPr wrap="square" lIns="50800" rIns="50800" tIns="25400" bIns="25400">
+          <a:bodyPr wrap="square" anchor="t" lIns="25400" rIns="25400" tIns="12700" bIns="12700">
             <a:spAutoFit/>
           </a:bodyPr>
           <a:lstStyle/>
           <a:p>
-            <a:pPr>
-              <a:defRPr sz="1800">
-                <a:solidFill>
-                  <a:srgbClr val="2D2D2D"/>
-                </a:solidFill>
-              </a:defRPr>
-            </a:pPr>
-            <a:r>
-              <a:t>Week 1: finalize this architecture deck with the client</a:t>
-            </a:r>
-          </a:p>
-          <a:p>
-            <a:pPr>
-              <a:defRPr sz="1800">
-                <a:solidFill>
-                  <a:srgbClr val="2D2D2D"/>
-                </a:solidFill>
-              </a:defRPr>
-            </a:pPr>
-            <a:r>
-              <a:t>Project completion: resource inventory Excel, admin guide, recovery/VPN guide, completion checklist</a:t>
-            </a:r>
-          </a:p>
-          <a:p>
-            <a:pPr>
-              <a:defRPr sz="1800">
-                <a:solidFill>
-                  <a:srgbClr val="2D2D2D"/>
-                </a:solidFill>
-              </a:defRPr>
-            </a:pPr>
-            <a:r>
-              <a:t>Client tasks: Entra ID app, Federation Metadata XML, and VPN user management</a:t>
-            </a:r>
-          </a:p>
-          <a:p>
-            <a:pPr>
-              <a:defRPr sz="1800">
-                <a:solidFill>
-                  <a:srgbClr val="2D2D2D"/>
-                </a:solidFill>
-              </a:defRPr>
-            </a:pPr>
-            <a:r>
-              <a:t>HMSG tasks: deploy CloudFormation, issue/import ACM cert, and hand over operational docs</a:t>
-            </a:r>
-          </a:p>
-          <a:p>
-            <a:pPr>
-              <a:defRPr sz="1800">
-                <a:solidFill>
-                  <a:srgbClr val="2D2D2D"/>
-                </a:solidFill>
-              </a:defRPr>
-            </a:pPr>
-            <a:r>
-              <a:t>Remove temporary implementation IAM access at project close</a:t>
-            </a:r>
-          </a:p>
-        </p:txBody>
-      </p:sp>
-      <p:sp>
-        <p:nvSpPr>
-          <p:cNvPr id="4" name="Rounded Rectangle 3"/>
+            <a:pPr algn="l"/>
+            <a:r>
+              <a:rPr sz="2900" b="1" i="0">
+                <a:solidFill>
+                  <a:srgbClr val="002C5F"/>
+                </a:solidFill>
+                <a:latin typeface="Calibri"/>
+              </a:rPr>
+              <a:t>VPN design — Client VPN · Site-to-Site</a:t>
+            </a:r>
+          </a:p>
+        </p:txBody>
+      </p:sp>
+      <p:sp>
+        <p:nvSpPr>
+          <p:cNvPr id="4" name="Rectangle 3"/>
           <p:cNvSpPr/>
           <p:nvPr/>
         </p:nvSpPr>
         <p:spPr>
           <a:xfrm>
-            <a:off x="6400800" y="1097280"/>
-            <a:ext cx="4754880" cy="1828800"/>
-          </a:xfrm>
-          <a:prstGeom prst="roundRect">
+            <a:off x="521207" y="1170432"/>
+            <a:ext cx="1554480" cy="41148"/>
+          </a:xfrm>
+          <a:prstGeom prst="rect">
             <a:avLst/>
           </a:prstGeom>
           <a:solidFill>
-            <a:srgbClr val="F6F1E5"/>
+            <a:srgbClr val="F5A623"/>
           </a:solidFill>
           <a:ln>
-            <a:solidFill>
-              <a:srgbClr val="0E4887"/>
-            </a:solidFill>
+            <a:noFill/>
           </a:ln>
+          <a:effectLst/>
         </p:spPr>
         <p:style>
           <a:lnRef idx="1">
@@ -5283,15 +8039,2850 @@
           <a:lstStyle/>
           <a:p>
             <a:pPr algn="ctr"/>
-            <a:r>
-              <a:rPr sz="1600" b="1">
-                <a:solidFill>
-                  <a:srgbClr val="D17B0D"/>
-                </a:solidFill>
-              </a:rPr>
-              <a:t>Deliverables Folder
-PPTX + Excel + DOCX
-Prepared from the current CloudFormation stack</a:t>
+          </a:p>
+        </p:txBody>
+      </p:sp>
+      <p:sp>
+        <p:nvSpPr>
+          <p:cNvPr id="5" name="Rounded Rectangle 4"/>
+          <p:cNvSpPr/>
+          <p:nvPr/>
+        </p:nvSpPr>
+        <p:spPr>
+          <a:xfrm>
+            <a:off x="502920" y="1463040"/>
+            <a:ext cx="5577840" cy="3017520"/>
+          </a:xfrm>
+          <a:prstGeom prst="roundRect">
+            <a:avLst>
+              <a:gd name="adj" fmla="val 4500"/>
+            </a:avLst>
+          </a:prstGeom>
+          <a:solidFill>
+            <a:srgbClr val="FFFFFF"/>
+          </a:solidFill>
+          <a:ln w="12700">
+            <a:solidFill>
+              <a:srgbClr val="BFCDDA"/>
+            </a:solidFill>
+          </a:ln>
+          <a:effectLst/>
+        </p:spPr>
+        <p:style>
+          <a:lnRef idx="1">
+            <a:schemeClr val="accent1"/>
+          </a:lnRef>
+          <a:fillRef idx="3">
+            <a:schemeClr val="accent1"/>
+          </a:fillRef>
+          <a:effectRef idx="2">
+            <a:schemeClr val="accent1"/>
+          </a:effectRef>
+          <a:fontRef idx="minor">
+            <a:schemeClr val="lt1"/>
+          </a:fontRef>
+        </p:style>
+        <p:txBody>
+          <a:bodyPr rtlCol="0" anchor="ctr"/>
+          <a:lstStyle/>
+          <a:p>
+            <a:pPr algn="ctr"/>
+          </a:p>
+        </p:txBody>
+      </p:sp>
+      <p:sp>
+        <p:nvSpPr>
+          <p:cNvPr id="6" name="Rounded Rectangle 5"/>
+          <p:cNvSpPr/>
+          <p:nvPr/>
+        </p:nvSpPr>
+        <p:spPr>
+          <a:xfrm>
+            <a:off x="502920" y="1463040"/>
+            <a:ext cx="5577840" cy="146304"/>
+          </a:xfrm>
+          <a:prstGeom prst="roundRect">
+            <a:avLst>
+              <a:gd name="adj" fmla="val 50000"/>
+            </a:avLst>
+          </a:prstGeom>
+          <a:solidFill>
+            <a:srgbClr val="007FA8"/>
+          </a:solidFill>
+          <a:ln>
+            <a:noFill/>
+          </a:ln>
+          <a:effectLst/>
+        </p:spPr>
+        <p:style>
+          <a:lnRef idx="1">
+            <a:schemeClr val="accent1"/>
+          </a:lnRef>
+          <a:fillRef idx="3">
+            <a:schemeClr val="accent1"/>
+          </a:fillRef>
+          <a:effectRef idx="2">
+            <a:schemeClr val="accent1"/>
+          </a:effectRef>
+          <a:fontRef idx="minor">
+            <a:schemeClr val="lt1"/>
+          </a:fontRef>
+        </p:style>
+        <p:txBody>
+          <a:bodyPr rtlCol="0" anchor="ctr"/>
+          <a:lstStyle/>
+          <a:p>
+            <a:pPr algn="ctr"/>
+          </a:p>
+        </p:txBody>
+      </p:sp>
+      <p:sp>
+        <p:nvSpPr>
+          <p:cNvPr id="7" name="TextBox 6"/>
+          <p:cNvSpPr txBox="1"/>
+          <p:nvPr/>
+        </p:nvSpPr>
+        <p:spPr>
+          <a:xfrm>
+            <a:off x="777240" y="1627632"/>
+            <a:ext cx="5029200" cy="320040"/>
+          </a:xfrm>
+          <a:prstGeom prst="rect">
+            <a:avLst/>
+          </a:prstGeom>
+          <a:noFill/>
+        </p:spPr>
+        <p:txBody>
+          <a:bodyPr wrap="square" anchor="t" lIns="25400" rIns="25400" tIns="12700" bIns="12700">
+            <a:spAutoFit/>
+          </a:bodyPr>
+          <a:lstStyle/>
+          <a:p>
+            <a:pPr algn="l"/>
+            <a:r>
+              <a:rPr sz="1500" b="1" i="0">
+                <a:solidFill>
+                  <a:srgbClr val="002C5F"/>
+                </a:solidFill>
+                <a:latin typeface="Calibri"/>
+              </a:rPr>
+              <a:t>AWS Client VPN</a:t>
+            </a:r>
+          </a:p>
+        </p:txBody>
+      </p:sp>
+      <p:sp>
+        <p:nvSpPr>
+          <p:cNvPr id="8" name="TextBox 7"/>
+          <p:cNvSpPr txBox="1"/>
+          <p:nvPr/>
+        </p:nvSpPr>
+        <p:spPr>
+          <a:xfrm>
+            <a:off x="822960" y="2011680"/>
+            <a:ext cx="2148840" cy="274320"/>
+          </a:xfrm>
+          <a:prstGeom prst="rect">
+            <a:avLst/>
+          </a:prstGeom>
+          <a:noFill/>
+        </p:spPr>
+        <p:txBody>
+          <a:bodyPr wrap="square" anchor="t" lIns="25400" rIns="25400" tIns="12700" bIns="12700">
+            <a:spAutoFit/>
+          </a:bodyPr>
+          <a:lstStyle/>
+          <a:p>
+            <a:pPr algn="l"/>
+            <a:r>
+              <a:rPr sz="1100" b="1" i="0">
+                <a:solidFill>
+                  <a:srgbClr val="7C8B99"/>
+                </a:solidFill>
+                <a:latin typeface="Calibri"/>
+              </a:rPr>
+              <a:t>Client CIDR</a:t>
+            </a:r>
+          </a:p>
+        </p:txBody>
+      </p:sp>
+      <p:sp>
+        <p:nvSpPr>
+          <p:cNvPr id="9" name="TextBox 8"/>
+          <p:cNvSpPr txBox="1"/>
+          <p:nvPr/>
+        </p:nvSpPr>
+        <p:spPr>
+          <a:xfrm>
+            <a:off x="3017520" y="2011680"/>
+            <a:ext cx="2834640" cy="274320"/>
+          </a:xfrm>
+          <a:prstGeom prst="rect">
+            <a:avLst/>
+          </a:prstGeom>
+          <a:noFill/>
+        </p:spPr>
+        <p:txBody>
+          <a:bodyPr wrap="square" anchor="t" lIns="25400" rIns="25400" tIns="12700" bIns="12700">
+            <a:spAutoFit/>
+          </a:bodyPr>
+          <a:lstStyle/>
+          <a:p>
+            <a:pPr algn="l"/>
+            <a:r>
+              <a:rPr sz="1100" b="0" i="0">
+                <a:solidFill>
+                  <a:srgbClr val="595959"/>
+                </a:solidFill>
+                <a:latin typeface="Calibri"/>
+              </a:rPr>
+              <a:t>10.200.0.0/22</a:t>
+            </a:r>
+          </a:p>
+        </p:txBody>
+      </p:sp>
+      <p:sp>
+        <p:nvSpPr>
+          <p:cNvPr id="10" name="TextBox 9"/>
+          <p:cNvSpPr txBox="1"/>
+          <p:nvPr/>
+        </p:nvSpPr>
+        <p:spPr>
+          <a:xfrm>
+            <a:off x="822960" y="2363724"/>
+            <a:ext cx="2148840" cy="274320"/>
+          </a:xfrm>
+          <a:prstGeom prst="rect">
+            <a:avLst/>
+          </a:prstGeom>
+          <a:noFill/>
+        </p:spPr>
+        <p:txBody>
+          <a:bodyPr wrap="square" anchor="t" lIns="25400" rIns="25400" tIns="12700" bIns="12700">
+            <a:spAutoFit/>
+          </a:bodyPr>
+          <a:lstStyle/>
+          <a:p>
+            <a:pPr algn="l"/>
+            <a:r>
+              <a:rPr sz="1100" b="1" i="0">
+                <a:solidFill>
+                  <a:srgbClr val="7C8B99"/>
+                </a:solidFill>
+                <a:latin typeface="Calibri"/>
+              </a:rPr>
+              <a:t>Authentication</a:t>
+            </a:r>
+          </a:p>
+        </p:txBody>
+      </p:sp>
+      <p:sp>
+        <p:nvSpPr>
+          <p:cNvPr id="11" name="TextBox 10"/>
+          <p:cNvSpPr txBox="1"/>
+          <p:nvPr/>
+        </p:nvSpPr>
+        <p:spPr>
+          <a:xfrm>
+            <a:off x="3017520" y="2363724"/>
+            <a:ext cx="2834640" cy="274320"/>
+          </a:xfrm>
+          <a:prstGeom prst="rect">
+            <a:avLst/>
+          </a:prstGeom>
+          <a:noFill/>
+        </p:spPr>
+        <p:txBody>
+          <a:bodyPr wrap="square" anchor="t" lIns="25400" rIns="25400" tIns="12700" bIns="12700">
+            <a:spAutoFit/>
+          </a:bodyPr>
+          <a:lstStyle/>
+          <a:p>
+            <a:pPr algn="l"/>
+            <a:r>
+              <a:rPr sz="1100" b="0" i="0">
+                <a:solidFill>
+                  <a:srgbClr val="595959"/>
+                </a:solidFill>
+                <a:latin typeface="Calibri"/>
+              </a:rPr>
+              <a:t>Federated SAML — Entra ID</a:t>
+            </a:r>
+          </a:p>
+        </p:txBody>
+      </p:sp>
+      <p:sp>
+        <p:nvSpPr>
+          <p:cNvPr id="12" name="TextBox 11"/>
+          <p:cNvSpPr txBox="1"/>
+          <p:nvPr/>
+        </p:nvSpPr>
+        <p:spPr>
+          <a:xfrm>
+            <a:off x="822960" y="2715768"/>
+            <a:ext cx="2148840" cy="274320"/>
+          </a:xfrm>
+          <a:prstGeom prst="rect">
+            <a:avLst/>
+          </a:prstGeom>
+          <a:noFill/>
+        </p:spPr>
+        <p:txBody>
+          <a:bodyPr wrap="square" anchor="t" lIns="25400" rIns="25400" tIns="12700" bIns="12700">
+            <a:spAutoFit/>
+          </a:bodyPr>
+          <a:lstStyle/>
+          <a:p>
+            <a:pPr algn="l"/>
+            <a:r>
+              <a:rPr sz="1100" b="1" i="0">
+                <a:solidFill>
+                  <a:srgbClr val="7C8B99"/>
+                </a:solidFill>
+                <a:latin typeface="Calibri"/>
+              </a:rPr>
+              <a:t>Transport / port</a:t>
+            </a:r>
+          </a:p>
+        </p:txBody>
+      </p:sp>
+      <p:sp>
+        <p:nvSpPr>
+          <p:cNvPr id="13" name="TextBox 12"/>
+          <p:cNvSpPr txBox="1"/>
+          <p:nvPr/>
+        </p:nvSpPr>
+        <p:spPr>
+          <a:xfrm>
+            <a:off x="3017520" y="2715768"/>
+            <a:ext cx="2834640" cy="274320"/>
+          </a:xfrm>
+          <a:prstGeom prst="rect">
+            <a:avLst/>
+          </a:prstGeom>
+          <a:noFill/>
+        </p:spPr>
+        <p:txBody>
+          <a:bodyPr wrap="square" anchor="t" lIns="25400" rIns="25400" tIns="12700" bIns="12700">
+            <a:spAutoFit/>
+          </a:bodyPr>
+          <a:lstStyle/>
+          <a:p>
+            <a:pPr algn="l"/>
+            <a:r>
+              <a:rPr sz="1100" b="0" i="0">
+                <a:solidFill>
+                  <a:srgbClr val="595959"/>
+                </a:solidFill>
+                <a:latin typeface="Calibri"/>
+              </a:rPr>
+              <a:t>UDP 443 (no TCP fallback)</a:t>
+            </a:r>
+          </a:p>
+        </p:txBody>
+      </p:sp>
+      <p:sp>
+        <p:nvSpPr>
+          <p:cNvPr id="14" name="TextBox 13"/>
+          <p:cNvSpPr txBox="1"/>
+          <p:nvPr/>
+        </p:nvSpPr>
+        <p:spPr>
+          <a:xfrm>
+            <a:off x="822960" y="3067811"/>
+            <a:ext cx="2148840" cy="274320"/>
+          </a:xfrm>
+          <a:prstGeom prst="rect">
+            <a:avLst/>
+          </a:prstGeom>
+          <a:noFill/>
+        </p:spPr>
+        <p:txBody>
+          <a:bodyPr wrap="square" anchor="t" lIns="25400" rIns="25400" tIns="12700" bIns="12700">
+            <a:spAutoFit/>
+          </a:bodyPr>
+          <a:lstStyle/>
+          <a:p>
+            <a:pPr algn="l"/>
+            <a:r>
+              <a:rPr sz="1100" b="1" i="0">
+                <a:solidFill>
+                  <a:srgbClr val="7C8B99"/>
+                </a:solidFill>
+                <a:latin typeface="Calibri"/>
+              </a:rPr>
+              <a:t>Split tunnel</a:t>
+            </a:r>
+          </a:p>
+        </p:txBody>
+      </p:sp>
+      <p:sp>
+        <p:nvSpPr>
+          <p:cNvPr id="15" name="TextBox 14"/>
+          <p:cNvSpPr txBox="1"/>
+          <p:nvPr/>
+        </p:nvSpPr>
+        <p:spPr>
+          <a:xfrm>
+            <a:off x="3017520" y="3067811"/>
+            <a:ext cx="2834640" cy="274320"/>
+          </a:xfrm>
+          <a:prstGeom prst="rect">
+            <a:avLst/>
+          </a:prstGeom>
+          <a:noFill/>
+        </p:spPr>
+        <p:txBody>
+          <a:bodyPr wrap="square" anchor="t" lIns="25400" rIns="25400" tIns="12700" bIns="12700">
+            <a:spAutoFit/>
+          </a:bodyPr>
+          <a:lstStyle/>
+          <a:p>
+            <a:pPr algn="l"/>
+            <a:r>
+              <a:rPr sz="1100" b="0" i="0">
+                <a:solidFill>
+                  <a:srgbClr val="595959"/>
+                </a:solidFill>
+                <a:latin typeface="Calibri"/>
+              </a:rPr>
+              <a:t>Enabled — only VPC traffic</a:t>
+            </a:r>
+          </a:p>
+        </p:txBody>
+      </p:sp>
+      <p:sp>
+        <p:nvSpPr>
+          <p:cNvPr id="16" name="TextBox 15"/>
+          <p:cNvSpPr txBox="1"/>
+          <p:nvPr/>
+        </p:nvSpPr>
+        <p:spPr>
+          <a:xfrm>
+            <a:off x="822960" y="3419855"/>
+            <a:ext cx="2148840" cy="274320"/>
+          </a:xfrm>
+          <a:prstGeom prst="rect">
+            <a:avLst/>
+          </a:prstGeom>
+          <a:noFill/>
+        </p:spPr>
+        <p:txBody>
+          <a:bodyPr wrap="square" anchor="t" lIns="25400" rIns="25400" tIns="12700" bIns="12700">
+            <a:spAutoFit/>
+          </a:bodyPr>
+          <a:lstStyle/>
+          <a:p>
+            <a:pPr algn="l"/>
+            <a:r>
+              <a:rPr sz="1100" b="1" i="0">
+                <a:solidFill>
+                  <a:srgbClr val="7C8B99"/>
+                </a:solidFill>
+                <a:latin typeface="Calibri"/>
+              </a:rPr>
+              <a:t>Target networks</a:t>
+            </a:r>
+          </a:p>
+        </p:txBody>
+      </p:sp>
+      <p:sp>
+        <p:nvSpPr>
+          <p:cNvPr id="17" name="TextBox 16"/>
+          <p:cNvSpPr txBox="1"/>
+          <p:nvPr/>
+        </p:nvSpPr>
+        <p:spPr>
+          <a:xfrm>
+            <a:off x="3017520" y="3419855"/>
+            <a:ext cx="2834640" cy="274320"/>
+          </a:xfrm>
+          <a:prstGeom prst="rect">
+            <a:avLst/>
+          </a:prstGeom>
+          <a:noFill/>
+        </p:spPr>
+        <p:txBody>
+          <a:bodyPr wrap="square" anchor="t" lIns="25400" rIns="25400" tIns="12700" bIns="12700">
+            <a:spAutoFit/>
+          </a:bodyPr>
+          <a:lstStyle/>
+          <a:p>
+            <a:pPr algn="l"/>
+            <a:r>
+              <a:rPr sz="1100" b="0" i="0">
+                <a:solidFill>
+                  <a:srgbClr val="595959"/>
+                </a:solidFill>
+                <a:latin typeface="Calibri"/>
+              </a:rPr>
+              <a:t>pri-ec1a · pri-ec1c</a:t>
+            </a:r>
+          </a:p>
+        </p:txBody>
+      </p:sp>
+      <p:sp>
+        <p:nvSpPr>
+          <p:cNvPr id="18" name="TextBox 17"/>
+          <p:cNvSpPr txBox="1"/>
+          <p:nvPr/>
+        </p:nvSpPr>
+        <p:spPr>
+          <a:xfrm>
+            <a:off x="822960" y="3771899"/>
+            <a:ext cx="2148840" cy="274320"/>
+          </a:xfrm>
+          <a:prstGeom prst="rect">
+            <a:avLst/>
+          </a:prstGeom>
+          <a:noFill/>
+        </p:spPr>
+        <p:txBody>
+          <a:bodyPr wrap="square" anchor="t" lIns="25400" rIns="25400" tIns="12700" bIns="12700">
+            <a:spAutoFit/>
+          </a:bodyPr>
+          <a:lstStyle/>
+          <a:p>
+            <a:pPr algn="l"/>
+            <a:r>
+              <a:rPr sz="1100" b="1" i="0">
+                <a:solidFill>
+                  <a:srgbClr val="7C8B99"/>
+                </a:solidFill>
+                <a:latin typeface="Calibri"/>
+              </a:rPr>
+              <a:t>Route / authorization</a:t>
+            </a:r>
+          </a:p>
+        </p:txBody>
+      </p:sp>
+      <p:sp>
+        <p:nvSpPr>
+          <p:cNvPr id="19" name="TextBox 18"/>
+          <p:cNvSpPr txBox="1"/>
+          <p:nvPr/>
+        </p:nvSpPr>
+        <p:spPr>
+          <a:xfrm>
+            <a:off x="3017520" y="3771899"/>
+            <a:ext cx="2834640" cy="274320"/>
+          </a:xfrm>
+          <a:prstGeom prst="rect">
+            <a:avLst/>
+          </a:prstGeom>
+          <a:noFill/>
+        </p:spPr>
+        <p:txBody>
+          <a:bodyPr wrap="square" anchor="t" lIns="25400" rIns="25400" tIns="12700" bIns="12700">
+            <a:spAutoFit/>
+          </a:bodyPr>
+          <a:lstStyle/>
+          <a:p>
+            <a:pPr algn="l"/>
+            <a:r>
+              <a:rPr sz="1100" b="0" i="0">
+                <a:solidFill>
+                  <a:srgbClr val="595959"/>
+                </a:solidFill>
+                <a:latin typeface="Calibri"/>
+              </a:rPr>
+              <a:t>Whole VPC /24 · all groups</a:t>
+            </a:r>
+          </a:p>
+        </p:txBody>
+      </p:sp>
+      <p:sp>
+        <p:nvSpPr>
+          <p:cNvPr id="20" name="TextBox 19"/>
+          <p:cNvSpPr txBox="1"/>
+          <p:nvPr/>
+        </p:nvSpPr>
+        <p:spPr>
+          <a:xfrm>
+            <a:off x="822960" y="4123943"/>
+            <a:ext cx="2148840" cy="274320"/>
+          </a:xfrm>
+          <a:prstGeom prst="rect">
+            <a:avLst/>
+          </a:prstGeom>
+          <a:noFill/>
+        </p:spPr>
+        <p:txBody>
+          <a:bodyPr wrap="square" anchor="t" lIns="25400" rIns="25400" tIns="12700" bIns="12700">
+            <a:spAutoFit/>
+          </a:bodyPr>
+          <a:lstStyle/>
+          <a:p>
+            <a:pPr algn="l"/>
+            <a:r>
+              <a:rPr sz="1100" b="1" i="0">
+                <a:solidFill>
+                  <a:srgbClr val="7C8B99"/>
+                </a:solidFill>
+                <a:latin typeface="Calibri"/>
+              </a:rPr>
+              <a:t>Logging</a:t>
+            </a:r>
+          </a:p>
+        </p:txBody>
+      </p:sp>
+      <p:sp>
+        <p:nvSpPr>
+          <p:cNvPr id="21" name="TextBox 20"/>
+          <p:cNvSpPr txBox="1"/>
+          <p:nvPr/>
+        </p:nvSpPr>
+        <p:spPr>
+          <a:xfrm>
+            <a:off x="3017520" y="4123943"/>
+            <a:ext cx="2834640" cy="274320"/>
+          </a:xfrm>
+          <a:prstGeom prst="rect">
+            <a:avLst/>
+          </a:prstGeom>
+          <a:noFill/>
+        </p:spPr>
+        <p:txBody>
+          <a:bodyPr wrap="square" anchor="t" lIns="25400" rIns="25400" tIns="12700" bIns="12700">
+            <a:spAutoFit/>
+          </a:bodyPr>
+          <a:lstStyle/>
+          <a:p>
+            <a:pPr algn="l"/>
+            <a:r>
+              <a:rPr sz="1100" b="0" i="0">
+                <a:solidFill>
+                  <a:srgbClr val="595959"/>
+                </a:solidFill>
+                <a:latin typeface="Calibri"/>
+              </a:rPr>
+              <a:t>CloudWatch — 90 days</a:t>
+            </a:r>
+          </a:p>
+        </p:txBody>
+      </p:sp>
+      <p:sp>
+        <p:nvSpPr>
+          <p:cNvPr id="22" name="Rounded Rectangle 21"/>
+          <p:cNvSpPr/>
+          <p:nvPr/>
+        </p:nvSpPr>
+        <p:spPr>
+          <a:xfrm>
+            <a:off x="6355080" y="1463040"/>
+            <a:ext cx="5349240" cy="3017520"/>
+          </a:xfrm>
+          <a:prstGeom prst="roundRect">
+            <a:avLst>
+              <a:gd name="adj" fmla="val 4500"/>
+            </a:avLst>
+          </a:prstGeom>
+          <a:solidFill>
+            <a:srgbClr val="FFFFFF"/>
+          </a:solidFill>
+          <a:ln w="12700">
+            <a:solidFill>
+              <a:srgbClr val="BFCDDA"/>
+            </a:solidFill>
+          </a:ln>
+          <a:effectLst/>
+        </p:spPr>
+        <p:style>
+          <a:lnRef idx="1">
+            <a:schemeClr val="accent1"/>
+          </a:lnRef>
+          <a:fillRef idx="3">
+            <a:schemeClr val="accent1"/>
+          </a:fillRef>
+          <a:effectRef idx="2">
+            <a:schemeClr val="accent1"/>
+          </a:effectRef>
+          <a:fontRef idx="minor">
+            <a:schemeClr val="lt1"/>
+          </a:fontRef>
+        </p:style>
+        <p:txBody>
+          <a:bodyPr rtlCol="0" anchor="ctr"/>
+          <a:lstStyle/>
+          <a:p>
+            <a:pPr algn="ctr"/>
+          </a:p>
+        </p:txBody>
+      </p:sp>
+      <p:sp>
+        <p:nvSpPr>
+          <p:cNvPr id="23" name="Rounded Rectangle 22"/>
+          <p:cNvSpPr/>
+          <p:nvPr/>
+        </p:nvSpPr>
+        <p:spPr>
+          <a:xfrm>
+            <a:off x="6355080" y="1463040"/>
+            <a:ext cx="5349240" cy="146304"/>
+          </a:xfrm>
+          <a:prstGeom prst="roundRect">
+            <a:avLst>
+              <a:gd name="adj" fmla="val 50000"/>
+            </a:avLst>
+          </a:prstGeom>
+          <a:solidFill>
+            <a:srgbClr val="F5A623"/>
+          </a:solidFill>
+          <a:ln>
+            <a:noFill/>
+          </a:ln>
+          <a:effectLst/>
+        </p:spPr>
+        <p:style>
+          <a:lnRef idx="1">
+            <a:schemeClr val="accent1"/>
+          </a:lnRef>
+          <a:fillRef idx="3">
+            <a:schemeClr val="accent1"/>
+          </a:fillRef>
+          <a:effectRef idx="2">
+            <a:schemeClr val="accent1"/>
+          </a:effectRef>
+          <a:fontRef idx="minor">
+            <a:schemeClr val="lt1"/>
+          </a:fontRef>
+        </p:style>
+        <p:txBody>
+          <a:bodyPr rtlCol="0" anchor="ctr"/>
+          <a:lstStyle/>
+          <a:p>
+            <a:pPr algn="ctr"/>
+          </a:p>
+        </p:txBody>
+      </p:sp>
+      <p:sp>
+        <p:nvSpPr>
+          <p:cNvPr id="24" name="TextBox 23"/>
+          <p:cNvSpPr txBox="1"/>
+          <p:nvPr/>
+        </p:nvSpPr>
+        <p:spPr>
+          <a:xfrm>
+            <a:off x="6629400" y="1627632"/>
+            <a:ext cx="4846320" cy="320040"/>
+          </a:xfrm>
+          <a:prstGeom prst="rect">
+            <a:avLst/>
+          </a:prstGeom>
+          <a:noFill/>
+        </p:spPr>
+        <p:txBody>
+          <a:bodyPr wrap="square" anchor="t" lIns="25400" rIns="25400" tIns="12700" bIns="12700">
+            <a:spAutoFit/>
+          </a:bodyPr>
+          <a:lstStyle/>
+          <a:p>
+            <a:pPr algn="l"/>
+            <a:r>
+              <a:rPr sz="1500" b="1" i="0">
+                <a:solidFill>
+                  <a:srgbClr val="002C5F"/>
+                </a:solidFill>
+                <a:latin typeface="Calibri"/>
+              </a:rPr>
+              <a:t>Site-to-Site VPN (optional)</a:t>
+            </a:r>
+          </a:p>
+        </p:txBody>
+      </p:sp>
+      <p:sp>
+        <p:nvSpPr>
+          <p:cNvPr id="25" name="TextBox 24"/>
+          <p:cNvSpPr txBox="1"/>
+          <p:nvPr/>
+        </p:nvSpPr>
+        <p:spPr>
+          <a:xfrm>
+            <a:off x="6675120" y="2103120"/>
+            <a:ext cx="4800600" cy="2286000"/>
+          </a:xfrm>
+          <a:prstGeom prst="rect">
+            <a:avLst/>
+          </a:prstGeom>
+          <a:noFill/>
+        </p:spPr>
+        <p:txBody>
+          <a:bodyPr wrap="square" lIns="25400" rIns="25400" tIns="12700" bIns="12700">
+            <a:spAutoFit/>
+          </a:bodyPr>
+          <a:lstStyle/>
+          <a:p>
+            <a:pPr marL="182880" indent="-182880">
+              <a:spcAft>
+                <a:spcPts val="400"/>
+              </a:spcAft>
+              <a:buFont typeface="Arial"/>
+              <a:buChar char="•"/>
+            </a:pPr>
+            <a:r>
+              <a:rPr sz="1200" b="0" i="0">
+                <a:solidFill>
+                  <a:srgbClr val="595959"/>
+                </a:solidFill>
+                <a:latin typeface="Calibri"/>
+              </a:rPr>
+              <a:t>Created only when the client supplies CustomerGatewayIp + OnPremCidr (add-only stack update)</a:t>
+            </a:r>
+          </a:p>
+          <a:p>
+            <a:pPr marL="182880" indent="-182880">
+              <a:spcAft>
+                <a:spcPts val="400"/>
+              </a:spcAft>
+              <a:buFont typeface="Arial"/>
+              <a:buChar char="•"/>
+            </a:pPr>
+            <a:r>
+              <a:rPr sz="1200" b="0" i="0">
+                <a:solidFill>
+                  <a:srgbClr val="595959"/>
+                </a:solidFill>
+                <a:latin typeface="Calibri"/>
+              </a:rPr>
+              <a:t>Customer gateway ipsec.1 · static routing · BGP ASN 65000</a:t>
+            </a:r>
+          </a:p>
+          <a:p>
+            <a:pPr marL="182880" indent="-182880">
+              <a:spcAft>
+                <a:spcPts val="400"/>
+              </a:spcAft>
+              <a:buFont typeface="Arial"/>
+              <a:buChar char="•"/>
+            </a:pPr>
+            <a:r>
+              <a:rPr sz="1200" b="0" i="0">
+                <a:solidFill>
+                  <a:srgbClr val="595959"/>
+                </a:solidFill>
+                <a:latin typeface="Calibri"/>
+              </a:rPr>
+              <a:t>Routes propagated to the private and DB route tables</a:t>
+            </a:r>
+          </a:p>
+          <a:p>
+            <a:pPr marL="182880" indent="-182880">
+              <a:spcAft>
+                <a:spcPts val="400"/>
+              </a:spcAft>
+              <a:buFont typeface="Arial"/>
+              <a:buChar char="•"/>
+            </a:pPr>
+            <a:r>
+              <a:rPr sz="1200" b="0" i="0">
+                <a:solidFill>
+                  <a:srgbClr val="595959"/>
+                </a:solidFill>
+                <a:latin typeface="Calibri"/>
+              </a:rPr>
+              <a:t>Tunnel configuration downloaded from the VPC console and shared with the on-prem team</a:t>
+            </a:r>
+          </a:p>
+          <a:p>
+            <a:pPr marL="182880" indent="-182880">
+              <a:spcAft>
+                <a:spcPts val="400"/>
+              </a:spcAft>
+              <a:buFont typeface="Arial"/>
+              <a:buChar char="•"/>
+            </a:pPr>
+            <a:r>
+              <a:rPr sz="1200" b="0" i="0">
+                <a:solidFill>
+                  <a:srgbClr val="595959"/>
+                </a:solidFill>
+                <a:latin typeface="Calibri"/>
+              </a:rPr>
+              <a:t>If the race site moves (new public IP), the tunnel is replaced and re-configured</a:t>
+            </a:r>
+          </a:p>
+        </p:txBody>
+      </p:sp>
+      <p:sp>
+        <p:nvSpPr>
+          <p:cNvPr id="26" name="Rounded Rectangle 25"/>
+          <p:cNvSpPr/>
+          <p:nvPr/>
+        </p:nvSpPr>
+        <p:spPr>
+          <a:xfrm>
+            <a:off x="502920" y="4709160"/>
+            <a:ext cx="11201400" cy="1051560"/>
+          </a:xfrm>
+          <a:prstGeom prst="roundRect">
+            <a:avLst>
+              <a:gd name="adj" fmla="val 8000"/>
+            </a:avLst>
+          </a:prstGeom>
+          <a:solidFill>
+            <a:srgbClr val="E8F4FA"/>
+          </a:solidFill>
+          <a:ln w="12700">
+            <a:solidFill>
+              <a:srgbClr val="007FA8"/>
+            </a:solidFill>
+          </a:ln>
+          <a:effectLst/>
+        </p:spPr>
+        <p:style>
+          <a:lnRef idx="1">
+            <a:schemeClr val="accent1"/>
+          </a:lnRef>
+          <a:fillRef idx="3">
+            <a:schemeClr val="accent1"/>
+          </a:fillRef>
+          <a:effectRef idx="2">
+            <a:schemeClr val="accent1"/>
+          </a:effectRef>
+          <a:fontRef idx="minor">
+            <a:schemeClr val="lt1"/>
+          </a:fontRef>
+        </p:style>
+        <p:txBody>
+          <a:bodyPr rtlCol="0" anchor="ctr"/>
+          <a:lstStyle/>
+          <a:p>
+            <a:pPr algn="ctr"/>
+          </a:p>
+        </p:txBody>
+      </p:sp>
+      <p:sp>
+        <p:nvSpPr>
+          <p:cNvPr id="27" name="TextBox 26"/>
+          <p:cNvSpPr txBox="1"/>
+          <p:nvPr/>
+        </p:nvSpPr>
+        <p:spPr>
+          <a:xfrm>
+            <a:off x="822960" y="4846320"/>
+            <a:ext cx="10607040" cy="274320"/>
+          </a:xfrm>
+          <a:prstGeom prst="rect">
+            <a:avLst/>
+          </a:prstGeom>
+          <a:noFill/>
+        </p:spPr>
+        <p:txBody>
+          <a:bodyPr wrap="square" anchor="t" lIns="25400" rIns="25400" tIns="12700" bIns="12700">
+            <a:spAutoFit/>
+          </a:bodyPr>
+          <a:lstStyle/>
+          <a:p>
+            <a:pPr algn="l"/>
+            <a:r>
+              <a:rPr sz="1250" b="1" i="0">
+                <a:solidFill>
+                  <a:srgbClr val="002C5F"/>
+                </a:solidFill>
+                <a:latin typeface="Calibri"/>
+              </a:rPr>
+              <a:t>SAML values for the client's Entra ID Enterprise Application</a:t>
+            </a:r>
+          </a:p>
+        </p:txBody>
+      </p:sp>
+      <p:sp>
+        <p:nvSpPr>
+          <p:cNvPr id="28" name="Rounded Rectangle 27"/>
+          <p:cNvSpPr/>
+          <p:nvPr/>
+        </p:nvSpPr>
+        <p:spPr>
+          <a:xfrm>
+            <a:off x="822960" y="5193792"/>
+            <a:ext cx="3352800" cy="457200"/>
+          </a:xfrm>
+          <a:prstGeom prst="roundRect">
+            <a:avLst>
+              <a:gd name="adj" fmla="val 50000"/>
+            </a:avLst>
+          </a:prstGeom>
+          <a:solidFill>
+            <a:srgbClr val="FFFFFF"/>
+          </a:solidFill>
+          <a:ln w="12700">
+            <a:solidFill>
+              <a:srgbClr val="BFCDDA"/>
+            </a:solidFill>
+          </a:ln>
+          <a:effectLst/>
+        </p:spPr>
+        <p:style>
+          <a:lnRef idx="1">
+            <a:schemeClr val="accent1"/>
+          </a:lnRef>
+          <a:fillRef idx="3">
+            <a:schemeClr val="accent1"/>
+          </a:fillRef>
+          <a:effectRef idx="2">
+            <a:schemeClr val="accent1"/>
+          </a:effectRef>
+          <a:fontRef idx="minor">
+            <a:schemeClr val="lt1"/>
+          </a:fontRef>
+        </p:style>
+        <p:txBody>
+          <a:bodyPr rtlCol="0" anchor="ctr" wrap="square" lIns="38100" rIns="38100"/>
+          <a:lstStyle/>
+          <a:p>
+            <a:pPr algn="ctr"/>
+            <a:r>
+              <a:rPr sz="950" b="0" i="0">
+                <a:solidFill>
+                  <a:srgbClr val="595959"/>
+                </a:solidFill>
+                <a:latin typeface="Calibri"/>
+              </a:rPr>
+              <a:t>Identifier: urn:amazon:webservices:clientvpn</a:t>
+            </a:r>
+          </a:p>
+        </p:txBody>
+      </p:sp>
+      <p:sp>
+        <p:nvSpPr>
+          <p:cNvPr id="29" name="Rounded Rectangle 28"/>
+          <p:cNvSpPr/>
+          <p:nvPr/>
+        </p:nvSpPr>
+        <p:spPr>
+          <a:xfrm>
+            <a:off x="4450080" y="5193792"/>
+            <a:ext cx="3352800" cy="457200"/>
+          </a:xfrm>
+          <a:prstGeom prst="roundRect">
+            <a:avLst>
+              <a:gd name="adj" fmla="val 50000"/>
+            </a:avLst>
+          </a:prstGeom>
+          <a:solidFill>
+            <a:srgbClr val="FFFFFF"/>
+          </a:solidFill>
+          <a:ln w="12700">
+            <a:solidFill>
+              <a:srgbClr val="BFCDDA"/>
+            </a:solidFill>
+          </a:ln>
+          <a:effectLst/>
+        </p:spPr>
+        <p:style>
+          <a:lnRef idx="1">
+            <a:schemeClr val="accent1"/>
+          </a:lnRef>
+          <a:fillRef idx="3">
+            <a:schemeClr val="accent1"/>
+          </a:fillRef>
+          <a:effectRef idx="2">
+            <a:schemeClr val="accent1"/>
+          </a:effectRef>
+          <a:fontRef idx="minor">
+            <a:schemeClr val="lt1"/>
+          </a:fontRef>
+        </p:style>
+        <p:txBody>
+          <a:bodyPr rtlCol="0" anchor="ctr" wrap="square" lIns="38100" rIns="38100"/>
+          <a:lstStyle/>
+          <a:p>
+            <a:pPr algn="ctr"/>
+            <a:r>
+              <a:rPr sz="950" b="0" i="0">
+                <a:solidFill>
+                  <a:srgbClr val="595959"/>
+                </a:solidFill>
+                <a:latin typeface="Calibri"/>
+              </a:rPr>
+              <a:t>Reply URL: https://self-service.clientvpn.amazonaws.com/api/auth/sso/saml</a:t>
+            </a:r>
+          </a:p>
+        </p:txBody>
+      </p:sp>
+      <p:sp>
+        <p:nvSpPr>
+          <p:cNvPr id="30" name="Rounded Rectangle 29"/>
+          <p:cNvSpPr/>
+          <p:nvPr/>
+        </p:nvSpPr>
+        <p:spPr>
+          <a:xfrm>
+            <a:off x="8077199" y="5193792"/>
+            <a:ext cx="3352800" cy="457200"/>
+          </a:xfrm>
+          <a:prstGeom prst="roundRect">
+            <a:avLst>
+              <a:gd name="adj" fmla="val 50000"/>
+            </a:avLst>
+          </a:prstGeom>
+          <a:solidFill>
+            <a:srgbClr val="FFFFFF"/>
+          </a:solidFill>
+          <a:ln w="12700">
+            <a:solidFill>
+              <a:srgbClr val="BFCDDA"/>
+            </a:solidFill>
+          </a:ln>
+          <a:effectLst/>
+        </p:spPr>
+        <p:style>
+          <a:lnRef idx="1">
+            <a:schemeClr val="accent1"/>
+          </a:lnRef>
+          <a:fillRef idx="3">
+            <a:schemeClr val="accent1"/>
+          </a:fillRef>
+          <a:effectRef idx="2">
+            <a:schemeClr val="accent1"/>
+          </a:effectRef>
+          <a:fontRef idx="minor">
+            <a:schemeClr val="lt1"/>
+          </a:fontRef>
+        </p:style>
+        <p:txBody>
+          <a:bodyPr rtlCol="0" anchor="ctr" wrap="square" lIns="38100" rIns="38100"/>
+          <a:lstStyle/>
+          <a:p>
+            <a:pPr algn="ctr"/>
+            <a:r>
+              <a:rPr sz="950" b="0" i="0">
+                <a:solidFill>
+                  <a:srgbClr val="595959"/>
+                </a:solidFill>
+                <a:latin typeface="Calibri"/>
+              </a:rPr>
+              <a:t>Sign-on URL: http://127.0.0.1:35001 (loopback)</a:t>
+            </a:r>
+          </a:p>
+        </p:txBody>
+      </p:sp>
+      <p:sp>
+        <p:nvSpPr>
+          <p:cNvPr id="31" name="TextBox 30"/>
+          <p:cNvSpPr txBox="1"/>
+          <p:nvPr/>
+        </p:nvSpPr>
+        <p:spPr>
+          <a:xfrm>
+            <a:off x="502920" y="6473952"/>
+            <a:ext cx="8229600" cy="274320"/>
+          </a:xfrm>
+          <a:prstGeom prst="rect">
+            <a:avLst/>
+          </a:prstGeom>
+          <a:noFill/>
+        </p:spPr>
+        <p:txBody>
+          <a:bodyPr wrap="square" anchor="t" lIns="25400" rIns="25400" tIns="12700" bIns="12700">
+            <a:spAutoFit/>
+          </a:bodyPr>
+          <a:lstStyle/>
+          <a:p>
+            <a:pPr algn="l"/>
+            <a:r>
+              <a:rPr sz="900" b="0" i="0">
+                <a:solidFill>
+                  <a:srgbClr val="9AA7B4"/>
+                </a:solidFill>
+                <a:latin typeface="Calibri"/>
+              </a:rPr>
+              <a:t>HMSG WEC Racing · hmsg-rac-prd · eu-central-1 (Frankfurt)</a:t>
+            </a:r>
+          </a:p>
+        </p:txBody>
+      </p:sp>
+      <p:sp>
+        <p:nvSpPr>
+          <p:cNvPr id="32" name="TextBox 31"/>
+          <p:cNvSpPr txBox="1"/>
+          <p:nvPr/>
+        </p:nvSpPr>
+        <p:spPr>
+          <a:xfrm>
+            <a:off x="10332720" y="6473952"/>
+            <a:ext cx="1371600" cy="274320"/>
+          </a:xfrm>
+          <a:prstGeom prst="rect">
+            <a:avLst/>
+          </a:prstGeom>
+          <a:noFill/>
+        </p:spPr>
+        <p:txBody>
+          <a:bodyPr wrap="square" anchor="t" lIns="25400" rIns="25400" tIns="12700" bIns="12700">
+            <a:spAutoFit/>
+          </a:bodyPr>
+          <a:lstStyle/>
+          <a:p>
+            <a:pPr algn="r"/>
+            <a:r>
+              <a:rPr sz="900" b="0" i="0">
+                <a:solidFill>
+                  <a:srgbClr val="9AA7B4"/>
+                </a:solidFill>
+                <a:latin typeface="Calibri"/>
+              </a:rPr>
+              <a:t>06 / 08</a:t>
+            </a:r>
+          </a:p>
+        </p:txBody>
+      </p:sp>
+    </p:spTree>
+  </p:cSld>
+  <p:clrMapOvr>
+    <a:masterClrMapping/>
+  </p:clrMapOvr>
+</p:sld>
+</file>
+
+<file path=ppt/slides/slide7.xml><?xml version="1.0" encoding="utf-8"?>
+<p:sld xmlns:a="http://schemas.openxmlformats.org/drawingml/2006/main" xmlns:p="http://schemas.openxmlformats.org/presentationml/2006/main" xmlns:r="http://schemas.openxmlformats.org/officeDocument/2006/relationships">
+  <p:cSld>
+    <p:spTree>
+      <p:nvGrpSpPr>
+        <p:cNvPr id="1" name=""/>
+        <p:cNvGrpSpPr/>
+        <p:nvPr/>
+      </p:nvGrpSpPr>
+      <p:grpSpPr/>
+      <p:sp>
+        <p:nvSpPr>
+          <p:cNvPr id="2" name="TextBox 1"/>
+          <p:cNvSpPr txBox="1"/>
+          <p:nvPr/>
+        </p:nvSpPr>
+        <p:spPr>
+          <a:xfrm>
+            <a:off x="502920" y="256032"/>
+            <a:ext cx="11155680" cy="274320"/>
+          </a:xfrm>
+          <a:prstGeom prst="rect">
+            <a:avLst/>
+          </a:prstGeom>
+          <a:noFill/>
+        </p:spPr>
+        <p:txBody>
+          <a:bodyPr wrap="square" anchor="t" lIns="25400" rIns="25400" tIns="12700" bIns="12700">
+            <a:spAutoFit/>
+          </a:bodyPr>
+          <a:lstStyle/>
+          <a:p>
+            <a:pPr algn="l"/>
+            <a:r>
+              <a:rPr sz="1100" b="1" i="0">
+                <a:solidFill>
+                  <a:srgbClr val="00AAD2"/>
+                </a:solidFill>
+                <a:latin typeface="Calibri"/>
+              </a:rPr>
+              <a:t>05 · OPS</a:t>
+            </a:r>
+          </a:p>
+        </p:txBody>
+      </p:sp>
+      <p:sp>
+        <p:nvSpPr>
+          <p:cNvPr id="3" name="TextBox 2"/>
+          <p:cNvSpPr txBox="1"/>
+          <p:nvPr/>
+        </p:nvSpPr>
+        <p:spPr>
+          <a:xfrm>
+            <a:off x="502920" y="502920"/>
+            <a:ext cx="11155680" cy="566928"/>
+          </a:xfrm>
+          <a:prstGeom prst="rect">
+            <a:avLst/>
+          </a:prstGeom>
+          <a:noFill/>
+        </p:spPr>
+        <p:txBody>
+          <a:bodyPr wrap="square" anchor="t" lIns="25400" rIns="25400" tIns="12700" bIns="12700">
+            <a:spAutoFit/>
+          </a:bodyPr>
+          <a:lstStyle/>
+          <a:p>
+            <a:pPr algn="l"/>
+            <a:r>
+              <a:rPr sz="2900" b="1" i="0">
+                <a:solidFill>
+                  <a:srgbClr val="002C5F"/>
+                </a:solidFill>
+                <a:latin typeface="Calibri"/>
+              </a:rPr>
+              <a:t>Deployment &amp; operations</a:t>
+            </a:r>
+          </a:p>
+        </p:txBody>
+      </p:sp>
+      <p:sp>
+        <p:nvSpPr>
+          <p:cNvPr id="4" name="Rectangle 3"/>
+          <p:cNvSpPr/>
+          <p:nvPr/>
+        </p:nvSpPr>
+        <p:spPr>
+          <a:xfrm>
+            <a:off x="521207" y="1170432"/>
+            <a:ext cx="1554480" cy="41148"/>
+          </a:xfrm>
+          <a:prstGeom prst="rect">
+            <a:avLst/>
+          </a:prstGeom>
+          <a:solidFill>
+            <a:srgbClr val="F5A623"/>
+          </a:solidFill>
+          <a:ln>
+            <a:noFill/>
+          </a:ln>
+          <a:effectLst/>
+        </p:spPr>
+        <p:style>
+          <a:lnRef idx="1">
+            <a:schemeClr val="accent1"/>
+          </a:lnRef>
+          <a:fillRef idx="3">
+            <a:schemeClr val="accent1"/>
+          </a:fillRef>
+          <a:effectRef idx="2">
+            <a:schemeClr val="accent1"/>
+          </a:effectRef>
+          <a:fontRef idx="minor">
+            <a:schemeClr val="lt1"/>
+          </a:fontRef>
+        </p:style>
+        <p:txBody>
+          <a:bodyPr rtlCol="0" anchor="ctr"/>
+          <a:lstStyle/>
+          <a:p>
+            <a:pPr algn="ctr"/>
+          </a:p>
+        </p:txBody>
+      </p:sp>
+      <p:sp>
+        <p:nvSpPr>
+          <p:cNvPr id="5" name="Rounded Rectangle 4"/>
+          <p:cNvSpPr/>
+          <p:nvPr/>
+        </p:nvSpPr>
+        <p:spPr>
+          <a:xfrm>
+            <a:off x="502920" y="1463040"/>
+            <a:ext cx="3520440" cy="3931920"/>
+          </a:xfrm>
+          <a:prstGeom prst="roundRect">
+            <a:avLst>
+              <a:gd name="adj" fmla="val 4500"/>
+            </a:avLst>
+          </a:prstGeom>
+          <a:solidFill>
+            <a:srgbClr val="FFFFFF"/>
+          </a:solidFill>
+          <a:ln w="12700">
+            <a:solidFill>
+              <a:srgbClr val="BFCDDA"/>
+            </a:solidFill>
+          </a:ln>
+          <a:effectLst/>
+        </p:spPr>
+        <p:style>
+          <a:lnRef idx="1">
+            <a:schemeClr val="accent1"/>
+          </a:lnRef>
+          <a:fillRef idx="3">
+            <a:schemeClr val="accent1"/>
+          </a:fillRef>
+          <a:effectRef idx="2">
+            <a:schemeClr val="accent1"/>
+          </a:effectRef>
+          <a:fontRef idx="minor">
+            <a:schemeClr val="lt1"/>
+          </a:fontRef>
+        </p:style>
+        <p:txBody>
+          <a:bodyPr rtlCol="0" anchor="ctr"/>
+          <a:lstStyle/>
+          <a:p>
+            <a:pPr algn="ctr"/>
+          </a:p>
+        </p:txBody>
+      </p:sp>
+      <p:sp>
+        <p:nvSpPr>
+          <p:cNvPr id="6" name="Rounded Rectangle 5"/>
+          <p:cNvSpPr/>
+          <p:nvPr/>
+        </p:nvSpPr>
+        <p:spPr>
+          <a:xfrm>
+            <a:off x="502920" y="1463040"/>
+            <a:ext cx="3520440" cy="502920"/>
+          </a:xfrm>
+          <a:prstGeom prst="roundRect">
+            <a:avLst>
+              <a:gd name="adj" fmla="val 35000"/>
+            </a:avLst>
+          </a:prstGeom>
+          <a:solidFill>
+            <a:srgbClr val="002C5F"/>
+          </a:solidFill>
+          <a:ln>
+            <a:noFill/>
+          </a:ln>
+          <a:effectLst/>
+        </p:spPr>
+        <p:style>
+          <a:lnRef idx="1">
+            <a:schemeClr val="accent1"/>
+          </a:lnRef>
+          <a:fillRef idx="3">
+            <a:schemeClr val="accent1"/>
+          </a:fillRef>
+          <a:effectRef idx="2">
+            <a:schemeClr val="accent1"/>
+          </a:effectRef>
+          <a:fontRef idx="minor">
+            <a:schemeClr val="lt1"/>
+          </a:fontRef>
+        </p:style>
+        <p:txBody>
+          <a:bodyPr rtlCol="0" anchor="ctr"/>
+          <a:lstStyle/>
+          <a:p>
+            <a:pPr algn="ctr"/>
+          </a:p>
+        </p:txBody>
+      </p:sp>
+      <p:sp>
+        <p:nvSpPr>
+          <p:cNvPr id="7" name="TextBox 6"/>
+          <p:cNvSpPr txBox="1"/>
+          <p:nvPr/>
+        </p:nvSpPr>
+        <p:spPr>
+          <a:xfrm>
+            <a:off x="731520" y="1572768"/>
+            <a:ext cx="3108960" cy="320040"/>
+          </a:xfrm>
+          <a:prstGeom prst="rect">
+            <a:avLst/>
+          </a:prstGeom>
+          <a:noFill/>
+        </p:spPr>
+        <p:txBody>
+          <a:bodyPr wrap="square" anchor="t" lIns="25400" rIns="25400" tIns="12700" bIns="12700">
+            <a:spAutoFit/>
+          </a:bodyPr>
+          <a:lstStyle/>
+          <a:p>
+            <a:pPr algn="l"/>
+            <a:r>
+              <a:rPr sz="1600" b="1" i="0">
+                <a:solidFill>
+                  <a:srgbClr val="FFFFFF"/>
+                </a:solidFill>
+                <a:latin typeface="Calibri"/>
+              </a:rPr>
+              <a:t>Deploy</a:t>
+            </a:r>
+          </a:p>
+        </p:txBody>
+      </p:sp>
+      <p:sp>
+        <p:nvSpPr>
+          <p:cNvPr id="8" name="TextBox 7"/>
+          <p:cNvSpPr txBox="1"/>
+          <p:nvPr/>
+        </p:nvSpPr>
+        <p:spPr>
+          <a:xfrm>
+            <a:off x="822960" y="2240280"/>
+            <a:ext cx="2971800" cy="3017520"/>
+          </a:xfrm>
+          <a:prstGeom prst="rect">
+            <a:avLst/>
+          </a:prstGeom>
+          <a:noFill/>
+        </p:spPr>
+        <p:txBody>
+          <a:bodyPr wrap="square" lIns="25400" rIns="25400" tIns="12700" bIns="12700">
+            <a:spAutoFit/>
+          </a:bodyPr>
+          <a:lstStyle/>
+          <a:p>
+            <a:pPr marL="182880" indent="-182880">
+              <a:spcAft>
+                <a:spcPts val="800"/>
+              </a:spcAft>
+              <a:buFont typeface="Arial"/>
+              <a:buChar char="•"/>
+            </a:pPr>
+            <a:r>
+              <a:rPr sz="1200" b="0" i="0">
+                <a:solidFill>
+                  <a:srgbClr val="595959"/>
+                </a:solidFill>
+                <a:latin typeface="Calibri"/>
+              </a:rPr>
+              <a:t>CloudFormation stack hmsg-rac-prd</a:t>
+            </a:r>
+          </a:p>
+          <a:p>
+            <a:pPr marL="182880" indent="-182880">
+              <a:spcAft>
+                <a:spcPts val="800"/>
+              </a:spcAft>
+              <a:buFont typeface="Arial"/>
+              <a:buChar char="•"/>
+            </a:pPr>
+            <a:r>
+              <a:rPr sz="1200" b="0" i="0">
+                <a:solidFill>
+                  <a:srgbClr val="595959"/>
+                </a:solidFill>
+                <a:latin typeface="Calibri"/>
+              </a:rPr>
+              <a:t>CAPABILITY_NAMED_IAM required</a:t>
+            </a:r>
+          </a:p>
+          <a:p>
+            <a:pPr marL="182880" indent="-182880">
+              <a:spcAft>
+                <a:spcPts val="800"/>
+              </a:spcAft>
+              <a:buFont typeface="Arial"/>
+              <a:buChar char="•"/>
+            </a:pPr>
+            <a:r>
+              <a:rPr sz="1200" b="0" i="0">
+                <a:solidFill>
+                  <a:srgbClr val="595959"/>
+                </a:solidFill>
+                <a:latin typeface="Calibri"/>
+              </a:rPr>
+              <a:t>NoEcho sysadm password → Secrets Manager</a:t>
+            </a:r>
+          </a:p>
+          <a:p>
+            <a:pPr marL="182880" indent="-182880">
+              <a:spcAft>
+                <a:spcPts val="800"/>
+              </a:spcAft>
+              <a:buFont typeface="Arial"/>
+              <a:buChar char="•"/>
+            </a:pPr>
+            <a:r>
+              <a:rPr sz="1200" b="0" i="0">
+                <a:solidFill>
+                  <a:srgbClr val="595959"/>
+                </a:solidFill>
+                <a:latin typeface="Calibri"/>
+              </a:rPr>
+              <a:t>Site-to-Site VPN added later via a second deploy — no downtime</a:t>
+            </a:r>
+          </a:p>
+        </p:txBody>
+      </p:sp>
+      <p:sp>
+        <p:nvSpPr>
+          <p:cNvPr id="9" name="Rounded Rectangle 8"/>
+          <p:cNvSpPr/>
+          <p:nvPr/>
+        </p:nvSpPr>
+        <p:spPr>
+          <a:xfrm>
+            <a:off x="4251960" y="1463040"/>
+            <a:ext cx="3520440" cy="3931920"/>
+          </a:xfrm>
+          <a:prstGeom prst="roundRect">
+            <a:avLst>
+              <a:gd name="adj" fmla="val 4500"/>
+            </a:avLst>
+          </a:prstGeom>
+          <a:solidFill>
+            <a:srgbClr val="FFFFFF"/>
+          </a:solidFill>
+          <a:ln w="12700">
+            <a:solidFill>
+              <a:srgbClr val="BFCDDA"/>
+            </a:solidFill>
+          </a:ln>
+          <a:effectLst/>
+        </p:spPr>
+        <p:style>
+          <a:lnRef idx="1">
+            <a:schemeClr val="accent1"/>
+          </a:lnRef>
+          <a:fillRef idx="3">
+            <a:schemeClr val="accent1"/>
+          </a:fillRef>
+          <a:effectRef idx="2">
+            <a:schemeClr val="accent1"/>
+          </a:effectRef>
+          <a:fontRef idx="minor">
+            <a:schemeClr val="lt1"/>
+          </a:fontRef>
+        </p:style>
+        <p:txBody>
+          <a:bodyPr rtlCol="0" anchor="ctr"/>
+          <a:lstStyle/>
+          <a:p>
+            <a:pPr algn="ctr"/>
+          </a:p>
+        </p:txBody>
+      </p:sp>
+      <p:sp>
+        <p:nvSpPr>
+          <p:cNvPr id="10" name="Rounded Rectangle 9"/>
+          <p:cNvSpPr/>
+          <p:nvPr/>
+        </p:nvSpPr>
+        <p:spPr>
+          <a:xfrm>
+            <a:off x="4251960" y="1463040"/>
+            <a:ext cx="3520440" cy="502920"/>
+          </a:xfrm>
+          <a:prstGeom prst="roundRect">
+            <a:avLst>
+              <a:gd name="adj" fmla="val 35000"/>
+            </a:avLst>
+          </a:prstGeom>
+          <a:solidFill>
+            <a:srgbClr val="007FA8"/>
+          </a:solidFill>
+          <a:ln>
+            <a:noFill/>
+          </a:ln>
+          <a:effectLst/>
+        </p:spPr>
+        <p:style>
+          <a:lnRef idx="1">
+            <a:schemeClr val="accent1"/>
+          </a:lnRef>
+          <a:fillRef idx="3">
+            <a:schemeClr val="accent1"/>
+          </a:fillRef>
+          <a:effectRef idx="2">
+            <a:schemeClr val="accent1"/>
+          </a:effectRef>
+          <a:fontRef idx="minor">
+            <a:schemeClr val="lt1"/>
+          </a:fontRef>
+        </p:style>
+        <p:txBody>
+          <a:bodyPr rtlCol="0" anchor="ctr"/>
+          <a:lstStyle/>
+          <a:p>
+            <a:pPr algn="ctr"/>
+          </a:p>
+        </p:txBody>
+      </p:sp>
+      <p:sp>
+        <p:nvSpPr>
+          <p:cNvPr id="11" name="TextBox 10"/>
+          <p:cNvSpPr txBox="1"/>
+          <p:nvPr/>
+        </p:nvSpPr>
+        <p:spPr>
+          <a:xfrm>
+            <a:off x="4480560" y="1572768"/>
+            <a:ext cx="3108960" cy="320040"/>
+          </a:xfrm>
+          <a:prstGeom prst="rect">
+            <a:avLst/>
+          </a:prstGeom>
+          <a:noFill/>
+        </p:spPr>
+        <p:txBody>
+          <a:bodyPr wrap="square" anchor="t" lIns="25400" rIns="25400" tIns="12700" bIns="12700">
+            <a:spAutoFit/>
+          </a:bodyPr>
+          <a:lstStyle/>
+          <a:p>
+            <a:pPr algn="l"/>
+            <a:r>
+              <a:rPr sz="1600" b="1" i="0">
+                <a:solidFill>
+                  <a:srgbClr val="FFFFFF"/>
+                </a:solidFill>
+                <a:latin typeface="Calibri"/>
+              </a:rPr>
+              <a:t>Access</a:t>
+            </a:r>
+          </a:p>
+        </p:txBody>
+      </p:sp>
+      <p:sp>
+        <p:nvSpPr>
+          <p:cNvPr id="12" name="TextBox 11"/>
+          <p:cNvSpPr txBox="1"/>
+          <p:nvPr/>
+        </p:nvSpPr>
+        <p:spPr>
+          <a:xfrm>
+            <a:off x="4572000" y="2240280"/>
+            <a:ext cx="2971800" cy="3017520"/>
+          </a:xfrm>
+          <a:prstGeom prst="rect">
+            <a:avLst/>
+          </a:prstGeom>
+          <a:noFill/>
+        </p:spPr>
+        <p:txBody>
+          <a:bodyPr wrap="square" lIns="25400" rIns="25400" tIns="12700" bIns="12700">
+            <a:spAutoFit/>
+          </a:bodyPr>
+          <a:lstStyle/>
+          <a:p>
+            <a:pPr marL="182880" indent="-182880">
+              <a:spcAft>
+                <a:spcPts val="800"/>
+              </a:spcAft>
+              <a:buFont typeface="Arial"/>
+              <a:buChar char="•"/>
+            </a:pPr>
+            <a:r>
+              <a:rPr sz="1200" b="0" i="0">
+                <a:solidFill>
+                  <a:srgbClr val="595959"/>
+                </a:solidFill>
+                <a:latin typeface="Calibri"/>
+              </a:rPr>
+              <a:t>RDP via Client VPN to the private IP (sysadm)</a:t>
+            </a:r>
+          </a:p>
+          <a:p>
+            <a:pPr marL="182880" indent="-182880">
+              <a:spcAft>
+                <a:spcPts val="800"/>
+              </a:spcAft>
+              <a:buFont typeface="Arial"/>
+              <a:buChar char="•"/>
+            </a:pPr>
+            <a:r>
+              <a:rPr sz="1200" b="0" i="0">
+                <a:solidFill>
+                  <a:srgbClr val="595959"/>
+                </a:solidFill>
+                <a:latin typeface="Calibri"/>
+              </a:rPr>
+              <a:t>SSM Session Manager as backup path</a:t>
+            </a:r>
+          </a:p>
+          <a:p>
+            <a:pPr marL="182880" indent="-182880">
+              <a:spcAft>
+                <a:spcPts val="800"/>
+              </a:spcAft>
+              <a:buFont typeface="Arial"/>
+              <a:buChar char="•"/>
+            </a:pPr>
+            <a:r>
+              <a:rPr sz="1200" b="0" i="0">
+                <a:solidFill>
+                  <a:srgbClr val="595959"/>
+                </a:solidFill>
+                <a:latin typeface="Calibri"/>
+              </a:rPr>
+              <a:t>No public IP — internet reachable from VPC only through NAT (private subnets)</a:t>
+            </a:r>
+          </a:p>
+        </p:txBody>
+      </p:sp>
+      <p:sp>
+        <p:nvSpPr>
+          <p:cNvPr id="13" name="Rounded Rectangle 12"/>
+          <p:cNvSpPr/>
+          <p:nvPr/>
+        </p:nvSpPr>
+        <p:spPr>
+          <a:xfrm>
+            <a:off x="8001000" y="1463040"/>
+            <a:ext cx="3520440" cy="3931920"/>
+          </a:xfrm>
+          <a:prstGeom prst="roundRect">
+            <a:avLst>
+              <a:gd name="adj" fmla="val 4500"/>
+            </a:avLst>
+          </a:prstGeom>
+          <a:solidFill>
+            <a:srgbClr val="FFFFFF"/>
+          </a:solidFill>
+          <a:ln w="12700">
+            <a:solidFill>
+              <a:srgbClr val="BFCDDA"/>
+            </a:solidFill>
+          </a:ln>
+          <a:effectLst/>
+        </p:spPr>
+        <p:style>
+          <a:lnRef idx="1">
+            <a:schemeClr val="accent1"/>
+          </a:lnRef>
+          <a:fillRef idx="3">
+            <a:schemeClr val="accent1"/>
+          </a:fillRef>
+          <a:effectRef idx="2">
+            <a:schemeClr val="accent1"/>
+          </a:effectRef>
+          <a:fontRef idx="minor">
+            <a:schemeClr val="lt1"/>
+          </a:fontRef>
+        </p:style>
+        <p:txBody>
+          <a:bodyPr rtlCol="0" anchor="ctr"/>
+          <a:lstStyle/>
+          <a:p>
+            <a:pPr algn="ctr"/>
+          </a:p>
+        </p:txBody>
+      </p:sp>
+      <p:sp>
+        <p:nvSpPr>
+          <p:cNvPr id="14" name="Rounded Rectangle 13"/>
+          <p:cNvSpPr/>
+          <p:nvPr/>
+        </p:nvSpPr>
+        <p:spPr>
+          <a:xfrm>
+            <a:off x="8001000" y="1463040"/>
+            <a:ext cx="3520440" cy="502920"/>
+          </a:xfrm>
+          <a:prstGeom prst="roundRect">
+            <a:avLst>
+              <a:gd name="adj" fmla="val 35000"/>
+            </a:avLst>
+          </a:prstGeom>
+          <a:solidFill>
+            <a:srgbClr val="F5A623"/>
+          </a:solidFill>
+          <a:ln>
+            <a:noFill/>
+          </a:ln>
+          <a:effectLst/>
+        </p:spPr>
+        <p:style>
+          <a:lnRef idx="1">
+            <a:schemeClr val="accent1"/>
+          </a:lnRef>
+          <a:fillRef idx="3">
+            <a:schemeClr val="accent1"/>
+          </a:fillRef>
+          <a:effectRef idx="2">
+            <a:schemeClr val="accent1"/>
+          </a:effectRef>
+          <a:fontRef idx="minor">
+            <a:schemeClr val="lt1"/>
+          </a:fontRef>
+        </p:style>
+        <p:txBody>
+          <a:bodyPr rtlCol="0" anchor="ctr"/>
+          <a:lstStyle/>
+          <a:p>
+            <a:pPr algn="ctr"/>
+          </a:p>
+        </p:txBody>
+      </p:sp>
+      <p:sp>
+        <p:nvSpPr>
+          <p:cNvPr id="15" name="TextBox 14"/>
+          <p:cNvSpPr txBox="1"/>
+          <p:nvPr/>
+        </p:nvSpPr>
+        <p:spPr>
+          <a:xfrm>
+            <a:off x="8229600" y="1572768"/>
+            <a:ext cx="3108960" cy="320040"/>
+          </a:xfrm>
+          <a:prstGeom prst="rect">
+            <a:avLst/>
+          </a:prstGeom>
+          <a:noFill/>
+        </p:spPr>
+        <p:txBody>
+          <a:bodyPr wrap="square" anchor="t" lIns="25400" rIns="25400" tIns="12700" bIns="12700">
+            <a:spAutoFit/>
+          </a:bodyPr>
+          <a:lstStyle/>
+          <a:p>
+            <a:pPr algn="l"/>
+            <a:r>
+              <a:rPr sz="1600" b="1" i="0">
+                <a:solidFill>
+                  <a:srgbClr val="FFFFFF"/>
+                </a:solidFill>
+                <a:latin typeface="Calibri"/>
+              </a:rPr>
+              <a:t>Operate</a:t>
+            </a:r>
+          </a:p>
+        </p:txBody>
+      </p:sp>
+      <p:sp>
+        <p:nvSpPr>
+          <p:cNvPr id="16" name="TextBox 15"/>
+          <p:cNvSpPr txBox="1"/>
+          <p:nvPr/>
+        </p:nvSpPr>
+        <p:spPr>
+          <a:xfrm>
+            <a:off x="8321040" y="2240280"/>
+            <a:ext cx="2971800" cy="3017520"/>
+          </a:xfrm>
+          <a:prstGeom prst="rect">
+            <a:avLst/>
+          </a:prstGeom>
+          <a:noFill/>
+        </p:spPr>
+        <p:txBody>
+          <a:bodyPr wrap="square" lIns="25400" rIns="25400" tIns="12700" bIns="12700">
+            <a:spAutoFit/>
+          </a:bodyPr>
+          <a:lstStyle/>
+          <a:p>
+            <a:pPr marL="182880" indent="-182880">
+              <a:spcAft>
+                <a:spcPts val="800"/>
+              </a:spcAft>
+              <a:buFont typeface="Arial"/>
+              <a:buChar char="•"/>
+            </a:pPr>
+            <a:r>
+              <a:rPr sz="1200" b="0" i="0">
+                <a:solidFill>
+                  <a:srgbClr val="595959"/>
+                </a:solidFill>
+                <a:latin typeface="Calibri"/>
+              </a:rPr>
+              <a:t>sysadm password rotation: change on host first, then update the secret</a:t>
+            </a:r>
+          </a:p>
+          <a:p>
+            <a:pPr marL="182880" indent="-182880">
+              <a:spcAft>
+                <a:spcPts val="800"/>
+              </a:spcAft>
+              <a:buFont typeface="Arial"/>
+              <a:buChar char="•"/>
+            </a:pPr>
+            <a:r>
+              <a:rPr sz="1200" b="0" i="0">
+                <a:solidFill>
+                  <a:srgbClr val="595959"/>
+                </a:solidFill>
+                <a:latin typeface="Calibri"/>
+              </a:rPr>
+              <a:t>Flow logs → S3; Client VPN logs → CloudWatch</a:t>
+            </a:r>
+          </a:p>
+          <a:p>
+            <a:pPr marL="182880" indent="-182880">
+              <a:spcAft>
+                <a:spcPts val="800"/>
+              </a:spcAft>
+              <a:buFont typeface="Arial"/>
+              <a:buChar char="•"/>
+            </a:pPr>
+            <a:r>
+              <a:rPr sz="1200" b="0" i="0">
+                <a:solidFill>
+                  <a:srgbClr val="595959"/>
+                </a:solidFill>
+                <a:latin typeface="Calibri"/>
+              </a:rPr>
+              <a:t>AWS API access from the DB subnet only via VPC endpoints</a:t>
+            </a:r>
+          </a:p>
+          <a:p>
+            <a:pPr marL="182880" indent="-182880">
+              <a:spcAft>
+                <a:spcPts val="800"/>
+              </a:spcAft>
+              <a:buFont typeface="Arial"/>
+              <a:buChar char="•"/>
+            </a:pPr>
+            <a:r>
+              <a:rPr sz="1200" b="0" i="0">
+                <a:solidFill>
+                  <a:srgbClr val="595959"/>
+                </a:solidFill>
+                <a:latin typeface="Calibri"/>
+              </a:rPr>
+              <a:t>Client VPN user management → HMGRS after handover</a:t>
+            </a:r>
+          </a:p>
+        </p:txBody>
+      </p:sp>
+      <p:sp>
+        <p:nvSpPr>
+          <p:cNvPr id="17" name="Rounded Rectangle 16"/>
+          <p:cNvSpPr/>
+          <p:nvPr/>
+        </p:nvSpPr>
+        <p:spPr>
+          <a:xfrm>
+            <a:off x="502920" y="5623560"/>
+            <a:ext cx="11201400" cy="548640"/>
+          </a:xfrm>
+          <a:prstGeom prst="roundRect">
+            <a:avLst>
+              <a:gd name="adj" fmla="val 25000"/>
+            </a:avLst>
+          </a:prstGeom>
+          <a:solidFill>
+            <a:srgbClr val="FDF3E7"/>
+          </a:solidFill>
+          <a:ln w="12700">
+            <a:solidFill>
+              <a:srgbClr val="F5A623"/>
+            </a:solidFill>
+          </a:ln>
+          <a:effectLst/>
+        </p:spPr>
+        <p:style>
+          <a:lnRef idx="1">
+            <a:schemeClr val="accent1"/>
+          </a:lnRef>
+          <a:fillRef idx="3">
+            <a:schemeClr val="accent1"/>
+          </a:fillRef>
+          <a:effectRef idx="2">
+            <a:schemeClr val="accent1"/>
+          </a:effectRef>
+          <a:fontRef idx="minor">
+            <a:schemeClr val="lt1"/>
+          </a:fontRef>
+        </p:style>
+        <p:txBody>
+          <a:bodyPr rtlCol="0" anchor="ctr"/>
+          <a:lstStyle/>
+          <a:p>
+            <a:pPr algn="ctr"/>
+          </a:p>
+        </p:txBody>
+      </p:sp>
+      <p:sp>
+        <p:nvSpPr>
+          <p:cNvPr id="18" name="TextBox 17"/>
+          <p:cNvSpPr txBox="1"/>
+          <p:nvPr/>
+        </p:nvSpPr>
+        <p:spPr>
+          <a:xfrm>
+            <a:off x="822960" y="5760720"/>
+            <a:ext cx="10607040" cy="320040"/>
+          </a:xfrm>
+          <a:prstGeom prst="rect">
+            <a:avLst/>
+          </a:prstGeom>
+          <a:noFill/>
+        </p:spPr>
+        <p:txBody>
+          <a:bodyPr wrap="square" anchor="t" lIns="25400" rIns="25400" tIns="12700" bIns="12700">
+            <a:spAutoFit/>
+          </a:bodyPr>
+          <a:lstStyle/>
+          <a:p>
+            <a:pPr algn="ctr"/>
+            <a:r>
+              <a:rPr sz="1200" b="1" i="0">
+                <a:solidFill>
+                  <a:srgbClr val="002C5F"/>
+                </a:solidFill>
+                <a:latin typeface="Calibri"/>
+              </a:rPr>
+              <a:t>All temporary implementation IAM permissions are removed at project completion.</a:t>
+            </a:r>
+          </a:p>
+        </p:txBody>
+      </p:sp>
+      <p:sp>
+        <p:nvSpPr>
+          <p:cNvPr id="19" name="TextBox 18"/>
+          <p:cNvSpPr txBox="1"/>
+          <p:nvPr/>
+        </p:nvSpPr>
+        <p:spPr>
+          <a:xfrm>
+            <a:off x="502920" y="6473952"/>
+            <a:ext cx="8229600" cy="274320"/>
+          </a:xfrm>
+          <a:prstGeom prst="rect">
+            <a:avLst/>
+          </a:prstGeom>
+          <a:noFill/>
+        </p:spPr>
+        <p:txBody>
+          <a:bodyPr wrap="square" anchor="t" lIns="25400" rIns="25400" tIns="12700" bIns="12700">
+            <a:spAutoFit/>
+          </a:bodyPr>
+          <a:lstStyle/>
+          <a:p>
+            <a:pPr algn="l"/>
+            <a:r>
+              <a:rPr sz="900" b="0" i="0">
+                <a:solidFill>
+                  <a:srgbClr val="9AA7B4"/>
+                </a:solidFill>
+                <a:latin typeface="Calibri"/>
+              </a:rPr>
+              <a:t>HMSG WEC Racing · hmsg-rac-prd · eu-central-1 (Frankfurt)</a:t>
+            </a:r>
+          </a:p>
+        </p:txBody>
+      </p:sp>
+      <p:sp>
+        <p:nvSpPr>
+          <p:cNvPr id="20" name="TextBox 19"/>
+          <p:cNvSpPr txBox="1"/>
+          <p:nvPr/>
+        </p:nvSpPr>
+        <p:spPr>
+          <a:xfrm>
+            <a:off x="10332720" y="6473952"/>
+            <a:ext cx="1371600" cy="274320"/>
+          </a:xfrm>
+          <a:prstGeom prst="rect">
+            <a:avLst/>
+          </a:prstGeom>
+          <a:noFill/>
+        </p:spPr>
+        <p:txBody>
+          <a:bodyPr wrap="square" anchor="t" lIns="25400" rIns="25400" tIns="12700" bIns="12700">
+            <a:spAutoFit/>
+          </a:bodyPr>
+          <a:lstStyle/>
+          <a:p>
+            <a:pPr algn="r"/>
+            <a:r>
+              <a:rPr sz="900" b="0" i="0">
+                <a:solidFill>
+                  <a:srgbClr val="9AA7B4"/>
+                </a:solidFill>
+                <a:latin typeface="Calibri"/>
+              </a:rPr>
+              <a:t>07 / 08</a:t>
+            </a:r>
+          </a:p>
+        </p:txBody>
+      </p:sp>
+    </p:spTree>
+  </p:cSld>
+  <p:clrMapOvr>
+    <a:masterClrMapping/>
+  </p:clrMapOvr>
+</p:sld>
+</file>
+
+<file path=ppt/slides/slide8.xml><?xml version="1.0" encoding="utf-8"?>
+<p:sld xmlns:a="http://schemas.openxmlformats.org/drawingml/2006/main" xmlns:p="http://schemas.openxmlformats.org/presentationml/2006/main" xmlns:r="http://schemas.openxmlformats.org/officeDocument/2006/relationships">
+  <p:cSld>
+    <p:spTree>
+      <p:nvGrpSpPr>
+        <p:cNvPr id="1" name=""/>
+        <p:cNvGrpSpPr/>
+        <p:nvPr/>
+      </p:nvGrpSpPr>
+      <p:grpSpPr/>
+      <p:sp>
+        <p:nvSpPr>
+          <p:cNvPr id="2" name="TextBox 1"/>
+          <p:cNvSpPr txBox="1"/>
+          <p:nvPr/>
+        </p:nvSpPr>
+        <p:spPr>
+          <a:xfrm>
+            <a:off x="502920" y="256032"/>
+            <a:ext cx="11155680" cy="274320"/>
+          </a:xfrm>
+          <a:prstGeom prst="rect">
+            <a:avLst/>
+          </a:prstGeom>
+          <a:noFill/>
+        </p:spPr>
+        <p:txBody>
+          <a:bodyPr wrap="square" anchor="t" lIns="25400" rIns="25400" tIns="12700" bIns="12700">
+            <a:spAutoFit/>
+          </a:bodyPr>
+          <a:lstStyle/>
+          <a:p>
+            <a:pPr algn="l"/>
+            <a:r>
+              <a:rPr sz="1100" b="1" i="0">
+                <a:solidFill>
+                  <a:srgbClr val="00AAD2"/>
+                </a:solidFill>
+                <a:latin typeface="Calibri"/>
+              </a:rPr>
+              <a:t>06 · CLOSE-OUT</a:t>
+            </a:r>
+          </a:p>
+        </p:txBody>
+      </p:sp>
+      <p:sp>
+        <p:nvSpPr>
+          <p:cNvPr id="3" name="TextBox 2"/>
+          <p:cNvSpPr txBox="1"/>
+          <p:nvPr/>
+        </p:nvSpPr>
+        <p:spPr>
+          <a:xfrm>
+            <a:off x="502920" y="502920"/>
+            <a:ext cx="11155680" cy="566928"/>
+          </a:xfrm>
+          <a:prstGeom prst="rect">
+            <a:avLst/>
+          </a:prstGeom>
+          <a:noFill/>
+        </p:spPr>
+        <p:txBody>
+          <a:bodyPr wrap="square" anchor="t" lIns="25400" rIns="25400" tIns="12700" bIns="12700">
+            <a:spAutoFit/>
+          </a:bodyPr>
+          <a:lstStyle/>
+          <a:p>
+            <a:pPr algn="l"/>
+            <a:r>
+              <a:rPr sz="2900" b="1" i="0">
+                <a:solidFill>
+                  <a:srgbClr val="002C5F"/>
+                </a:solidFill>
+                <a:latin typeface="Calibri"/>
+              </a:rPr>
+              <a:t>Deliverables &amp; next steps</a:t>
+            </a:r>
+          </a:p>
+        </p:txBody>
+      </p:sp>
+      <p:sp>
+        <p:nvSpPr>
+          <p:cNvPr id="4" name="Rectangle 3"/>
+          <p:cNvSpPr/>
+          <p:nvPr/>
+        </p:nvSpPr>
+        <p:spPr>
+          <a:xfrm>
+            <a:off x="521207" y="1170432"/>
+            <a:ext cx="1554480" cy="41148"/>
+          </a:xfrm>
+          <a:prstGeom prst="rect">
+            <a:avLst/>
+          </a:prstGeom>
+          <a:solidFill>
+            <a:srgbClr val="F5A623"/>
+          </a:solidFill>
+          <a:ln>
+            <a:noFill/>
+          </a:ln>
+          <a:effectLst/>
+        </p:spPr>
+        <p:style>
+          <a:lnRef idx="1">
+            <a:schemeClr val="accent1"/>
+          </a:lnRef>
+          <a:fillRef idx="3">
+            <a:schemeClr val="accent1"/>
+          </a:fillRef>
+          <a:effectRef idx="2">
+            <a:schemeClr val="accent1"/>
+          </a:effectRef>
+          <a:fontRef idx="minor">
+            <a:schemeClr val="lt1"/>
+          </a:fontRef>
+        </p:style>
+        <p:txBody>
+          <a:bodyPr rtlCol="0" anchor="ctr"/>
+          <a:lstStyle/>
+          <a:p>
+            <a:pPr algn="ctr"/>
+          </a:p>
+        </p:txBody>
+      </p:sp>
+      <p:sp>
+        <p:nvSpPr>
+          <p:cNvPr id="5" name="Rounded Rectangle 4"/>
+          <p:cNvSpPr/>
+          <p:nvPr/>
+        </p:nvSpPr>
+        <p:spPr>
+          <a:xfrm>
+            <a:off x="502920" y="1463040"/>
+            <a:ext cx="5577840" cy="3566160"/>
+          </a:xfrm>
+          <a:prstGeom prst="roundRect">
+            <a:avLst>
+              <a:gd name="adj" fmla="val 4500"/>
+            </a:avLst>
+          </a:prstGeom>
+          <a:solidFill>
+            <a:srgbClr val="FFFFFF"/>
+          </a:solidFill>
+          <a:ln w="12700">
+            <a:solidFill>
+              <a:srgbClr val="BFCDDA"/>
+            </a:solidFill>
+          </a:ln>
+          <a:effectLst/>
+        </p:spPr>
+        <p:style>
+          <a:lnRef idx="1">
+            <a:schemeClr val="accent1"/>
+          </a:lnRef>
+          <a:fillRef idx="3">
+            <a:schemeClr val="accent1"/>
+          </a:fillRef>
+          <a:effectRef idx="2">
+            <a:schemeClr val="accent1"/>
+          </a:effectRef>
+          <a:fontRef idx="minor">
+            <a:schemeClr val="lt1"/>
+          </a:fontRef>
+        </p:style>
+        <p:txBody>
+          <a:bodyPr rtlCol="0" anchor="ctr"/>
+          <a:lstStyle/>
+          <a:p>
+            <a:pPr algn="ctr"/>
+          </a:p>
+        </p:txBody>
+      </p:sp>
+      <p:sp>
+        <p:nvSpPr>
+          <p:cNvPr id="6" name="Rounded Rectangle 5"/>
+          <p:cNvSpPr/>
+          <p:nvPr/>
+        </p:nvSpPr>
+        <p:spPr>
+          <a:xfrm>
+            <a:off x="502920" y="1463040"/>
+            <a:ext cx="5577840" cy="146304"/>
+          </a:xfrm>
+          <a:prstGeom prst="roundRect">
+            <a:avLst>
+              <a:gd name="adj" fmla="val 50000"/>
+            </a:avLst>
+          </a:prstGeom>
+          <a:solidFill>
+            <a:srgbClr val="002C5F"/>
+          </a:solidFill>
+          <a:ln>
+            <a:noFill/>
+          </a:ln>
+          <a:effectLst/>
+        </p:spPr>
+        <p:style>
+          <a:lnRef idx="1">
+            <a:schemeClr val="accent1"/>
+          </a:lnRef>
+          <a:fillRef idx="3">
+            <a:schemeClr val="accent1"/>
+          </a:fillRef>
+          <a:effectRef idx="2">
+            <a:schemeClr val="accent1"/>
+          </a:effectRef>
+          <a:fontRef idx="minor">
+            <a:schemeClr val="lt1"/>
+          </a:fontRef>
+        </p:style>
+        <p:txBody>
+          <a:bodyPr rtlCol="0" anchor="ctr"/>
+          <a:lstStyle/>
+          <a:p>
+            <a:pPr algn="ctr"/>
+          </a:p>
+        </p:txBody>
+      </p:sp>
+      <p:sp>
+        <p:nvSpPr>
+          <p:cNvPr id="7" name="TextBox 6"/>
+          <p:cNvSpPr txBox="1"/>
+          <p:nvPr/>
+        </p:nvSpPr>
+        <p:spPr>
+          <a:xfrm>
+            <a:off x="777240" y="1627632"/>
+            <a:ext cx="5029200" cy="320040"/>
+          </a:xfrm>
+          <a:prstGeom prst="rect">
+            <a:avLst/>
+          </a:prstGeom>
+          <a:noFill/>
+        </p:spPr>
+        <p:txBody>
+          <a:bodyPr wrap="square" anchor="t" lIns="25400" rIns="25400" tIns="12700" bIns="12700">
+            <a:spAutoFit/>
+          </a:bodyPr>
+          <a:lstStyle/>
+          <a:p>
+            <a:pPr algn="l"/>
+            <a:r>
+              <a:rPr sz="1500" b="1" i="0">
+                <a:solidFill>
+                  <a:srgbClr val="002C5F"/>
+                </a:solidFill>
+                <a:latin typeface="Calibri"/>
+              </a:rPr>
+              <a:t>Deliverables (this folder)</a:t>
+            </a:r>
+          </a:p>
+        </p:txBody>
+      </p:sp>
+      <p:sp>
+        <p:nvSpPr>
+          <p:cNvPr id="8" name="TextBox 7"/>
+          <p:cNvSpPr txBox="1"/>
+          <p:nvPr/>
+        </p:nvSpPr>
+        <p:spPr>
+          <a:xfrm>
+            <a:off x="822960" y="2103120"/>
+            <a:ext cx="5029200" cy="2743200"/>
+          </a:xfrm>
+          <a:prstGeom prst="rect">
+            <a:avLst/>
+          </a:prstGeom>
+          <a:noFill/>
+        </p:spPr>
+        <p:txBody>
+          <a:bodyPr wrap="square" lIns="25400" rIns="25400" tIns="12700" bIns="12700">
+            <a:spAutoFit/>
+          </a:bodyPr>
+          <a:lstStyle/>
+          <a:p>
+            <a:pPr marL="182880" indent="-182880">
+              <a:spcAft>
+                <a:spcPts val="600"/>
+              </a:spcAft>
+              <a:buFont typeface="Arial"/>
+              <a:buChar char="•"/>
+            </a:pPr>
+            <a:r>
+              <a:rPr sz="1300" b="0" i="0">
+                <a:solidFill>
+                  <a:srgbClr val="595959"/>
+                </a:solidFill>
+                <a:latin typeface="Calibri"/>
+              </a:rPr>
+              <a:t>AWS Architecture Design Document — PPTX (Week 1)</a:t>
+            </a:r>
+          </a:p>
+          <a:p>
+            <a:pPr marL="182880" indent="-182880">
+              <a:spcAft>
+                <a:spcPts val="600"/>
+              </a:spcAft>
+              <a:buFont typeface="Arial"/>
+              <a:buChar char="•"/>
+            </a:pPr>
+            <a:r>
+              <a:rPr sz="1300" b="0" i="0">
+                <a:solidFill>
+                  <a:srgbClr val="595959"/>
+                </a:solidFill>
+                <a:latin typeface="Calibri"/>
+              </a:rPr>
+              <a:t>AWS Infrastructure Resource Inventory — XLSX</a:t>
+            </a:r>
+          </a:p>
+          <a:p>
+            <a:pPr marL="182880" indent="-182880">
+              <a:spcAft>
+                <a:spcPts val="600"/>
+              </a:spcAft>
+              <a:buFont typeface="Arial"/>
+              <a:buChar char="•"/>
+            </a:pPr>
+            <a:r>
+              <a:rPr sz="1300" b="0" i="0">
+                <a:solidFill>
+                  <a:srgbClr val="595959"/>
+                </a:solidFill>
+                <a:latin typeface="Calibri"/>
+              </a:rPr>
+              <a:t>Administration Guide — DOCX</a:t>
+            </a:r>
+          </a:p>
+          <a:p>
+            <a:pPr marL="182880" indent="-182880">
+              <a:spcAft>
+                <a:spcPts val="600"/>
+              </a:spcAft>
+              <a:buFont typeface="Arial"/>
+              <a:buChar char="•"/>
+            </a:pPr>
+            <a:r>
+              <a:rPr sz="1300" b="0" i="0">
+                <a:solidFill>
+                  <a:srgbClr val="595959"/>
+                </a:solidFill>
+                <a:latin typeface="Calibri"/>
+              </a:rPr>
+              <a:t>Backup · MSSQL EC2 Recovery · VPN Configuration — DOCX</a:t>
+            </a:r>
+          </a:p>
+          <a:p>
+            <a:pPr marL="182880" indent="-182880">
+              <a:spcAft>
+                <a:spcPts val="600"/>
+              </a:spcAft>
+              <a:buFont typeface="Arial"/>
+              <a:buChar char="•"/>
+            </a:pPr>
+            <a:r>
+              <a:rPr sz="1300" b="0" i="0">
+                <a:solidFill>
+                  <a:srgbClr val="595959"/>
+                </a:solidFill>
+                <a:latin typeface="Calibri"/>
+              </a:rPr>
+              <a:t>Project Completion Checklist — XLSX</a:t>
+            </a:r>
+          </a:p>
+        </p:txBody>
+      </p:sp>
+      <p:sp>
+        <p:nvSpPr>
+          <p:cNvPr id="9" name="Rounded Rectangle 8"/>
+          <p:cNvSpPr/>
+          <p:nvPr/>
+        </p:nvSpPr>
+        <p:spPr>
+          <a:xfrm>
+            <a:off x="6355080" y="1463040"/>
+            <a:ext cx="5349240" cy="3566160"/>
+          </a:xfrm>
+          <a:prstGeom prst="roundRect">
+            <a:avLst>
+              <a:gd name="adj" fmla="val 4500"/>
+            </a:avLst>
+          </a:prstGeom>
+          <a:solidFill>
+            <a:srgbClr val="FFFFFF"/>
+          </a:solidFill>
+          <a:ln w="12700">
+            <a:solidFill>
+              <a:srgbClr val="BFCDDA"/>
+            </a:solidFill>
+          </a:ln>
+          <a:effectLst/>
+        </p:spPr>
+        <p:style>
+          <a:lnRef idx="1">
+            <a:schemeClr val="accent1"/>
+          </a:lnRef>
+          <a:fillRef idx="3">
+            <a:schemeClr val="accent1"/>
+          </a:fillRef>
+          <a:effectRef idx="2">
+            <a:schemeClr val="accent1"/>
+          </a:effectRef>
+          <a:fontRef idx="minor">
+            <a:schemeClr val="lt1"/>
+          </a:fontRef>
+        </p:style>
+        <p:txBody>
+          <a:bodyPr rtlCol="0" anchor="ctr"/>
+          <a:lstStyle/>
+          <a:p>
+            <a:pPr algn="ctr"/>
+          </a:p>
+        </p:txBody>
+      </p:sp>
+      <p:sp>
+        <p:nvSpPr>
+          <p:cNvPr id="10" name="Rounded Rectangle 9"/>
+          <p:cNvSpPr/>
+          <p:nvPr/>
+        </p:nvSpPr>
+        <p:spPr>
+          <a:xfrm>
+            <a:off x="6355080" y="1463040"/>
+            <a:ext cx="5349240" cy="146304"/>
+          </a:xfrm>
+          <a:prstGeom prst="roundRect">
+            <a:avLst>
+              <a:gd name="adj" fmla="val 50000"/>
+            </a:avLst>
+          </a:prstGeom>
+          <a:solidFill>
+            <a:srgbClr val="1E8449"/>
+          </a:solidFill>
+          <a:ln>
+            <a:noFill/>
+          </a:ln>
+          <a:effectLst/>
+        </p:spPr>
+        <p:style>
+          <a:lnRef idx="1">
+            <a:schemeClr val="accent1"/>
+          </a:lnRef>
+          <a:fillRef idx="3">
+            <a:schemeClr val="accent1"/>
+          </a:fillRef>
+          <a:effectRef idx="2">
+            <a:schemeClr val="accent1"/>
+          </a:effectRef>
+          <a:fontRef idx="minor">
+            <a:schemeClr val="lt1"/>
+          </a:fontRef>
+        </p:style>
+        <p:txBody>
+          <a:bodyPr rtlCol="0" anchor="ctr"/>
+          <a:lstStyle/>
+          <a:p>
+            <a:pPr algn="ctr"/>
+          </a:p>
+        </p:txBody>
+      </p:sp>
+      <p:sp>
+        <p:nvSpPr>
+          <p:cNvPr id="11" name="TextBox 10"/>
+          <p:cNvSpPr txBox="1"/>
+          <p:nvPr/>
+        </p:nvSpPr>
+        <p:spPr>
+          <a:xfrm>
+            <a:off x="6629400" y="1627632"/>
+            <a:ext cx="4846320" cy="320040"/>
+          </a:xfrm>
+          <a:prstGeom prst="rect">
+            <a:avLst/>
+          </a:prstGeom>
+          <a:noFill/>
+        </p:spPr>
+        <p:txBody>
+          <a:bodyPr wrap="square" anchor="t" lIns="25400" rIns="25400" tIns="12700" bIns="12700">
+            <a:spAutoFit/>
+          </a:bodyPr>
+          <a:lstStyle/>
+          <a:p>
+            <a:pPr algn="l"/>
+            <a:r>
+              <a:rPr sz="1500" b="1" i="0">
+                <a:solidFill>
+                  <a:srgbClr val="002C5F"/>
+                </a:solidFill>
+                <a:latin typeface="Calibri"/>
+              </a:rPr>
+              <a:t>Next steps</a:t>
+            </a:r>
+          </a:p>
+        </p:txBody>
+      </p:sp>
+      <p:sp>
+        <p:nvSpPr>
+          <p:cNvPr id="12" name="TextBox 11"/>
+          <p:cNvSpPr txBox="1"/>
+          <p:nvPr/>
+        </p:nvSpPr>
+        <p:spPr>
+          <a:xfrm>
+            <a:off x="6675120" y="2103120"/>
+            <a:ext cx="4846320" cy="2743200"/>
+          </a:xfrm>
+          <a:prstGeom prst="rect">
+            <a:avLst/>
+          </a:prstGeom>
+          <a:noFill/>
+        </p:spPr>
+        <p:txBody>
+          <a:bodyPr wrap="square" lIns="25400" rIns="25400" tIns="12700" bIns="12700">
+            <a:spAutoFit/>
+          </a:bodyPr>
+          <a:lstStyle/>
+          <a:p>
+            <a:pPr marL="182880" indent="-182880">
+              <a:spcAft>
+                <a:spcPts val="600"/>
+              </a:spcAft>
+              <a:buFont typeface="Arial"/>
+              <a:buChar char="•"/>
+            </a:pPr>
+            <a:r>
+              <a:rPr sz="1300" b="0" i="0">
+                <a:solidFill>
+                  <a:srgbClr val="595959"/>
+                </a:solidFill>
+                <a:latin typeface="Calibri"/>
+              </a:rPr>
+              <a:t>Week 1 — review &amp; approve the architecture deck</a:t>
+            </a:r>
+          </a:p>
+          <a:p>
+            <a:pPr marL="182880" indent="-182880">
+              <a:spcAft>
+                <a:spcPts val="600"/>
+              </a:spcAft>
+              <a:buFont typeface="Arial"/>
+              <a:buChar char="•"/>
+            </a:pPr>
+            <a:r>
+              <a:rPr sz="1300" b="0" i="0">
+                <a:solidFill>
+                  <a:srgbClr val="595959"/>
+                </a:solidFill>
+                <a:latin typeface="Calibri"/>
+              </a:rPr>
+              <a:t>Client — create Entra ID app and send Federation Metadata XML</a:t>
+            </a:r>
+          </a:p>
+          <a:p>
+            <a:pPr marL="182880" indent="-182880">
+              <a:spcAft>
+                <a:spcPts val="600"/>
+              </a:spcAft>
+              <a:buFont typeface="Arial"/>
+              <a:buChar char="•"/>
+            </a:pPr>
+            <a:r>
+              <a:rPr sz="1300" b="0" i="0">
+                <a:solidFill>
+                  <a:srgbClr val="595959"/>
+                </a:solidFill>
+                <a:latin typeface="Calibri"/>
+              </a:rPr>
+              <a:t>HMSG — issue / import ACM certificate, deploy the stack</a:t>
+            </a:r>
+          </a:p>
+          <a:p>
+            <a:pPr marL="182880" indent="-182880">
+              <a:spcAft>
+                <a:spcPts val="600"/>
+              </a:spcAft>
+              <a:buFont typeface="Arial"/>
+              <a:buChar char="•"/>
+            </a:pPr>
+            <a:r>
+              <a:rPr sz="1300" b="0" i="0">
+                <a:solidFill>
+                  <a:srgbClr val="595959"/>
+                </a:solidFill>
+                <a:latin typeface="Calibri"/>
+              </a:rPr>
+              <a:t>HMSG — stage SQL media and hand the host over for SQL installation</a:t>
+            </a:r>
+          </a:p>
+          <a:p>
+            <a:pPr marL="182880" indent="-182880">
+              <a:spcAft>
+                <a:spcPts val="600"/>
+              </a:spcAft>
+              <a:buFont typeface="Arial"/>
+              <a:buChar char="•"/>
+            </a:pPr>
+            <a:r>
+              <a:rPr sz="1300" b="0" i="0">
+                <a:solidFill>
+                  <a:srgbClr val="595959"/>
+                </a:solidFill>
+                <a:latin typeface="Calibri"/>
+              </a:rPr>
+              <a:t>Close-out — handover docs, remove temporary access, sign-off</a:t>
+            </a:r>
+          </a:p>
+        </p:txBody>
+      </p:sp>
+      <p:sp>
+        <p:nvSpPr>
+          <p:cNvPr id="13" name="TextBox 12"/>
+          <p:cNvSpPr txBox="1"/>
+          <p:nvPr/>
+        </p:nvSpPr>
+        <p:spPr>
+          <a:xfrm>
+            <a:off x="502920" y="5806440"/>
+            <a:ext cx="11155680" cy="365760"/>
+          </a:xfrm>
+          <a:prstGeom prst="rect">
+            <a:avLst/>
+          </a:prstGeom>
+          <a:noFill/>
+        </p:spPr>
+        <p:txBody>
+          <a:bodyPr wrap="square" anchor="t" lIns="25400" rIns="25400" tIns="12700" bIns="12700">
+            <a:spAutoFit/>
+          </a:bodyPr>
+          <a:lstStyle/>
+          <a:p>
+            <a:pPr algn="l"/>
+            <a:r>
+              <a:rPr sz="1100" b="0" i="0">
+                <a:solidFill>
+                  <a:srgbClr val="9AA7B4"/>
+                </a:solidFill>
+                <a:latin typeface="Calibri"/>
+              </a:rPr>
+              <a:t>Version-controlled in the project repository (main) · generated 19 August 2026</a:t>
+            </a:r>
+          </a:p>
+        </p:txBody>
+      </p:sp>
+      <p:sp>
+        <p:nvSpPr>
+          <p:cNvPr id="14" name="TextBox 13"/>
+          <p:cNvSpPr txBox="1"/>
+          <p:nvPr/>
+        </p:nvSpPr>
+        <p:spPr>
+          <a:xfrm>
+            <a:off x="502920" y="6473952"/>
+            <a:ext cx="8229600" cy="274320"/>
+          </a:xfrm>
+          <a:prstGeom prst="rect">
+            <a:avLst/>
+          </a:prstGeom>
+          <a:noFill/>
+        </p:spPr>
+        <p:txBody>
+          <a:bodyPr wrap="square" anchor="t" lIns="25400" rIns="25400" tIns="12700" bIns="12700">
+            <a:spAutoFit/>
+          </a:bodyPr>
+          <a:lstStyle/>
+          <a:p>
+            <a:pPr algn="l"/>
+            <a:r>
+              <a:rPr sz="900" b="0" i="0">
+                <a:solidFill>
+                  <a:srgbClr val="9AA7B4"/>
+                </a:solidFill>
+                <a:latin typeface="Calibri"/>
+              </a:rPr>
+              <a:t>HMSG WEC Racing · hmsg-rac-prd · eu-central-1 (Frankfurt)</a:t>
+            </a:r>
+          </a:p>
+        </p:txBody>
+      </p:sp>
+      <p:sp>
+        <p:nvSpPr>
+          <p:cNvPr id="15" name="TextBox 14"/>
+          <p:cNvSpPr txBox="1"/>
+          <p:nvPr/>
+        </p:nvSpPr>
+        <p:spPr>
+          <a:xfrm>
+            <a:off x="10332720" y="6473952"/>
+            <a:ext cx="1371600" cy="274320"/>
+          </a:xfrm>
+          <a:prstGeom prst="rect">
+            <a:avLst/>
+          </a:prstGeom>
+          <a:noFill/>
+        </p:spPr>
+        <p:txBody>
+          <a:bodyPr wrap="square" anchor="t" lIns="25400" rIns="25400" tIns="12700" bIns="12700">
+            <a:spAutoFit/>
+          </a:bodyPr>
+          <a:lstStyle/>
+          <a:p>
+            <a:pPr algn="r"/>
+            <a:r>
+              <a:rPr sz="900" b="0" i="0">
+                <a:solidFill>
+                  <a:srgbClr val="9AA7B4"/>
+                </a:solidFill>
+                <a:latin typeface="Calibri"/>
+              </a:rPr>
+              <a:t>08 / 08</a:t>
             </a:r>
           </a:p>
         </p:txBody>

--- a/deliverables/AWS-Architecture-Design-Document.pptx
+++ b/deliverables/AWS-Architecture-Design-Document.pptx
@@ -5982,18 +5982,440 @@
       </p:sp>
       <p:sp>
         <p:nvSpPr>
-          <p:cNvPr id="17" name="Rounded Rectangle 16"/>
+          <p:cNvPr id="17" name="TextBox 16"/>
+          <p:cNvSpPr txBox="1"/>
+          <p:nvPr/>
+        </p:nvSpPr>
+        <p:spPr>
+          <a:xfrm>
+            <a:off x="3063240" y="5468112"/>
+            <a:ext cx="6035040" cy="274320"/>
+          </a:xfrm>
+          <a:prstGeom prst="rect">
+            <a:avLst/>
+          </a:prstGeom>
+          <a:noFill/>
+        </p:spPr>
+        <p:txBody>
+          <a:bodyPr wrap="square" anchor="t" lIns="25400" rIns="25400" tIns="12700" bIns="12700">
+            <a:spAutoFit/>
+          </a:bodyPr>
+          <a:lstStyle/>
+          <a:p>
+            <a:pPr algn="l"/>
+            <a:r>
+              <a:rPr sz="1000" b="0" i="0">
+                <a:solidFill>
+                  <a:srgbClr val="9AA7B4"/>
+                </a:solidFill>
+                <a:latin typeface="Calibri"/>
+              </a:rPr>
+              <a:t>Client VPN logs → CloudWatch (90 d) · AWS API access via VPC interface endpoints only</a:t>
+            </a:r>
+          </a:p>
+        </p:txBody>
+      </p:sp>
+      <p:sp>
+        <p:nvSpPr>
+          <p:cNvPr id="18" name="Rounded Rectangle 17"/>
           <p:cNvSpPr/>
           <p:nvPr/>
         </p:nvSpPr>
         <p:spPr>
           <a:xfrm>
-            <a:off x="7616952" y="4864608"/>
-            <a:ext cx="1426464" cy="457200"/>
+            <a:off x="9555480" y="2377440"/>
+            <a:ext cx="2331720" cy="960120"/>
+          </a:xfrm>
+          <a:prstGeom prst="roundRect">
+            <a:avLst>
+              <a:gd name="adj" fmla="val 8000"/>
+            </a:avLst>
+          </a:prstGeom>
+          <a:solidFill>
+            <a:srgbClr val="F2F2F2"/>
+          </a:solidFill>
+          <a:ln w="12700">
+            <a:solidFill>
+              <a:srgbClr val="595959"/>
+            </a:solidFill>
+          </a:ln>
+          <a:effectLst/>
+        </p:spPr>
+        <p:style>
+          <a:lnRef idx="1">
+            <a:schemeClr val="accent1"/>
+          </a:lnRef>
+          <a:fillRef idx="3">
+            <a:schemeClr val="accent1"/>
+          </a:fillRef>
+          <a:effectRef idx="2">
+            <a:schemeClr val="accent1"/>
+          </a:effectRef>
+          <a:fontRef idx="minor">
+            <a:schemeClr val="lt1"/>
+          </a:fontRef>
+        </p:style>
+        <p:txBody>
+          <a:bodyPr rtlCol="0" anchor="ctr"/>
+          <a:lstStyle/>
+          <a:p>
+            <a:pPr algn="ctr"/>
+          </a:p>
+        </p:txBody>
+      </p:sp>
+      <p:sp>
+        <p:nvSpPr>
+          <p:cNvPr id="19" name="TextBox 18"/>
+          <p:cNvSpPr txBox="1"/>
+          <p:nvPr/>
+        </p:nvSpPr>
+        <p:spPr>
+          <a:xfrm>
+            <a:off x="9692640" y="2487168"/>
+            <a:ext cx="2103120" cy="292608"/>
+          </a:xfrm>
+          <a:prstGeom prst="rect">
+            <a:avLst/>
+          </a:prstGeom>
+          <a:noFill/>
+        </p:spPr>
+        <p:txBody>
+          <a:bodyPr wrap="square" anchor="t" lIns="25400" rIns="25400" tIns="12700" bIns="12700">
+            <a:spAutoFit/>
+          </a:bodyPr>
+          <a:lstStyle/>
+          <a:p>
+            <a:pPr algn="l"/>
+            <a:r>
+              <a:rPr sz="1300" b="1" i="0">
+                <a:solidFill>
+                  <a:srgbClr val="002C5F"/>
+                </a:solidFill>
+                <a:latin typeface="Calibri"/>
+              </a:rPr>
+              <a:t>On-prem racing site</a:t>
+            </a:r>
+          </a:p>
+        </p:txBody>
+      </p:sp>
+      <p:sp>
+        <p:nvSpPr>
+          <p:cNvPr id="20" name="TextBox 19"/>
+          <p:cNvSpPr txBox="1"/>
+          <p:nvPr/>
+        </p:nvSpPr>
+        <p:spPr>
+          <a:xfrm>
+            <a:off x="9692640" y="2788920"/>
+            <a:ext cx="2103120" cy="457200"/>
+          </a:xfrm>
+          <a:prstGeom prst="rect">
+            <a:avLst/>
+          </a:prstGeom>
+          <a:noFill/>
+        </p:spPr>
+        <p:txBody>
+          <a:bodyPr wrap="square" anchor="t" lIns="25400" rIns="25400" tIns="12700" bIns="12700">
+            <a:spAutoFit/>
+          </a:bodyPr>
+          <a:lstStyle/>
+          <a:p>
+            <a:pPr algn="l"/>
+            <a:r>
+              <a:rPr sz="1050" b="0" i="0">
+                <a:solidFill>
+                  <a:srgbClr val="595959"/>
+                </a:solidFill>
+                <a:latin typeface="Calibri"/>
+              </a:rPr>
+              <a:t>Hyundai firewall</a:t>
+            </a:r>
+          </a:p>
+          <a:p>
+            <a:pPr algn="l"/>
+            <a:r>
+              <a:rPr sz="1050" b="0" i="0">
+                <a:solidFill>
+                  <a:srgbClr val="595959"/>
+                </a:solidFill>
+                <a:latin typeface="Calibri"/>
+              </a:rPr>
+              <a:t>IPsec.1 · static</a:t>
+            </a:r>
+          </a:p>
+        </p:txBody>
+      </p:sp>
+      <p:sp>
+        <p:nvSpPr>
+          <p:cNvPr id="21" name="Rounded Rectangle 20"/>
+          <p:cNvSpPr/>
+          <p:nvPr/>
+        </p:nvSpPr>
+        <p:spPr>
+          <a:xfrm>
+            <a:off x="9317736" y="3035808"/>
+            <a:ext cx="502920" cy="274320"/>
           </a:xfrm>
           <a:prstGeom prst="roundRect">
             <a:avLst>
               <a:gd name="adj" fmla="val 50000"/>
+            </a:avLst>
+          </a:prstGeom>
+          <a:solidFill>
+            <a:srgbClr val="002C5F"/>
+          </a:solidFill>
+          <a:ln>
+            <a:noFill/>
+          </a:ln>
+          <a:effectLst/>
+        </p:spPr>
+        <p:style>
+          <a:lnRef idx="1">
+            <a:schemeClr val="accent1"/>
+          </a:lnRef>
+          <a:fillRef idx="3">
+            <a:schemeClr val="accent1"/>
+          </a:fillRef>
+          <a:effectRef idx="2">
+            <a:schemeClr val="accent1"/>
+          </a:effectRef>
+          <a:fontRef idx="minor">
+            <a:schemeClr val="lt1"/>
+          </a:fontRef>
+        </p:style>
+        <p:txBody>
+          <a:bodyPr rtlCol="0" anchor="ctr" wrap="square" lIns="38100" rIns="38100"/>
+          <a:lstStyle/>
+          <a:p>
+            <a:pPr algn="ctr"/>
+            <a:r>
+              <a:rPr sz="900" b="1" i="0">
+                <a:solidFill>
+                  <a:srgbClr val="FFFFFF"/>
+                </a:solidFill>
+                <a:latin typeface="Calibri"/>
+              </a:rPr>
+              <a:t>VGW</a:t>
+            </a:r>
+          </a:p>
+        </p:txBody>
+      </p:sp>
+      <p:cxnSp>
+        <p:nvCxnSpPr>
+          <p:cNvPr id="22" name="Connector 21"/>
+          <p:cNvCxnSpPr/>
+          <p:nvPr/>
+        </p:nvCxnSpPr>
+        <p:spPr>
+          <a:xfrm>
+            <a:off x="9555480" y="2862072"/>
+            <a:ext cx="155448" cy="292608"/>
+          </a:xfrm>
+          <a:prstGeom prst="line">
+            <a:avLst/>
+          </a:prstGeom>
+          <a:ln w="22225">
+            <a:solidFill>
+              <a:srgbClr val="595959"/>
+            </a:solidFill>
+            <a:prstDash val="dash"/>
+            <a:tailEnd type="triangle" w="med" len="med"/>
+          </a:ln>
+        </p:spPr>
+        <p:style>
+          <a:lnRef idx="2">
+            <a:schemeClr val="accent1"/>
+          </a:lnRef>
+          <a:fillRef idx="0">
+            <a:schemeClr val="accent1"/>
+          </a:fillRef>
+          <a:effectRef idx="1">
+            <a:schemeClr val="accent1"/>
+          </a:effectRef>
+          <a:fontRef idx="minor">
+            <a:schemeClr val="tx1"/>
+          </a:fontRef>
+        </p:style>
+      </p:cxnSp>
+      <p:sp>
+        <p:nvSpPr>
+          <p:cNvPr id="23" name="TextBox 22"/>
+          <p:cNvSpPr txBox="1"/>
+          <p:nvPr/>
+        </p:nvSpPr>
+        <p:spPr>
+          <a:xfrm>
+            <a:off x="9464040" y="3429000"/>
+            <a:ext cx="2377440" cy="502920"/>
+          </a:xfrm>
+          <a:prstGeom prst="rect">
+            <a:avLst/>
+          </a:prstGeom>
+          <a:noFill/>
+        </p:spPr>
+        <p:txBody>
+          <a:bodyPr wrap="square" anchor="t" lIns="25400" rIns="25400" tIns="12700" bIns="12700">
+            <a:spAutoFit/>
+          </a:bodyPr>
+          <a:lstStyle/>
+          <a:p>
+            <a:pPr algn="l"/>
+            <a:r>
+              <a:rPr sz="1000" b="0" i="0">
+                <a:solidFill>
+                  <a:srgbClr val="9AA7B4"/>
+                </a:solidFill>
+                <a:latin typeface="Calibri"/>
+              </a:rPr>
+              <a:t>Site-to-Site VPN</a:t>
+            </a:r>
+          </a:p>
+          <a:p>
+            <a:pPr algn="l"/>
+            <a:r>
+              <a:rPr sz="1000" b="0" i="0">
+                <a:solidFill>
+                  <a:srgbClr val="9AA7B4"/>
+                </a:solidFill>
+                <a:latin typeface="Calibri"/>
+              </a:rPr>
+              <a:t>only when on-prem values are supplied</a:t>
+            </a:r>
+          </a:p>
+        </p:txBody>
+      </p:sp>
+      <p:sp>
+        <p:nvSpPr>
+          <p:cNvPr id="24" name="Rounded Rectangle 23"/>
+          <p:cNvSpPr/>
+          <p:nvPr/>
+        </p:nvSpPr>
+        <p:spPr>
+          <a:xfrm>
+            <a:off x="457200" y="1920240"/>
+            <a:ext cx="2011680" cy="822960"/>
+          </a:xfrm>
+          <a:prstGeom prst="roundRect">
+            <a:avLst>
+              <a:gd name="adj" fmla="val 8000"/>
+            </a:avLst>
+          </a:prstGeom>
+          <a:solidFill>
+            <a:srgbClr val="F2F2F2"/>
+          </a:solidFill>
+          <a:ln w="12700">
+            <a:solidFill>
+              <a:srgbClr val="595959"/>
+            </a:solidFill>
+          </a:ln>
+          <a:effectLst/>
+        </p:spPr>
+        <p:style>
+          <a:lnRef idx="1">
+            <a:schemeClr val="accent1"/>
+          </a:lnRef>
+          <a:fillRef idx="3">
+            <a:schemeClr val="accent1"/>
+          </a:fillRef>
+          <a:effectRef idx="2">
+            <a:schemeClr val="accent1"/>
+          </a:effectRef>
+          <a:fontRef idx="minor">
+            <a:schemeClr val="lt1"/>
+          </a:fontRef>
+        </p:style>
+        <p:txBody>
+          <a:bodyPr rtlCol="0" anchor="ctr"/>
+          <a:lstStyle/>
+          <a:p>
+            <a:pPr algn="ctr"/>
+          </a:p>
+        </p:txBody>
+      </p:sp>
+      <p:sp>
+        <p:nvSpPr>
+          <p:cNvPr id="25" name="TextBox 24"/>
+          <p:cNvSpPr txBox="1"/>
+          <p:nvPr/>
+        </p:nvSpPr>
+        <p:spPr>
+          <a:xfrm>
+            <a:off x="594360" y="2029968"/>
+            <a:ext cx="1783080" cy="274320"/>
+          </a:xfrm>
+          <a:prstGeom prst="rect">
+            <a:avLst/>
+          </a:prstGeom>
+          <a:noFill/>
+        </p:spPr>
+        <p:txBody>
+          <a:bodyPr wrap="square" anchor="t" lIns="25400" rIns="25400" tIns="12700" bIns="12700">
+            <a:spAutoFit/>
+          </a:bodyPr>
+          <a:lstStyle/>
+          <a:p>
+            <a:pPr algn="l"/>
+            <a:r>
+              <a:rPr sz="1300" b="1" i="0">
+                <a:solidFill>
+                  <a:srgbClr val="002C5F"/>
+                </a:solidFill>
+                <a:latin typeface="Calibri"/>
+              </a:rPr>
+              <a:t>Developers (≤10)</a:t>
+            </a:r>
+          </a:p>
+        </p:txBody>
+      </p:sp>
+      <p:sp>
+        <p:nvSpPr>
+          <p:cNvPr id="26" name="TextBox 25"/>
+          <p:cNvSpPr txBox="1"/>
+          <p:nvPr/>
+        </p:nvSpPr>
+        <p:spPr>
+          <a:xfrm>
+            <a:off x="594360" y="2331720"/>
+            <a:ext cx="1783080" cy="365760"/>
+          </a:xfrm>
+          <a:prstGeom prst="rect">
+            <a:avLst/>
+          </a:prstGeom>
+          <a:noFill/>
+        </p:spPr>
+        <p:txBody>
+          <a:bodyPr wrap="square" anchor="t" lIns="25400" rIns="25400" tIns="12700" bIns="12700">
+            <a:spAutoFit/>
+          </a:bodyPr>
+          <a:lstStyle/>
+          <a:p>
+            <a:pPr algn="l"/>
+            <a:r>
+              <a:rPr sz="1050" b="0" i="0">
+                <a:solidFill>
+                  <a:srgbClr val="595959"/>
+                </a:solidFill>
+                <a:latin typeface="Calibri"/>
+              </a:rPr>
+              <a:t>Entra ID SSO · MFA</a:t>
+            </a:r>
+          </a:p>
+        </p:txBody>
+      </p:sp>
+      <p:sp>
+        <p:nvSpPr>
+          <p:cNvPr id="27" name="Rounded Rectangle 26"/>
+          <p:cNvSpPr/>
+          <p:nvPr/>
+        </p:nvSpPr>
+        <p:spPr>
+          <a:xfrm>
+            <a:off x="457200" y="3291840"/>
+            <a:ext cx="2011680" cy="1005840"/>
+          </a:xfrm>
+          <a:prstGeom prst="roundRect">
+            <a:avLst>
+              <a:gd name="adj" fmla="val 8000"/>
             </a:avLst>
           </a:prstGeom>
           <a:solidFill>
@@ -6021,32 +6443,23 @@
           </a:fontRef>
         </p:style>
         <p:txBody>
-          <a:bodyPr rtlCol="0" anchor="ctr" wrap="square" lIns="38100" rIns="38100"/>
+          <a:bodyPr rtlCol="0" anchor="ctr"/>
           <a:lstStyle/>
           <a:p>
             <a:pPr algn="ctr"/>
-            <a:r>
-              <a:rPr sz="1100" b="1" i="0">
-                <a:solidFill>
-                  <a:srgbClr val="002C5F"/>
-                </a:solidFill>
-                <a:latin typeface="Calibri"/>
-              </a:rPr>
-              <a:t>S3 — flow logs</a:t>
-            </a:r>
-          </a:p>
-        </p:txBody>
-      </p:sp>
-      <p:sp>
-        <p:nvSpPr>
-          <p:cNvPr id="18" name="TextBox 17"/>
+          </a:p>
+        </p:txBody>
+      </p:sp>
+      <p:sp>
+        <p:nvSpPr>
+          <p:cNvPr id="28" name="TextBox 27"/>
           <p:cNvSpPr txBox="1"/>
           <p:nvPr/>
         </p:nvSpPr>
         <p:spPr>
           <a:xfrm>
-            <a:off x="3063240" y="5468112"/>
-            <a:ext cx="6035040" cy="274320"/>
+            <a:off x="594360" y="3401568"/>
+            <a:ext cx="1783080" cy="274320"/>
           </a:xfrm>
           <a:prstGeom prst="rect">
             <a:avLst/>
@@ -6061,75 +6474,27 @@
           <a:p>
             <a:pPr algn="l"/>
             <a:r>
-              <a:rPr sz="1000" b="0" i="0">
-                <a:solidFill>
-                  <a:srgbClr val="9AA7B4"/>
-                </a:solidFill>
-                <a:latin typeface="Calibri"/>
-              </a:rPr>
-              <a:t>Flow logs → S3 (lifecycle 30d → Glacier, expire 1y) · Client VPN logs → CloudWatch (90d)</a:t>
-            </a:r>
-          </a:p>
-        </p:txBody>
-      </p:sp>
-      <p:sp>
-        <p:nvSpPr>
-          <p:cNvPr id="19" name="Rounded Rectangle 18"/>
-          <p:cNvSpPr/>
-          <p:nvPr/>
-        </p:nvSpPr>
-        <p:spPr>
-          <a:xfrm>
-            <a:off x="9555480" y="2377440"/>
-            <a:ext cx="2331720" cy="960120"/>
-          </a:xfrm>
-          <a:prstGeom prst="roundRect">
-            <a:avLst>
-              <a:gd name="adj" fmla="val 8000"/>
-            </a:avLst>
-          </a:prstGeom>
-          <a:solidFill>
-            <a:srgbClr val="F2F2F2"/>
-          </a:solidFill>
-          <a:ln w="12700">
-            <a:solidFill>
-              <a:srgbClr val="595959"/>
-            </a:solidFill>
-          </a:ln>
-          <a:effectLst/>
-        </p:spPr>
-        <p:style>
-          <a:lnRef idx="1">
-            <a:schemeClr val="accent1"/>
-          </a:lnRef>
-          <a:fillRef idx="3">
-            <a:schemeClr val="accent1"/>
-          </a:fillRef>
-          <a:effectRef idx="2">
-            <a:schemeClr val="accent1"/>
-          </a:effectRef>
-          <a:fontRef idx="minor">
-            <a:schemeClr val="lt1"/>
-          </a:fontRef>
-        </p:style>
-        <p:txBody>
-          <a:bodyPr rtlCol="0" anchor="ctr"/>
-          <a:lstStyle/>
-          <a:p>
-            <a:pPr algn="ctr"/>
-          </a:p>
-        </p:txBody>
-      </p:sp>
-      <p:sp>
-        <p:nvSpPr>
-          <p:cNvPr id="20" name="TextBox 19"/>
+              <a:rPr sz="1300" b="1" i="0">
+                <a:solidFill>
+                  <a:srgbClr val="002C5F"/>
+                </a:solidFill>
+                <a:latin typeface="Calibri"/>
+              </a:rPr>
+              <a:t>AWS Client VPN</a:t>
+            </a:r>
+          </a:p>
+        </p:txBody>
+      </p:sp>
+      <p:sp>
+        <p:nvSpPr>
+          <p:cNvPr id="29" name="TextBox 28"/>
           <p:cNvSpPr txBox="1"/>
           <p:nvPr/>
         </p:nvSpPr>
         <p:spPr>
           <a:xfrm>
-            <a:off x="9692640" y="2487168"/>
-            <a:ext cx="2103120" cy="292608"/>
+            <a:off x="594360" y="3703320"/>
+            <a:ext cx="1783080" cy="502920"/>
           </a:xfrm>
           <a:prstGeom prst="rect">
             <a:avLst/>
@@ -6144,38 +6509,15 @@
           <a:p>
             <a:pPr algn="l"/>
             <a:r>
-              <a:rPr sz="1300" b="1" i="0">
-                <a:solidFill>
-                  <a:srgbClr val="002C5F"/>
-                </a:solidFill>
-                <a:latin typeface="Calibri"/>
-              </a:rPr>
-              <a:t>On-prem racing site</a:t>
-            </a:r>
-          </a:p>
-        </p:txBody>
-      </p:sp>
-      <p:sp>
-        <p:nvSpPr>
-          <p:cNvPr id="21" name="TextBox 20"/>
-          <p:cNvSpPr txBox="1"/>
-          <p:nvPr/>
-        </p:nvSpPr>
-        <p:spPr>
-          <a:xfrm>
-            <a:off x="9692640" y="2788920"/>
-            <a:ext cx="2103120" cy="457200"/>
-          </a:xfrm>
-          <a:prstGeom prst="rect">
-            <a:avLst/>
-          </a:prstGeom>
-          <a:noFill/>
-        </p:spPr>
-        <p:txBody>
-          <a:bodyPr wrap="square" anchor="t" lIns="25400" rIns="25400" tIns="12700" bIns="12700">
-            <a:spAutoFit/>
-          </a:bodyPr>
-          <a:lstStyle/>
+              <a:rPr sz="1050" b="0" i="0">
+                <a:solidFill>
+                  <a:srgbClr val="595959"/>
+                </a:solidFill>
+                <a:latin typeface="Calibri"/>
+              </a:rPr>
+              <a:t>UDP 443 · SAML</a:t>
+            </a:r>
+          </a:p>
           <a:p>
             <a:pPr algn="l"/>
             <a:r>
@@ -6185,413 +6527,14 @@
                 </a:solidFill>
                 <a:latin typeface="Calibri"/>
               </a:rPr>
-              <a:t>Hyundai firewall</a:t>
-            </a:r>
-          </a:p>
-          <a:p>
-            <a:pPr algn="l"/>
-            <a:r>
-              <a:rPr sz="1050" b="0" i="0">
-                <a:solidFill>
-                  <a:srgbClr val="595959"/>
-                </a:solidFill>
-                <a:latin typeface="Calibri"/>
-              </a:rPr>
-              <a:t>IPsec.1 · static</a:t>
-            </a:r>
-          </a:p>
-        </p:txBody>
-      </p:sp>
-      <p:sp>
-        <p:nvSpPr>
-          <p:cNvPr id="22" name="Rounded Rectangle 21"/>
-          <p:cNvSpPr/>
-          <p:nvPr/>
-        </p:nvSpPr>
-        <p:spPr>
-          <a:xfrm>
-            <a:off x="9317736" y="3035808"/>
-            <a:ext cx="502920" cy="274320"/>
-          </a:xfrm>
-          <a:prstGeom prst="roundRect">
-            <a:avLst>
-              <a:gd name="adj" fmla="val 50000"/>
-            </a:avLst>
-          </a:prstGeom>
-          <a:solidFill>
-            <a:srgbClr val="002C5F"/>
-          </a:solidFill>
-          <a:ln>
-            <a:noFill/>
-          </a:ln>
-          <a:effectLst/>
-        </p:spPr>
-        <p:style>
-          <a:lnRef idx="1">
-            <a:schemeClr val="accent1"/>
-          </a:lnRef>
-          <a:fillRef idx="3">
-            <a:schemeClr val="accent1"/>
-          </a:fillRef>
-          <a:effectRef idx="2">
-            <a:schemeClr val="accent1"/>
-          </a:effectRef>
-          <a:fontRef idx="minor">
-            <a:schemeClr val="lt1"/>
-          </a:fontRef>
-        </p:style>
-        <p:txBody>
-          <a:bodyPr rtlCol="0" anchor="ctr" wrap="square" lIns="38100" rIns="38100"/>
-          <a:lstStyle/>
-          <a:p>
-            <a:pPr algn="ctr"/>
-            <a:r>
-              <a:rPr sz="900" b="1" i="0">
-                <a:solidFill>
-                  <a:srgbClr val="FFFFFF"/>
-                </a:solidFill>
-                <a:latin typeface="Calibri"/>
-              </a:rPr>
-              <a:t>VGW</a:t>
+              <a:t>split tunnel</a:t>
             </a:r>
           </a:p>
         </p:txBody>
       </p:sp>
       <p:cxnSp>
         <p:nvCxnSpPr>
-          <p:cNvPr id="23" name="Connector 22"/>
-          <p:cNvCxnSpPr/>
-          <p:nvPr/>
-        </p:nvCxnSpPr>
-        <p:spPr>
-          <a:xfrm>
-            <a:off x="9555480" y="2862072"/>
-            <a:ext cx="155448" cy="292608"/>
-          </a:xfrm>
-          <a:prstGeom prst="line">
-            <a:avLst/>
-          </a:prstGeom>
-          <a:ln w="22225">
-            <a:solidFill>
-              <a:srgbClr val="595959"/>
-            </a:solidFill>
-            <a:prstDash val="dash"/>
-            <a:tailEnd type="triangle" w="med" len="med"/>
-          </a:ln>
-        </p:spPr>
-        <p:style>
-          <a:lnRef idx="2">
-            <a:schemeClr val="accent1"/>
-          </a:lnRef>
-          <a:fillRef idx="0">
-            <a:schemeClr val="accent1"/>
-          </a:fillRef>
-          <a:effectRef idx="1">
-            <a:schemeClr val="accent1"/>
-          </a:effectRef>
-          <a:fontRef idx="minor">
-            <a:schemeClr val="tx1"/>
-          </a:fontRef>
-        </p:style>
-      </p:cxnSp>
-      <p:sp>
-        <p:nvSpPr>
-          <p:cNvPr id="24" name="TextBox 23"/>
-          <p:cNvSpPr txBox="1"/>
-          <p:nvPr/>
-        </p:nvSpPr>
-        <p:spPr>
-          <a:xfrm>
-            <a:off x="9464040" y="3429000"/>
-            <a:ext cx="2377440" cy="502920"/>
-          </a:xfrm>
-          <a:prstGeom prst="rect">
-            <a:avLst/>
-          </a:prstGeom>
-          <a:noFill/>
-        </p:spPr>
-        <p:txBody>
-          <a:bodyPr wrap="square" anchor="t" lIns="25400" rIns="25400" tIns="12700" bIns="12700">
-            <a:spAutoFit/>
-          </a:bodyPr>
-          <a:lstStyle/>
-          <a:p>
-            <a:pPr algn="l"/>
-            <a:r>
-              <a:rPr sz="1000" b="0" i="0">
-                <a:solidFill>
-                  <a:srgbClr val="9AA7B4"/>
-                </a:solidFill>
-                <a:latin typeface="Calibri"/>
-              </a:rPr>
-              <a:t>Site-to-Site VPN</a:t>
-            </a:r>
-          </a:p>
-          <a:p>
-            <a:pPr algn="l"/>
-            <a:r>
-              <a:rPr sz="1000" b="0" i="0">
-                <a:solidFill>
-                  <a:srgbClr val="9AA7B4"/>
-                </a:solidFill>
-                <a:latin typeface="Calibri"/>
-              </a:rPr>
-              <a:t>only when on-prem values are supplied</a:t>
-            </a:r>
-          </a:p>
-        </p:txBody>
-      </p:sp>
-      <p:sp>
-        <p:nvSpPr>
-          <p:cNvPr id="25" name="Rounded Rectangle 24"/>
-          <p:cNvSpPr/>
-          <p:nvPr/>
-        </p:nvSpPr>
-        <p:spPr>
-          <a:xfrm>
-            <a:off x="457200" y="1920240"/>
-            <a:ext cx="2011680" cy="822960"/>
-          </a:xfrm>
-          <a:prstGeom prst="roundRect">
-            <a:avLst>
-              <a:gd name="adj" fmla="val 8000"/>
-            </a:avLst>
-          </a:prstGeom>
-          <a:solidFill>
-            <a:srgbClr val="F2F2F2"/>
-          </a:solidFill>
-          <a:ln w="12700">
-            <a:solidFill>
-              <a:srgbClr val="595959"/>
-            </a:solidFill>
-          </a:ln>
-          <a:effectLst/>
-        </p:spPr>
-        <p:style>
-          <a:lnRef idx="1">
-            <a:schemeClr val="accent1"/>
-          </a:lnRef>
-          <a:fillRef idx="3">
-            <a:schemeClr val="accent1"/>
-          </a:fillRef>
-          <a:effectRef idx="2">
-            <a:schemeClr val="accent1"/>
-          </a:effectRef>
-          <a:fontRef idx="minor">
-            <a:schemeClr val="lt1"/>
-          </a:fontRef>
-        </p:style>
-        <p:txBody>
-          <a:bodyPr rtlCol="0" anchor="ctr"/>
-          <a:lstStyle/>
-          <a:p>
-            <a:pPr algn="ctr"/>
-          </a:p>
-        </p:txBody>
-      </p:sp>
-      <p:sp>
-        <p:nvSpPr>
-          <p:cNvPr id="26" name="TextBox 25"/>
-          <p:cNvSpPr txBox="1"/>
-          <p:nvPr/>
-        </p:nvSpPr>
-        <p:spPr>
-          <a:xfrm>
-            <a:off x="594360" y="2029968"/>
-            <a:ext cx="1783080" cy="274320"/>
-          </a:xfrm>
-          <a:prstGeom prst="rect">
-            <a:avLst/>
-          </a:prstGeom>
-          <a:noFill/>
-        </p:spPr>
-        <p:txBody>
-          <a:bodyPr wrap="square" anchor="t" lIns="25400" rIns="25400" tIns="12700" bIns="12700">
-            <a:spAutoFit/>
-          </a:bodyPr>
-          <a:lstStyle/>
-          <a:p>
-            <a:pPr algn="l"/>
-            <a:r>
-              <a:rPr sz="1300" b="1" i="0">
-                <a:solidFill>
-                  <a:srgbClr val="002C5F"/>
-                </a:solidFill>
-                <a:latin typeface="Calibri"/>
-              </a:rPr>
-              <a:t>Developers (≤10)</a:t>
-            </a:r>
-          </a:p>
-        </p:txBody>
-      </p:sp>
-      <p:sp>
-        <p:nvSpPr>
-          <p:cNvPr id="27" name="TextBox 26"/>
-          <p:cNvSpPr txBox="1"/>
-          <p:nvPr/>
-        </p:nvSpPr>
-        <p:spPr>
-          <a:xfrm>
-            <a:off x="594360" y="2331720"/>
-            <a:ext cx="1783080" cy="365760"/>
-          </a:xfrm>
-          <a:prstGeom prst="rect">
-            <a:avLst/>
-          </a:prstGeom>
-          <a:noFill/>
-        </p:spPr>
-        <p:txBody>
-          <a:bodyPr wrap="square" anchor="t" lIns="25400" rIns="25400" tIns="12700" bIns="12700">
-            <a:spAutoFit/>
-          </a:bodyPr>
-          <a:lstStyle/>
-          <a:p>
-            <a:pPr algn="l"/>
-            <a:r>
-              <a:rPr sz="1050" b="0" i="0">
-                <a:solidFill>
-                  <a:srgbClr val="595959"/>
-                </a:solidFill>
-                <a:latin typeface="Calibri"/>
-              </a:rPr>
-              <a:t>Entra ID SSO · MFA</a:t>
-            </a:r>
-          </a:p>
-        </p:txBody>
-      </p:sp>
-      <p:sp>
-        <p:nvSpPr>
-          <p:cNvPr id="28" name="Rounded Rectangle 27"/>
-          <p:cNvSpPr/>
-          <p:nvPr/>
-        </p:nvSpPr>
-        <p:spPr>
-          <a:xfrm>
-            <a:off x="457200" y="3291840"/>
-            <a:ext cx="2011680" cy="1005840"/>
-          </a:xfrm>
-          <a:prstGeom prst="roundRect">
-            <a:avLst>
-              <a:gd name="adj" fmla="val 8000"/>
-            </a:avLst>
-          </a:prstGeom>
-          <a:solidFill>
-            <a:srgbClr val="E8F4FA"/>
-          </a:solidFill>
-          <a:ln w="12700">
-            <a:solidFill>
-              <a:srgbClr val="007FA8"/>
-            </a:solidFill>
-          </a:ln>
-          <a:effectLst/>
-        </p:spPr>
-        <p:style>
-          <a:lnRef idx="1">
-            <a:schemeClr val="accent1"/>
-          </a:lnRef>
-          <a:fillRef idx="3">
-            <a:schemeClr val="accent1"/>
-          </a:fillRef>
-          <a:effectRef idx="2">
-            <a:schemeClr val="accent1"/>
-          </a:effectRef>
-          <a:fontRef idx="minor">
-            <a:schemeClr val="lt1"/>
-          </a:fontRef>
-        </p:style>
-        <p:txBody>
-          <a:bodyPr rtlCol="0" anchor="ctr"/>
-          <a:lstStyle/>
-          <a:p>
-            <a:pPr algn="ctr"/>
-          </a:p>
-        </p:txBody>
-      </p:sp>
-      <p:sp>
-        <p:nvSpPr>
-          <p:cNvPr id="29" name="TextBox 28"/>
-          <p:cNvSpPr txBox="1"/>
-          <p:nvPr/>
-        </p:nvSpPr>
-        <p:spPr>
-          <a:xfrm>
-            <a:off x="594360" y="3401568"/>
-            <a:ext cx="1783080" cy="274320"/>
-          </a:xfrm>
-          <a:prstGeom prst="rect">
-            <a:avLst/>
-          </a:prstGeom>
-          <a:noFill/>
-        </p:spPr>
-        <p:txBody>
-          <a:bodyPr wrap="square" anchor="t" lIns="25400" rIns="25400" tIns="12700" bIns="12700">
-            <a:spAutoFit/>
-          </a:bodyPr>
-          <a:lstStyle/>
-          <a:p>
-            <a:pPr algn="l"/>
-            <a:r>
-              <a:rPr sz="1300" b="1" i="0">
-                <a:solidFill>
-                  <a:srgbClr val="002C5F"/>
-                </a:solidFill>
-                <a:latin typeface="Calibri"/>
-              </a:rPr>
-              <a:t>AWS Client VPN</a:t>
-            </a:r>
-          </a:p>
-        </p:txBody>
-      </p:sp>
-      <p:sp>
-        <p:nvSpPr>
-          <p:cNvPr id="30" name="TextBox 29"/>
-          <p:cNvSpPr txBox="1"/>
-          <p:nvPr/>
-        </p:nvSpPr>
-        <p:spPr>
-          <a:xfrm>
-            <a:off x="594360" y="3703320"/>
-            <a:ext cx="1783080" cy="502920"/>
-          </a:xfrm>
-          <a:prstGeom prst="rect">
-            <a:avLst/>
-          </a:prstGeom>
-          <a:noFill/>
-        </p:spPr>
-        <p:txBody>
-          <a:bodyPr wrap="square" anchor="t" lIns="25400" rIns="25400" tIns="12700" bIns="12700">
-            <a:spAutoFit/>
-          </a:bodyPr>
-          <a:lstStyle/>
-          <a:p>
-            <a:pPr algn="l"/>
-            <a:r>
-              <a:rPr sz="1050" b="0" i="0">
-                <a:solidFill>
-                  <a:srgbClr val="595959"/>
-                </a:solidFill>
-                <a:latin typeface="Calibri"/>
-              </a:rPr>
-              <a:t>UDP 443 · SAML</a:t>
-            </a:r>
-          </a:p>
-          <a:p>
-            <a:pPr algn="l"/>
-            <a:r>
-              <a:rPr sz="1050" b="0" i="0">
-                <a:solidFill>
-                  <a:srgbClr val="595959"/>
-                </a:solidFill>
-                <a:latin typeface="Calibri"/>
-              </a:rPr>
-              <a:t>split tunnel</a:t>
-            </a:r>
-          </a:p>
-        </p:txBody>
-      </p:sp>
-      <p:cxnSp>
-        <p:nvCxnSpPr>
-          <p:cNvPr id="31" name="Connector 30"/>
+          <p:cNvPr id="30" name="Connector 29"/>
           <p:cNvCxnSpPr/>
           <p:nvPr/>
         </p:nvCxnSpPr>
@@ -6627,7 +6570,7 @@
       </p:cxnSp>
       <p:cxnSp>
         <p:nvCxnSpPr>
-          <p:cNvPr id="32" name="Connector 31"/>
+          <p:cNvPr id="31" name="Connector 30"/>
           <p:cNvCxnSpPr/>
           <p:nvPr/>
         </p:nvCxnSpPr>
@@ -6663,7 +6606,7 @@
       </p:cxnSp>
       <p:sp>
         <p:nvSpPr>
-          <p:cNvPr id="33" name="TextBox 32"/>
+          <p:cNvPr id="32" name="TextBox 31"/>
           <p:cNvSpPr txBox="1"/>
           <p:nvPr/>
         </p:nvSpPr>
@@ -6710,7 +6653,7 @@
       </p:sp>
       <p:sp>
         <p:nvSpPr>
-          <p:cNvPr id="34" name="TextBox 33"/>
+          <p:cNvPr id="33" name="TextBox 32"/>
           <p:cNvSpPr txBox="1"/>
           <p:nvPr/>
         </p:nvSpPr>
@@ -6745,7 +6688,7 @@
       </p:sp>
       <p:sp>
         <p:nvSpPr>
-          <p:cNvPr id="35" name="TextBox 34"/>
+          <p:cNvPr id="34" name="TextBox 33"/>
           <p:cNvSpPr txBox="1"/>
           <p:nvPr/>
         </p:nvSpPr>
@@ -9972,7 +9915,7 @@
                 </a:solidFill>
                 <a:latin typeface="Calibri"/>
               </a:rPr>
-              <a:t>Flow logs → S3; Client VPN logs → CloudWatch</a:t>
+              <a:t>Client VPN logs → CloudWatch (90 d)</a:t>
             </a:r>
           </a:p>
           <a:p>

--- a/deliverables/AWS-Architecture-Design-Document.pptx
+++ b/deliverables/AWS-Architecture-Design-Document.pptx
@@ -3489,7 +3489,7 @@
                 </a:solidFill>
                 <a:latin typeface="Calibri"/>
               </a:rPr>
-              <a:t>Prepared by the HAEE Cloud Team · 19 August 2026</a:t>
+              <a:t>Prepared by the HAEE Cloud Team · 20 August 2026</a:t>
             </a:r>
           </a:p>
         </p:txBody>
@@ -10755,7 +10755,7 @@
                 </a:solidFill>
                 <a:latin typeface="Calibri"/>
               </a:rPr>
-              <a:t>Version-controlled in the project repository (main) · generated 19 August 2026</a:t>
+              <a:t>Version-controlled in the project repository (main) · generated 20 August 2026</a:t>
             </a:r>
           </a:p>
         </p:txBody>
